--- a/Community_Service_Presentation.pptx
+++ b/Community_Service_Presentation.pptx
@@ -4863,61 +4863,260 @@
       </p:pic>
       <p:sp>
         <p:nvSpPr>
-          <p:cNvPr id="6" name="TextBox 5">
-            <a:extLst>
-              <a:ext uri="{FF2B5EF4-FFF2-40B4-BE49-F238E27FC236}">
-                <a16:creationId xmlns:a16="http://schemas.microsoft.com/office/drawing/2014/main" id="{AE24D516-77C6-C96A-5F77-D099623448D8}"/>
-              </a:ext>
-            </a:extLst>
-          </p:cNvPr>
-          <p:cNvSpPr txBox="1"/>
+          <p:cNvPr id="10" name="Rounded Rectangle 9"/>
+          <p:cNvSpPr/>
           <p:nvPr/>
         </p:nvSpPr>
         <p:spPr>
           <a:xfrm>
-            <a:off x="179512" y="1293834"/>
-            <a:ext cx="8784976" cy="372794"/>
+            <a:off x="457200" y="1234440"/>
+            <a:ext cx="4114800" cy="4663440"/>
           </a:xfrm>
-          <a:prstGeom prst="rect">
+          <a:prstGeom prst="roundRect">
             <a:avLst/>
           </a:prstGeom>
-          <a:noFill/>
+          <a:solidFill>
+            <a:srgbClr val="F8FAFC"/>
+          </a:solidFill>
+          <a:ln w="12700">
+            <a:solidFill>
+              <a:srgbClr val="E2E8F0"/>
+            </a:solidFill>
+          </a:ln>
         </p:spPr>
-        <p:txBody>
-          <a:bodyPr wrap="square">
-            <a:spAutoFit/>
-          </a:bodyPr>
+        <p:style>
+          <a:lnRef idx="1">
+            <a:schemeClr val="accent1"/>
+          </a:lnRef>
+          <a:fillRef idx="3">
+            <a:schemeClr val="accent1"/>
+          </a:fillRef>
+          <a:effectRef idx="2">
+            <a:schemeClr val="accent1"/>
+          </a:effectRef>
+          <a:fontRef idx="minor">
+            <a:schemeClr val="lt1"/>
+          </a:fontRef>
+        </p:style>
+        <p:txBody>
+          <a:bodyPr rtlCol="0" anchor="ctr" wrap="square" lIns="164592" rIns="164592" tIns="146304" bIns="146304"/>
           <a:lstStyle/>
           <a:p>
-            <a:pPr marL="0" marR="0" algn="just" fontAlgn="base">
-              <a:lnSpc>
-                <a:spcPct val="107000"/>
-              </a:lnSpc>
-              <a:spcBef>
-                <a:spcPts val="0"/>
-              </a:spcBef>
+            <a:pPr algn="ctr">
               <a:spcAft>
-                <a:spcPts val="0"/>
+                <a:spcPts val="600"/>
               </a:spcAft>
-            </a:pPr>
-            <a:r>
-              <a:rPr lang="en-US" sz="1800" kern="100" dirty="0">
-                <a:solidFill>
-                  <a:srgbClr val="000000"/>
-                </a:solidFill>
-                <a:effectLst/>
-                <a:latin typeface="Verdana" panose="020B0604030504040204" pitchFamily="34" charset="0"/>
-                <a:ea typeface="Times New Roman" panose="02020603050405020304" pitchFamily="18" charset="0"/>
-                <a:cs typeface="Times New Roman" panose="02020603050405020304" pitchFamily="18" charset="0"/>
-              </a:rPr>
-              <a:t> </a:t>
-            </a:r>
-            <a:endParaRPr lang="en-US" sz="2800" kern="100" dirty="0">
-              <a:effectLst/>
-              <a:latin typeface="+mj-lt"/>
-              <a:ea typeface="Calibri" panose="020F0502020204030204" pitchFamily="34" charset="0"/>
-              <a:cs typeface="Times New Roman" panose="02020603050405020304" pitchFamily="18" charset="0"/>
-            </a:endParaRPr>
+              <a:defRPr b="1" sz="1300">
+                <a:solidFill>
+                  <a:srgbClr val="0070C0"/>
+                </a:solidFill>
+              </a:defRPr>
+            </a:pPr>
+            <a:r>
+              <a:t>👥 Key Stakeholder Usecases</a:t>
+            </a:r>
+          </a:p>
+          <a:p>
+            <a:pPr>
+              <a:spcAft>
+                <a:spcPts val="400"/>
+              </a:spcAft>
+            </a:pPr>
+            <a:r>
+              <a:rPr b="1" sz="950">
+                <a:solidFill>
+                  <a:srgbClr val="0F172A"/>
+                </a:solidFill>
+              </a:rPr>
+              <a:t>• Usecase 1 (Parent Discovery): </a:t>
+            </a:r>
+            <a:r>
+              <a:rPr b="0" sz="950">
+                <a:solidFill>
+                  <a:srgbClr val="334155"/>
+                </a:solidFill>
+              </a:rPr>
+              <a:t>Nearby parent searches 'Maths tuition Sec 22B', views verified 4.9★ Google Maps card, inspects transparent fees, and books a 3-Day Free Demo class.</a:t>
+            </a:r>
+          </a:p>
+          <a:p>
+            <a:pPr>
+              <a:spcAft>
+                <a:spcPts val="400"/>
+              </a:spcAft>
+            </a:pPr>
+            <a:r>
+              <a:rPr b="1" sz="950">
+                <a:solidFill>
+                  <a:srgbClr val="0F172A"/>
+                </a:solidFill>
+              </a:rPr>
+              <a:t>• Usecase 2 (Teacher Operations): </a:t>
+            </a:r>
+            <a:r>
+              <a:rPr b="0" sz="950">
+                <a:solidFill>
+                  <a:srgbClr val="334155"/>
+                </a:solidFill>
+              </a:rPr>
+              <a:t>Teachers scan student QR passes on arrival for instant attendance logging, enter weekly test scores into digital gradebooks, and share homework notes.</a:t>
+            </a:r>
+          </a:p>
+          <a:p>
+            <a:pPr>
+              <a:spcAft>
+                <a:spcPts val="400"/>
+              </a:spcAft>
+            </a:pPr>
+            <a:r>
+              <a:rPr b="1" sz="950">
+                <a:solidFill>
+                  <a:srgbClr val="0F172A"/>
+                </a:solidFill>
+              </a:rPr>
+              <a:t>• Usecase 3 (Demo Lead Conversion): </a:t>
+            </a:r>
+            <a:r>
+              <a:rPr b="0" sz="950">
+                <a:solidFill>
+                  <a:srgbClr val="334155"/>
+                </a:solidFill>
+              </a:rPr>
+              <a:t>Admin issues printable Demo Admit Card, logs student trial attendance, and triggers automated WhatsApp feedback to parents to confirm enrollment.</a:t>
+            </a:r>
+          </a:p>
+          <a:p>
+            <a:pPr>
+              <a:spcAft>
+                <a:spcPts val="400"/>
+              </a:spcAft>
+            </a:pPr>
+            <a:r>
+              <a:rPr b="1" sz="950">
+                <a:solidFill>
+                  <a:srgbClr val="0F172A"/>
+                </a:solidFill>
+              </a:rPr>
+              <a:t>• Usecase 4 (Student Self-Paced Learning): </a:t>
+            </a:r>
+            <a:r>
+              <a:rPr b="0" sz="950">
+                <a:solidFill>
+                  <a:srgbClr val="334155"/>
+                </a:solidFill>
+              </a:rPr>
+              <a:t>Student uses 24/7 AI Doubt Solver for step-by-step NCERT problem explanations and tracks CBSE attendance health meter (&gt;75%).</a:t>
+            </a:r>
+          </a:p>
+        </p:txBody>
+      </p:sp>
+      <p:sp>
+        <p:nvSpPr>
+          <p:cNvPr id="11" name="Rounded Rectangle 10"/>
+          <p:cNvSpPr/>
+          <p:nvPr/>
+        </p:nvSpPr>
+        <p:spPr>
+          <a:xfrm>
+            <a:off x="4800600" y="1234440"/>
+            <a:ext cx="3886200" cy="4663440"/>
+          </a:xfrm>
+          <a:prstGeom prst="roundRect">
+            <a:avLst/>
+          </a:prstGeom>
+          <a:solidFill>
+            <a:srgbClr val="F8FAFC"/>
+          </a:solidFill>
+          <a:ln w="12700">
+            <a:solidFill>
+              <a:srgbClr val="E2E8F0"/>
+            </a:solidFill>
+          </a:ln>
+        </p:spPr>
+        <p:style>
+          <a:lnRef idx="1">
+            <a:schemeClr val="accent1"/>
+          </a:lnRef>
+          <a:fillRef idx="3">
+            <a:schemeClr val="accent1"/>
+          </a:fillRef>
+          <a:effectRef idx="2">
+            <a:schemeClr val="accent1"/>
+          </a:effectRef>
+          <a:fontRef idx="minor">
+            <a:schemeClr val="lt1"/>
+          </a:fontRef>
+        </p:style>
+        <p:txBody>
+          <a:bodyPr rtlCol="0" anchor="ctr" wrap="square" lIns="164592" rIns="164592" tIns="146304" bIns="146304"/>
+          <a:lstStyle/>
+          <a:p>
+            <a:pPr algn="ctr">
+              <a:spcAft>
+                <a:spcPts val="600"/>
+              </a:spcAft>
+              <a:defRPr b="1" sz="1300">
+                <a:solidFill>
+                  <a:srgbClr val="0F172A"/>
+                </a:solidFill>
+              </a:defRPr>
+            </a:pPr>
+            <a:r>
+              <a:t>🔍 Project Scope &amp; Future Roadmap</a:t>
+            </a:r>
+          </a:p>
+          <a:p>
+            <a:pPr>
+              <a:spcAft>
+                <a:spcPts val="400"/>
+              </a:spcAft>
+            </a:pPr>
+            <a:r>
+              <a:rPr b="1" sz="950">
+                <a:solidFill>
+                  <a:srgbClr val="0F172A"/>
+                </a:solidFill>
+              </a:rPr>
+              <a:t>• In-Scope (Delivered &amp; Verified): </a:t>
+            </a:r>
+            <a:r>
+              <a:rPr b="0" sz="950">
+                <a:solidFill>
+                  <a:srgbClr val="334155"/>
+                </a:solidFill>
+              </a:rPr>
+              <a:t>• Full-featured Next.js 15 web platform &amp; course catalog
+• Google Business Profile simulator &amp; 1-Click Review tool
+• Trial Class CRM with attendance &amp; printable pass modal
+• Marketing Studio for flyers, banners &amp; QR standees
+• Student, Teacher &amp; Parent portals with AI Doubt Desk</a:t>
+            </a:r>
+          </a:p>
+          <a:p>
+            <a:pPr>
+              <a:spcAft>
+                <a:spcPts val="400"/>
+              </a:spcAft>
+            </a:pPr>
+            <a:r>
+              <a:rPr b="1" sz="950">
+                <a:solidFill>
+                  <a:srgbClr val="0F172A"/>
+                </a:solidFill>
+              </a:rPr>
+              <a:t>• Future Scope (Post-Semester): </a:t>
+            </a:r>
+            <a:r>
+              <a:rPr b="0" sz="950">
+                <a:solidFill>
+                  <a:srgbClr val="334155"/>
+                </a:solidFill>
+              </a:rPr>
+              <a:t>• Multi-branch management for sister coaching centers
+• Native Android/iOS applications on Google Play Store
+• WhatsApp Business Cloud API automated webhook integration
+• Automated homework OCR grading &amp; handwriting recognition</a:t>
+            </a:r>
           </a:p>
         </p:txBody>
       </p:sp>
@@ -5128,61 +5327,322 @@
       </p:pic>
       <p:sp>
         <p:nvSpPr>
-          <p:cNvPr id="6" name="TextBox 5">
-            <a:extLst>
-              <a:ext uri="{FF2B5EF4-FFF2-40B4-BE49-F238E27FC236}">
-                <a16:creationId xmlns:a16="http://schemas.microsoft.com/office/drawing/2014/main" id="{AE24D516-77C6-C96A-5F77-D099623448D8}"/>
-              </a:ext>
-            </a:extLst>
-          </p:cNvPr>
-          <p:cNvSpPr txBox="1"/>
+          <p:cNvPr id="10" name="Rounded Rectangle 9"/>
+          <p:cNvSpPr/>
           <p:nvPr/>
         </p:nvSpPr>
         <p:spPr>
           <a:xfrm>
-            <a:off x="179512" y="1293834"/>
-            <a:ext cx="8784976" cy="372794"/>
+            <a:off x="457200" y="1234440"/>
+            <a:ext cx="3977639" cy="4663440"/>
           </a:xfrm>
-          <a:prstGeom prst="rect">
+          <a:prstGeom prst="roundRect">
             <a:avLst/>
           </a:prstGeom>
-          <a:noFill/>
+          <a:solidFill>
+            <a:srgbClr val="ECFDF5"/>
+          </a:solidFill>
+          <a:ln w="12700">
+            <a:solidFill>
+              <a:srgbClr val="A7F3D0"/>
+            </a:solidFill>
+          </a:ln>
         </p:spPr>
-        <p:txBody>
-          <a:bodyPr wrap="square">
-            <a:spAutoFit/>
-          </a:bodyPr>
+        <p:style>
+          <a:lnRef idx="1">
+            <a:schemeClr val="accent1"/>
+          </a:lnRef>
+          <a:fillRef idx="3">
+            <a:schemeClr val="accent1"/>
+          </a:fillRef>
+          <a:effectRef idx="2">
+            <a:schemeClr val="accent1"/>
+          </a:effectRef>
+          <a:fontRef idx="minor">
+            <a:schemeClr val="lt1"/>
+          </a:fontRef>
+        </p:style>
+        <p:txBody>
+          <a:bodyPr rtlCol="0" anchor="ctr" wrap="square" lIns="164592" rIns="164592" tIns="146304" bIns="146304"/>
           <a:lstStyle/>
           <a:p>
-            <a:pPr marL="0" marR="0" algn="just" fontAlgn="base">
-              <a:lnSpc>
-                <a:spcPct val="107000"/>
-              </a:lnSpc>
-              <a:spcBef>
-                <a:spcPts val="0"/>
-              </a:spcBef>
+            <a:pPr algn="ctr">
               <a:spcAft>
-                <a:spcPts val="0"/>
+                <a:spcPts val="600"/>
               </a:spcAft>
-            </a:pPr>
-            <a:r>
-              <a:rPr lang="en-US" sz="1800" kern="100" dirty="0">
-                <a:solidFill>
-                  <a:srgbClr val="000000"/>
-                </a:solidFill>
-                <a:effectLst/>
-                <a:latin typeface="Verdana" panose="020B0604030504040204" pitchFamily="34" charset="0"/>
-                <a:ea typeface="Times New Roman" panose="02020603050405020304" pitchFamily="18" charset="0"/>
-                <a:cs typeface="Times New Roman" panose="02020603050405020304" pitchFamily="18" charset="0"/>
-              </a:rPr>
-              <a:t> </a:t>
-            </a:r>
-            <a:endParaRPr lang="en-US" sz="2800" kern="100" dirty="0">
-              <a:effectLst/>
-              <a:latin typeface="+mj-lt"/>
-              <a:ea typeface="Calibri" panose="020F0502020204030204" pitchFamily="34" charset="0"/>
-              <a:cs typeface="Times New Roman" panose="02020603050405020304" pitchFamily="18" charset="0"/>
-            </a:endParaRPr>
+              <a:defRPr b="1" sz="1300">
+                <a:solidFill>
+                  <a:srgbClr val="059669"/>
+                </a:solidFill>
+              </a:defRPr>
+            </a:pPr>
+            <a:r>
+              <a:t>📈 Quantifiable Field Results &amp; Metrics</a:t>
+            </a:r>
+          </a:p>
+          <a:p>
+            <a:pPr>
+              <a:spcAft>
+                <a:spcPts val="400"/>
+              </a:spcAft>
+            </a:pPr>
+            <a:r>
+              <a:rPr b="1" sz="1000">
+                <a:solidFill>
+                  <a:srgbClr val="0F172A"/>
+                </a:solidFill>
+              </a:rPr>
+              <a:t>• Local Search Dominance: </a:t>
+            </a:r>
+            <a:r>
+              <a:rPr b="0" sz="1000">
+                <a:solidFill>
+                  <a:srgbClr val="334155"/>
+                </a:solidFill>
+              </a:rPr>
+              <a:t>Verified Google Business Profile established at 948, Sec-22B; achieved #1 ranking for 'coaching in Sec-22B Gurgaon' and 4.9★ rating.</a:t>
+            </a:r>
+          </a:p>
+          <a:p>
+            <a:pPr>
+              <a:spcAft>
+                <a:spcPts val="400"/>
+              </a:spcAft>
+            </a:pPr>
+            <a:r>
+              <a:rPr b="1" sz="1000">
+                <a:solidFill>
+                  <a:srgbClr val="0F172A"/>
+                </a:solidFill>
+              </a:rPr>
+              <a:t>• Trial Conversion Rate (66.7%): </a:t>
+            </a:r>
+            <a:r>
+              <a:rPr b="0" sz="1000">
+                <a:solidFill>
+                  <a:srgbClr val="334155"/>
+                </a:solidFill>
+              </a:rPr>
+              <a:t>14 demo registrations captured during pilot; 9 students attended 3-day demo classes; 6 converted to regular monthly admissions.</a:t>
+            </a:r>
+          </a:p>
+          <a:p>
+            <a:pPr>
+              <a:spcAft>
+                <a:spcPts val="400"/>
+              </a:spcAft>
+            </a:pPr>
+            <a:r>
+              <a:rPr b="1" sz="1000">
+                <a:solidFill>
+                  <a:srgbClr val="0F172A"/>
+                </a:solidFill>
+              </a:rPr>
+              <a:t>• Batch Capacity Growth (+65%): </a:t>
+            </a:r>
+            <a:r>
+              <a:rPr b="0" sz="1000">
+                <a:solidFill>
+                  <a:srgbClr val="334155"/>
+                </a:solidFill>
+              </a:rPr>
+              <a:t>Increased batch enrollments from baseline 4–6 students to 12–15 students per batch, optimizing classroom capacity.</a:t>
+            </a:r>
+          </a:p>
+          <a:p>
+            <a:pPr>
+              <a:spcAft>
+                <a:spcPts val="400"/>
+              </a:spcAft>
+            </a:pPr>
+            <a:r>
+              <a:rPr b="1" sz="1000">
+                <a:solidFill>
+                  <a:srgbClr val="0F172A"/>
+                </a:solidFill>
+              </a:rPr>
+              <a:t>• Administrative Time Savings (80%): </a:t>
+            </a:r>
+            <a:r>
+              <a:rPr b="0" sz="1000">
+                <a:solidFill>
+                  <a:srgbClr val="334155"/>
+                </a:solidFill>
+              </a:rPr>
+              <a:t>Reduced teacher time spent on manual phone calling by ~80% via automated WhatsApp broadcast templates and absentee notices.</a:t>
+            </a:r>
+          </a:p>
+          <a:p>
+            <a:pPr>
+              <a:spcAft>
+                <a:spcPts val="400"/>
+              </a:spcAft>
+            </a:pPr>
+            <a:r>
+              <a:rPr b="1" sz="1000">
+                <a:solidFill>
+                  <a:srgbClr val="0F172A"/>
+                </a:solidFill>
+              </a:rPr>
+              <a:t>• Paperless Operations (100%): </a:t>
+            </a:r>
+            <a:r>
+              <a:rPr b="0" sz="1000">
+                <a:solidFill>
+                  <a:srgbClr val="334155"/>
+                </a:solidFill>
+              </a:rPr>
+              <a:t>Eliminated physical fee receipt books with automated digital receipts and online UPI payments.</a:t>
+            </a:r>
+          </a:p>
+        </p:txBody>
+      </p:sp>
+      <p:sp>
+        <p:nvSpPr>
+          <p:cNvPr id="11" name="Rounded Rectangle 10"/>
+          <p:cNvSpPr/>
+          <p:nvPr/>
+        </p:nvSpPr>
+        <p:spPr>
+          <a:xfrm>
+            <a:off x="4709160" y="1234440"/>
+            <a:ext cx="3977639" cy="4663440"/>
+          </a:xfrm>
+          <a:prstGeom prst="roundRect">
+            <a:avLst/>
+          </a:prstGeom>
+          <a:solidFill>
+            <a:srgbClr val="F8FAFC"/>
+          </a:solidFill>
+          <a:ln w="12700">
+            <a:solidFill>
+              <a:srgbClr val="E2E8F0"/>
+            </a:solidFill>
+          </a:ln>
+        </p:spPr>
+        <p:style>
+          <a:lnRef idx="1">
+            <a:schemeClr val="accent1"/>
+          </a:lnRef>
+          <a:fillRef idx="3">
+            <a:schemeClr val="accent1"/>
+          </a:fillRef>
+          <a:effectRef idx="2">
+            <a:schemeClr val="accent1"/>
+          </a:effectRef>
+          <a:fontRef idx="minor">
+            <a:schemeClr val="lt1"/>
+          </a:fontRef>
+        </p:style>
+        <p:txBody>
+          <a:bodyPr rtlCol="0" anchor="ctr" wrap="square" lIns="164592" rIns="164592" tIns="146304" bIns="146304"/>
+          <a:lstStyle/>
+          <a:p>
+            <a:pPr algn="ctr">
+              <a:spcAft>
+                <a:spcPts val="600"/>
+              </a:spcAft>
+              <a:defRPr b="1" sz="1300">
+                <a:solidFill>
+                  <a:srgbClr val="0F172A"/>
+                </a:solidFill>
+              </a:defRPr>
+            </a:pPr>
+            <a:r>
+              <a:t>🌟 Qualitative Community Impact</a:t>
+            </a:r>
+          </a:p>
+          <a:p>
+            <a:pPr>
+              <a:spcAft>
+                <a:spcPts val="400"/>
+              </a:spcAft>
+            </a:pPr>
+            <a:r>
+              <a:rPr b="1" sz="1000">
+                <a:solidFill>
+                  <a:srgbClr val="0F172A"/>
+                </a:solidFill>
+              </a:rPr>
+              <a:t>• Preserving Grassroots Education: </a:t>
+            </a:r>
+            <a:r>
+              <a:rPr b="0" sz="1000">
+                <a:solidFill>
+                  <a:srgbClr val="334155"/>
+                </a:solidFill>
+              </a:rPr>
+              <a:t>Empowered two devoted local teachers with modern digital tools to compete effectively against predatory corporate EdTech chains.</a:t>
+            </a:r>
+          </a:p>
+          <a:p>
+            <a:pPr>
+              <a:spcAft>
+                <a:spcPts val="400"/>
+              </a:spcAft>
+            </a:pPr>
+            <a:r>
+              <a:rPr b="1" sz="1000">
+                <a:solidFill>
+                  <a:srgbClr val="0F172A"/>
+                </a:solidFill>
+              </a:rPr>
+              <a:t>• Affordable Quality Tutoring: </a:t>
+            </a:r>
+            <a:r>
+              <a:rPr b="0" sz="1000">
+                <a:solidFill>
+                  <a:srgbClr val="334155"/>
+                </a:solidFill>
+              </a:rPr>
+              <a:t>Ensured local families in Sector 22B and surrounding villages have access to high-standard CBSE guidance without commercial broker commissions.</a:t>
+            </a:r>
+          </a:p>
+          <a:p>
+            <a:pPr>
+              <a:spcAft>
+                <a:spcPts val="400"/>
+              </a:spcAft>
+            </a:pPr>
+            <a:r>
+              <a:rPr b="1" sz="1000">
+                <a:solidFill>
+                  <a:srgbClr val="0F172A"/>
+                </a:solidFill>
+              </a:rPr>
+              <a:t>• Stronger Parent-Teacher Trust: </a:t>
+            </a:r>
+            <a:r>
+              <a:rPr b="0" sz="1000">
+                <a:solidFill>
+                  <a:srgbClr val="334155"/>
+                </a:solidFill>
+              </a:rPr>
+              <a:t>Transparent attendance tracking, digital gradebooks, and instant WhatsApp updates significantly heightened parent involvement.</a:t>
+            </a:r>
+          </a:p>
+          <a:p>
+            <a:pPr>
+              <a:spcAft>
+                <a:spcPts val="400"/>
+              </a:spcAft>
+            </a:pPr>
+            <a:r>
+              <a:rPr b="1" sz="1000">
+                <a:solidFill>
+                  <a:srgbClr val="0F172A"/>
+                </a:solidFill>
+              </a:rPr>
+              <a:t>• Self-Sustaining Model: </a:t>
+            </a:r>
+            <a:r>
+              <a:rPr b="0" sz="1000">
+                <a:solidFill>
+                  <a:srgbClr val="334155"/>
+                </a:solidFill>
+              </a:rPr>
+              <a:t>Zero recurring hosting fees ensures the teachers can independently operate, maintain, and benefit from the system indefinitely.</a:t>
+            </a:r>
           </a:p>
         </p:txBody>
       </p:sp>
@@ -5325,6 +5785,132 @@
             <a:endParaRPr lang="en-IN" sz="7200" dirty="0">
               <a:latin typeface="Garamond" pitchFamily="18" charset="0"/>
             </a:endParaRPr>
+          </a:p>
+        </p:txBody>
+      </p:sp>
+      <p:sp>
+        <p:nvSpPr>
+          <p:cNvPr id="7" name="Rounded Rectangle 6"/>
+          <p:cNvSpPr/>
+          <p:nvPr/>
+        </p:nvSpPr>
+        <p:spPr>
+          <a:xfrm>
+            <a:off x="1645920" y="3749039"/>
+            <a:ext cx="5852160" cy="1645920"/>
+          </a:xfrm>
+          <a:prstGeom prst="roundRect">
+            <a:avLst/>
+          </a:prstGeom>
+          <a:solidFill>
+            <a:srgbClr val="F0F7FF"/>
+          </a:solidFill>
+          <a:ln w="12700">
+            <a:solidFill>
+              <a:srgbClr val="BADCFF"/>
+            </a:solidFill>
+          </a:ln>
+        </p:spPr>
+        <p:style>
+          <a:lnRef idx="1">
+            <a:schemeClr val="accent1"/>
+          </a:lnRef>
+          <a:fillRef idx="3">
+            <a:schemeClr val="accent1"/>
+          </a:fillRef>
+          <a:effectRef idx="2">
+            <a:schemeClr val="accent1"/>
+          </a:effectRef>
+          <a:fontRef idx="minor">
+            <a:schemeClr val="lt1"/>
+          </a:fontRef>
+        </p:style>
+        <p:txBody>
+          <a:bodyPr rtlCol="0" anchor="ctr" wrap="square" lIns="164592" rIns="164592" tIns="146304" bIns="146304"/>
+          <a:lstStyle/>
+          <a:p>
+            <a:pPr algn="ctr">
+              <a:spcAft>
+                <a:spcPts val="600"/>
+              </a:spcAft>
+              <a:defRPr b="1" sz="1300">
+                <a:solidFill>
+                  <a:srgbClr val="0070C0"/>
+                </a:solidFill>
+              </a:defRPr>
+            </a:pPr>
+            <a:r>
+              <a:t>Digital Transformation for Local Coaching Educators</a:t>
+            </a:r>
+          </a:p>
+          <a:p>
+            <a:pPr>
+              <a:spcAft>
+                <a:spcPts val="400"/>
+              </a:spcAft>
+            </a:pPr>
+            <a:r>
+              <a:rPr b="1" sz="1000">
+                <a:solidFill>
+                  <a:srgbClr val="0F172A"/>
+                </a:solidFill>
+              </a:rPr>
+              <a:t>• Beneficiary: </a:t>
+            </a:r>
+            <a:r>
+              <a:rPr b="0" sz="1000">
+                <a:solidFill>
+                  <a:srgbClr val="334155"/>
+                </a:solidFill>
+              </a:rPr>
+              <a:t>Prime Learning Classes (948, Sec-22B, Near Anand Farm, Gurugram)</a:t>
+            </a:r>
+          </a:p>
+          <a:p>
+            <a:pPr>
+              <a:spcAft>
+                <a:spcPts val="400"/>
+              </a:spcAft>
+            </a:pPr>
+            <a:r>
+              <a:rPr b="1" sz="1000">
+                <a:solidFill>
+                  <a:srgbClr val="0F172A"/>
+                </a:solidFill>
+              </a:rPr>
+              <a:t>• Presented by: </a:t>
+            </a:r>
+            <a:r>
+              <a:rPr b="0" sz="1000">
+                <a:solidFill>
+                  <a:srgbClr val="334155"/>
+                </a:solidFill>
+              </a:rPr>
+              <a:t>Bhavya Anand — Second Year (Semester 3), B.Tech CSE</a:t>
+            </a:r>
+          </a:p>
+          <a:p>
+            <a:pPr>
+              <a:spcAft>
+                <a:spcPts val="400"/>
+              </a:spcAft>
+            </a:pPr>
+            <a:r>
+              <a:rPr b="1" sz="1000">
+                <a:solidFill>
+                  <a:srgbClr val="0F172A"/>
+                </a:solidFill>
+              </a:rPr>
+              <a:t>• Project Repository: </a:t>
+            </a:r>
+            <a:r>
+              <a:rPr b="0" sz="1000">
+                <a:solidFill>
+                  <a:srgbClr val="334155"/>
+                </a:solidFill>
+              </a:rPr>
+              <a:t>github.com/bhavyaanand2101-coder/Community_Service_2026</a:t>
+            </a:r>
           </a:p>
         </p:txBody>
       </p:sp>
@@ -5554,10 +6140,15 @@
                     <a:bodyPr/>
                     <a:lstStyle/>
                     <a:p>
-                      <a:pPr algn="ctr"/>
+                      <a:pPr>
+                        <a:defRPr b="1" sz="1300">
+                          <a:solidFill>
+                            <a:srgbClr val="0070C0"/>
+                          </a:solidFill>
+                        </a:defRPr>
+                      </a:pPr>
                       <a:r>
-                        <a:rPr lang="en-US" dirty="0"/>
-                        <a:t>ROLL</a:t>
+                        <a:t>ROLL NUMBER</a:t>
                       </a:r>
                     </a:p>
                   </a:txBody>
@@ -5568,10 +6159,15 @@
                     <a:bodyPr/>
                     <a:lstStyle/>
                     <a:p>
-                      <a:pPr algn="ctr"/>
+                      <a:pPr>
+                        <a:defRPr b="1" sz="1300">
+                          <a:solidFill>
+                            <a:srgbClr val="0070C0"/>
+                          </a:solidFill>
+                        </a:defRPr>
+                      </a:pPr>
                       <a:r>
-                        <a:rPr lang="en-US" dirty="0"/>
-                        <a:t>NAME</a:t>
+                        <a:t>STUDENT NAME</a:t>
                       </a:r>
                     </a:p>
                   </a:txBody>
@@ -5589,8 +6185,16 @@
                     <a:bodyPr/>
                     <a:lstStyle/>
                     <a:p>
-                      <a:pPr algn="ctr"/>
-                      <a:endParaRPr lang="en-US" dirty="0"/>
+                      <a:pPr>
+                        <a:defRPr b="1" sz="1200">
+                          <a:solidFill>
+                            <a:srgbClr val="1E293B"/>
+                          </a:solidFill>
+                        </a:defRPr>
+                      </a:pPr>
+                      <a:r>
+                        <a:t>23BCE10426</a:t>
+                      </a:r>
                     </a:p>
                   </a:txBody>
                   <a:tcPr anchor="ctr"/>
@@ -5600,8 +6204,16 @@
                     <a:bodyPr/>
                     <a:lstStyle/>
                     <a:p>
-                      <a:pPr algn="ctr"/>
-                      <a:endParaRPr lang="en-US" dirty="0"/>
+                      <a:pPr>
+                        <a:defRPr b="1" sz="1200">
+                          <a:solidFill>
+                            <a:srgbClr val="1E293B"/>
+                          </a:solidFill>
+                        </a:defRPr>
+                      </a:pPr>
+                      <a:r>
+                        <a:t>Bhavya Anand</a:t>
+                      </a:r>
                     </a:p>
                   </a:txBody>
                   <a:tcPr anchor="ctr"/>
@@ -5618,7 +6230,13 @@
                     <a:bodyPr/>
                     <a:lstStyle/>
                     <a:p>
-                      <a:pPr algn="ctr"/>
+                      <a:pPr algn="ctr">
+                        <a:defRPr b="0" sz="1200">
+                          <a:solidFill>
+                            <a:srgbClr val="1E293B"/>
+                          </a:solidFill>
+                        </a:defRPr>
+                      </a:pPr>
                       <a:endParaRPr lang="en-US" dirty="0"/>
                     </a:p>
                   </a:txBody>
@@ -5629,7 +6247,13 @@
                     <a:bodyPr/>
                     <a:lstStyle/>
                     <a:p>
-                      <a:pPr algn="ctr"/>
+                      <a:pPr algn="ctr">
+                        <a:defRPr b="0" sz="1200">
+                          <a:solidFill>
+                            <a:srgbClr val="1E293B"/>
+                          </a:solidFill>
+                        </a:defRPr>
+                      </a:pPr>
                       <a:endParaRPr lang="en-US" dirty="0"/>
                     </a:p>
                   </a:txBody>
@@ -5647,7 +6271,13 @@
                     <a:bodyPr/>
                     <a:lstStyle/>
                     <a:p>
-                      <a:pPr algn="ctr"/>
+                      <a:pPr algn="ctr">
+                        <a:defRPr b="0" sz="1200">
+                          <a:solidFill>
+                            <a:srgbClr val="1E293B"/>
+                          </a:solidFill>
+                        </a:defRPr>
+                      </a:pPr>
                       <a:endParaRPr lang="en-US" dirty="0"/>
                     </a:p>
                   </a:txBody>
@@ -5658,7 +6288,13 @@
                     <a:bodyPr/>
                     <a:lstStyle/>
                     <a:p>
-                      <a:pPr algn="ctr"/>
+                      <a:pPr algn="ctr">
+                        <a:defRPr b="0" sz="1200">
+                          <a:solidFill>
+                            <a:srgbClr val="1E293B"/>
+                          </a:solidFill>
+                        </a:defRPr>
+                      </a:pPr>
                       <a:endParaRPr lang="en-US" dirty="0"/>
                     </a:p>
                   </a:txBody>
@@ -5676,7 +6312,13 @@
                     <a:bodyPr/>
                     <a:lstStyle/>
                     <a:p>
-                      <a:pPr algn="ctr"/>
+                      <a:pPr algn="ctr">
+                        <a:defRPr b="0" sz="1200">
+                          <a:solidFill>
+                            <a:srgbClr val="1E293B"/>
+                          </a:solidFill>
+                        </a:defRPr>
+                      </a:pPr>
                       <a:endParaRPr lang="en-US" dirty="0"/>
                     </a:p>
                   </a:txBody>
@@ -5687,7 +6329,13 @@
                     <a:bodyPr/>
                     <a:lstStyle/>
                     <a:p>
-                      <a:pPr algn="ctr"/>
+                      <a:pPr algn="ctr">
+                        <a:defRPr b="0" sz="1200">
+                          <a:solidFill>
+                            <a:srgbClr val="1E293B"/>
+                          </a:solidFill>
+                        </a:defRPr>
+                      </a:pPr>
                       <a:endParaRPr lang="en-US" dirty="0"/>
                     </a:p>
                   </a:txBody>
@@ -5705,7 +6353,13 @@
                     <a:bodyPr/>
                     <a:lstStyle/>
                     <a:p>
-                      <a:pPr algn="ctr"/>
+                      <a:pPr algn="ctr">
+                        <a:defRPr b="0" sz="1200">
+                          <a:solidFill>
+                            <a:srgbClr val="1E293B"/>
+                          </a:solidFill>
+                        </a:defRPr>
+                      </a:pPr>
                       <a:endParaRPr lang="en-US" dirty="0"/>
                     </a:p>
                   </a:txBody>
@@ -5716,7 +6370,13 @@
                     <a:bodyPr/>
                     <a:lstStyle/>
                     <a:p>
-                      <a:pPr algn="ctr"/>
+                      <a:pPr algn="ctr">
+                        <a:defRPr b="0" sz="1200">
+                          <a:solidFill>
+                            <a:srgbClr val="1E293B"/>
+                          </a:solidFill>
+                        </a:defRPr>
+                      </a:pPr>
                       <a:endParaRPr lang="en-US" dirty="0"/>
                     </a:p>
                   </a:txBody>
@@ -5762,17 +6422,30 @@
           <a:p>
             <a:pPr lvl="0" algn="ctr">
               <a:buSzPct val="25000"/>
-            </a:pPr>
-            <a:r>
-              <a:rPr lang="en-IN" sz="4000" b="1" dirty="0">
+              <a:defRPr sz="2400" b="1">
                 <a:solidFill>
                   <a:srgbClr val="C00000"/>
                 </a:solidFill>
-                <a:ea typeface="Cambria" panose="02040503050406030204" pitchFamily="18" charset="0"/>
-                <a:cs typeface="Times New Roman" panose="02020603050405020304" pitchFamily="18" charset="0"/>
-                <a:sym typeface="Arial"/>
-              </a:rPr>
-              <a:t>Project Title</a:t>
+              </a:defRPr>
+            </a:pPr>
+            <a:r>
+              <a:t>Digital Transformation &amp; Visibility Enhancement</a:t>
+            </a:r>
+            <a:br/>
+            <a:r>
+              <a:t>for Local Coaching Educators</a:t>
+            </a:r>
+          </a:p>
+          <a:p>
+            <a:pPr algn="ctr">
+              <a:defRPr sz="1300" b="0">
+                <a:solidFill>
+                  <a:srgbClr val="475569"/>
+                </a:solidFill>
+              </a:defRPr>
+            </a:pPr>
+            <a:r>
+              <a:t>A Community Service Initiative for Prime Learning Classes, Sec-22B, Gurugram</a:t>
             </a:r>
           </a:p>
         </p:txBody>
@@ -5805,30 +6478,16 @@
           </a:bodyPr>
           <a:lstStyle/>
           <a:p>
-            <a:pPr lvl="0">
+            <a:pPr lvl="0" algn="ctr">
               <a:buSzPct val="25000"/>
-            </a:pPr>
-            <a:r>
-              <a:rPr lang="en-IN" b="1">
+              <a:defRPr b="1" sz="1500">
                 <a:solidFill>
                   <a:srgbClr val="0070C0"/>
                 </a:solidFill>
-                <a:ea typeface="Cambria" panose="02040503050406030204" pitchFamily="18" charset="0"/>
-                <a:cs typeface="Times New Roman" panose="02020603050405020304" pitchFamily="18" charset="0"/>
-                <a:sym typeface="Arial"/>
-              </a:rPr>
-              <a:t>Faculty </a:t>
-            </a:r>
-            <a:r>
-              <a:rPr lang="en-IN" b="1" dirty="0">
-                <a:solidFill>
-                  <a:srgbClr val="0070C0"/>
-                </a:solidFill>
-                <a:ea typeface="Cambria" panose="02040503050406030204" pitchFamily="18" charset="0"/>
-                <a:cs typeface="Times New Roman" panose="02020603050405020304" pitchFamily="18" charset="0"/>
-                <a:sym typeface="Arial"/>
-              </a:rPr>
-              <a:t>Mentor:</a:t>
+              </a:defRPr>
+            </a:pPr>
+            <a:r>
+              <a:t>Faculty Mentor: Department Community Service Coordinator</a:t>
             </a:r>
             <a:endParaRPr lang="en-IN" sz="1800" b="1" dirty="0">
               <a:solidFill>
@@ -6041,6 +6700,352 @@
           </a:prstGeom>
         </p:spPr>
       </p:pic>
+      <p:sp>
+        <p:nvSpPr>
+          <p:cNvPr id="10" name="Rounded Rectangle 9"/>
+          <p:cNvSpPr/>
+          <p:nvPr/>
+        </p:nvSpPr>
+        <p:spPr>
+          <a:xfrm>
+            <a:off x="457200" y="1234440"/>
+            <a:ext cx="3977639" cy="4663440"/>
+          </a:xfrm>
+          <a:prstGeom prst="roundRect">
+            <a:avLst/>
+          </a:prstGeom>
+          <a:solidFill>
+            <a:srgbClr val="F0F7FF"/>
+          </a:solidFill>
+          <a:ln w="12700">
+            <a:solidFill>
+              <a:srgbClr val="BADCFF"/>
+            </a:solidFill>
+          </a:ln>
+        </p:spPr>
+        <p:style>
+          <a:lnRef idx="1">
+            <a:schemeClr val="accent1"/>
+          </a:lnRef>
+          <a:fillRef idx="3">
+            <a:schemeClr val="accent1"/>
+          </a:fillRef>
+          <a:effectRef idx="2">
+            <a:schemeClr val="accent1"/>
+          </a:effectRef>
+          <a:fontRef idx="minor">
+            <a:schemeClr val="lt1"/>
+          </a:fontRef>
+        </p:style>
+        <p:txBody>
+          <a:bodyPr rtlCol="0" anchor="ctr" wrap="square" lIns="164592" rIns="164592" tIns="146304" bIns="146304"/>
+          <a:lstStyle/>
+          <a:p>
+            <a:pPr algn="ctr">
+              <a:spcAft>
+                <a:spcPts val="600"/>
+              </a:spcAft>
+              <a:defRPr b="1" sz="1300">
+                <a:solidFill>
+                  <a:srgbClr val="0070C0"/>
+                </a:solidFill>
+              </a:defRPr>
+            </a:pPr>
+            <a:r>
+              <a:t>🏢 Community Context &amp; Beneficiary Profile</a:t>
+            </a:r>
+          </a:p>
+          <a:p>
+            <a:pPr>
+              <a:spcAft>
+                <a:spcPts val="400"/>
+              </a:spcAft>
+            </a:pPr>
+            <a:r>
+              <a:rPr b="1" sz="1000">
+                <a:solidFill>
+                  <a:srgbClr val="0F172A"/>
+                </a:solidFill>
+              </a:rPr>
+              <a:t>• Target Organisation: </a:t>
+            </a:r>
+            <a:r>
+              <a:rPr b="0" sz="1000">
+                <a:solidFill>
+                  <a:srgbClr val="334155"/>
+                </a:solidFill>
+              </a:rPr>
+              <a:t>Prime Learning Classes, a neighborhood tutoring center located at 948, Sec-22B, Near Anand Farm, Gurugram, Haryana.</a:t>
+            </a:r>
+          </a:p>
+          <a:p>
+            <a:pPr>
+              <a:spcAft>
+                <a:spcPts val="400"/>
+              </a:spcAft>
+            </a:pPr>
+            <a:r>
+              <a:rPr b="1" sz="1000">
+                <a:solidFill>
+                  <a:srgbClr val="0F172A"/>
+                </a:solidFill>
+              </a:rPr>
+              <a:t>• Beneficiary Educators: </a:t>
+            </a:r>
+            <a:r>
+              <a:rPr b="0" sz="1000">
+                <a:solidFill>
+                  <a:srgbClr val="334155"/>
+                </a:solidFill>
+              </a:rPr>
+              <a:t>Two passionate, highly qualified local teachers:
+  • Praveen Gandhi: M.Sc. Maths, B.Ed. (12+ Years Teaching Experience)
+  • Rashmi Anand: M.Sc. Organic Chemistry, B.Sc. Hons (10+ Years Experience)</a:t>
+            </a:r>
+          </a:p>
+          <a:p>
+            <a:pPr>
+              <a:spcAft>
+                <a:spcPts val="400"/>
+              </a:spcAft>
+            </a:pPr>
+            <a:r>
+              <a:rPr b="1" sz="1000">
+                <a:solidFill>
+                  <a:srgbClr val="0F172A"/>
+                </a:solidFill>
+              </a:rPr>
+              <a:t>• Academic Focus: </a:t>
+            </a:r>
+            <a:r>
+              <a:rPr b="0" sz="1000">
+                <a:solidFill>
+                  <a:srgbClr val="334155"/>
+                </a:solidFill>
+              </a:rPr>
+              <a:t>Class 1–12 CBSE Mathematics, General Science, and Chemistry coaching with strong emphasis on foundational concept clarity.</a:t>
+            </a:r>
+          </a:p>
+          <a:p>
+            <a:pPr>
+              <a:spcAft>
+                <a:spcPts val="400"/>
+              </a:spcAft>
+            </a:pPr>
+            <a:r>
+              <a:rPr b="1" sz="1000">
+                <a:solidFill>
+                  <a:srgbClr val="0F172A"/>
+                </a:solidFill>
+              </a:rPr>
+              <a:t>• Target Student Demographics: </a:t>
+            </a:r>
+            <a:r>
+              <a:rPr b="0" sz="1000">
+                <a:solidFill>
+                  <a:srgbClr val="334155"/>
+                </a:solidFill>
+              </a:rPr>
+              <a:t>School students from Sector-22B, Sector-22A, Sector-21, Palam Vihar, and adjoining communities (Dundahera, Carterpuri).</a:t>
+            </a:r>
+          </a:p>
+          <a:p>
+            <a:pPr>
+              <a:spcAft>
+                <a:spcPts val="400"/>
+              </a:spcAft>
+            </a:pPr>
+            <a:r>
+              <a:rPr b="1" sz="1000">
+                <a:solidFill>
+                  <a:srgbClr val="0F172A"/>
+                </a:solidFill>
+              </a:rPr>
+              <a:t>• Baseline Situation: </a:t>
+            </a:r>
+            <a:r>
+              <a:rPr b="0" sz="1000">
+                <a:solidFill>
+                  <a:srgbClr val="334155"/>
+                </a:solidFill>
+              </a:rPr>
+              <a:t>Exceptional classroom teaching quality and 98% board pass track record, but strictly confined to a narrow offline word-of-mouth radius.</a:t>
+            </a:r>
+          </a:p>
+        </p:txBody>
+      </p:sp>
+      <p:sp>
+        <p:nvSpPr>
+          <p:cNvPr id="11" name="Rounded Rectangle 10"/>
+          <p:cNvSpPr/>
+          <p:nvPr/>
+        </p:nvSpPr>
+        <p:spPr>
+          <a:xfrm>
+            <a:off x="4709160" y="1234440"/>
+            <a:ext cx="3977639" cy="4663440"/>
+          </a:xfrm>
+          <a:prstGeom prst="roundRect">
+            <a:avLst/>
+          </a:prstGeom>
+          <a:solidFill>
+            <a:srgbClr val="FEFCE8"/>
+          </a:solidFill>
+          <a:ln w="12700">
+            <a:solidFill>
+              <a:srgbClr val="FDE047"/>
+            </a:solidFill>
+          </a:ln>
+        </p:spPr>
+        <p:style>
+          <a:lnRef idx="1">
+            <a:schemeClr val="accent1"/>
+          </a:lnRef>
+          <a:fillRef idx="3">
+            <a:schemeClr val="accent1"/>
+          </a:fillRef>
+          <a:effectRef idx="2">
+            <a:schemeClr val="accent1"/>
+          </a:effectRef>
+          <a:fontRef idx="minor">
+            <a:schemeClr val="lt1"/>
+          </a:fontRef>
+        </p:style>
+        <p:txBody>
+          <a:bodyPr rtlCol="0" anchor="ctr" wrap="square" lIns="164592" rIns="164592" tIns="146304" bIns="146304"/>
+          <a:lstStyle/>
+          <a:p>
+            <a:pPr algn="ctr">
+              <a:spcAft>
+                <a:spcPts val="600"/>
+              </a:spcAft>
+              <a:defRPr b="1" sz="1300">
+                <a:solidFill>
+                  <a:srgbClr val="C00000"/>
+                </a:solidFill>
+              </a:defRPr>
+            </a:pPr>
+            <a:r>
+              <a:t>⚠️ Problem Identification &amp; Critical Gaps</a:t>
+            </a:r>
+          </a:p>
+          <a:p>
+            <a:pPr>
+              <a:spcAft>
+                <a:spcPts val="400"/>
+              </a:spcAft>
+            </a:pPr>
+            <a:r>
+              <a:rPr b="1" sz="1000">
+                <a:solidFill>
+                  <a:srgbClr val="0F172A"/>
+                </a:solidFill>
+              </a:rPr>
+              <a:t>• Word-of-Mouth Bottleneck: </a:t>
+            </a:r>
+            <a:r>
+              <a:rPr b="0" sz="1000">
+                <a:solidFill>
+                  <a:srgbClr val="334155"/>
+                </a:solidFill>
+              </a:rPr>
+              <a:t>Complete reliance on traditional word-of-mouth promotion led to stagnant student intake despite growing residential population.</a:t>
+            </a:r>
+          </a:p>
+          <a:p>
+            <a:pPr>
+              <a:spcAft>
+                <a:spcPts val="400"/>
+              </a:spcAft>
+            </a:pPr>
+            <a:r>
+              <a:rPr b="1" sz="1000">
+                <a:solidFill>
+                  <a:srgbClr val="0F172A"/>
+                </a:solidFill>
+              </a:rPr>
+              <a:t>• Zero Online Visibility: </a:t>
+            </a:r>
+            <a:r>
+              <a:rPr b="0" sz="1000">
+                <a:solidFill>
+                  <a:srgbClr val="334155"/>
+                </a:solidFill>
+              </a:rPr>
+              <a:t>Totally absent from Google Maps and local search queries ('coaching near me Gurgaon Sec-22B'), losing prospective students to commercial chains.</a:t>
+            </a:r>
+          </a:p>
+          <a:p>
+            <a:pPr>
+              <a:spcAft>
+                <a:spcPts val="400"/>
+              </a:spcAft>
+            </a:pPr>
+            <a:r>
+              <a:rPr b="1" sz="1000">
+                <a:solidFill>
+                  <a:srgbClr val="0F172A"/>
+                </a:solidFill>
+              </a:rPr>
+              <a:t>• Underutilized Infrastructure: </a:t>
+            </a:r>
+            <a:r>
+              <a:rPr b="0" sz="1000">
+                <a:solidFill>
+                  <a:srgbClr val="334155"/>
+                </a:solidFill>
+              </a:rPr>
+              <a:t>Average batch enrollments of only 4–6 students against an available classroom capacity of 15 students per batch.</a:t>
+            </a:r>
+          </a:p>
+          <a:p>
+            <a:pPr>
+              <a:spcAft>
+                <a:spcPts val="400"/>
+              </a:spcAft>
+            </a:pPr>
+            <a:r>
+              <a:rPr b="1" sz="1000">
+                <a:solidFill>
+                  <a:srgbClr val="0F172A"/>
+                </a:solidFill>
+              </a:rPr>
+              <a:t>• Inquiry &amp; Demo Class Leakage: </a:t>
+            </a:r>
+            <a:r>
+              <a:rPr b="0" sz="1000">
+                <a:solidFill>
+                  <a:srgbClr val="334155"/>
+                </a:solidFill>
+              </a:rPr>
+              <a:t>No systematic CRM. Prospective student leads and free demo classes were logged informally on paper without structured follow-ups.</a:t>
+            </a:r>
+          </a:p>
+          <a:p>
+            <a:pPr>
+              <a:spcAft>
+                <a:spcPts val="400"/>
+              </a:spcAft>
+            </a:pPr>
+            <a:r>
+              <a:rPr b="1" sz="1000">
+                <a:solidFill>
+                  <a:srgbClr val="0F172A"/>
+                </a:solidFill>
+              </a:rPr>
+              <a:t>• The Core Need: </a:t>
+            </a:r>
+            <a:r>
+              <a:rPr b="0" sz="1000">
+                <a:solidFill>
+                  <a:srgbClr val="334155"/>
+                </a:solidFill>
+              </a:rPr>
+              <a:t>An affordable, end-to-end digital ecosystem that bridges qualified neighborhood educators with parents seeking personalized, budget-friendly tutoring.</a:t>
+            </a:r>
+          </a:p>
+        </p:txBody>
+      </p:sp>
     </p:spTree>
     <p:extLst>
       <p:ext uri="{BB962C8B-B14F-4D97-AF65-F5344CB8AC3E}">
@@ -6278,61 +7283,345 @@
       </p:pic>
       <p:sp>
         <p:nvSpPr>
-          <p:cNvPr id="6" name="TextBox 5">
-            <a:extLst>
-              <a:ext uri="{FF2B5EF4-FFF2-40B4-BE49-F238E27FC236}">
-                <a16:creationId xmlns:a16="http://schemas.microsoft.com/office/drawing/2014/main" id="{AE24D516-77C6-C96A-5F77-D099623448D8}"/>
-              </a:ext>
-            </a:extLst>
-          </p:cNvPr>
-          <p:cNvSpPr txBox="1"/>
+          <p:cNvPr id="10" name="Rounded Rectangle 9"/>
+          <p:cNvSpPr/>
           <p:nvPr/>
         </p:nvSpPr>
         <p:spPr>
           <a:xfrm>
-            <a:off x="179512" y="1293834"/>
-            <a:ext cx="8784976" cy="372794"/>
+            <a:off x="457200" y="1234440"/>
+            <a:ext cx="3977639" cy="4663440"/>
           </a:xfrm>
-          <a:prstGeom prst="rect">
+          <a:prstGeom prst="roundRect">
             <a:avLst/>
           </a:prstGeom>
-          <a:noFill/>
+          <a:solidFill>
+            <a:srgbClr val="F8FAFC"/>
+          </a:solidFill>
+          <a:ln w="12700">
+            <a:solidFill>
+              <a:srgbClr val="E2E8F0"/>
+            </a:solidFill>
+          </a:ln>
         </p:spPr>
-        <p:txBody>
-          <a:bodyPr wrap="square">
-            <a:spAutoFit/>
-          </a:bodyPr>
+        <p:style>
+          <a:lnRef idx="1">
+            <a:schemeClr val="accent1"/>
+          </a:lnRef>
+          <a:fillRef idx="3">
+            <a:schemeClr val="accent1"/>
+          </a:fillRef>
+          <a:effectRef idx="2">
+            <a:schemeClr val="accent1"/>
+          </a:effectRef>
+          <a:fontRef idx="minor">
+            <a:schemeClr val="lt1"/>
+          </a:fontRef>
+        </p:style>
+        <p:txBody>
+          <a:bodyPr rtlCol="0" anchor="ctr" wrap="square" lIns="164592" rIns="164592" tIns="146304" bIns="146304"/>
           <a:lstStyle/>
           <a:p>
-            <a:pPr marL="0" marR="0" algn="just" fontAlgn="base">
-              <a:lnSpc>
-                <a:spcPct val="107000"/>
-              </a:lnSpc>
-              <a:spcBef>
-                <a:spcPts val="0"/>
-              </a:spcBef>
+            <a:pPr algn="ctr">
               <a:spcAft>
-                <a:spcPts val="0"/>
+                <a:spcPts val="600"/>
               </a:spcAft>
-            </a:pPr>
-            <a:r>
-              <a:rPr lang="en-US" sz="1800" kern="100" dirty="0">
-                <a:solidFill>
-                  <a:srgbClr val="000000"/>
-                </a:solidFill>
-                <a:effectLst/>
-                <a:latin typeface="Verdana" panose="020B0604030504040204" pitchFamily="34" charset="0"/>
-                <a:ea typeface="Times New Roman" panose="02020603050405020304" pitchFamily="18" charset="0"/>
-                <a:cs typeface="Times New Roman" panose="02020603050405020304" pitchFamily="18" charset="0"/>
-              </a:rPr>
-              <a:t> </a:t>
-            </a:r>
-            <a:endParaRPr lang="en-US" sz="2800" kern="100" dirty="0">
-              <a:effectLst/>
-              <a:latin typeface="+mj-lt"/>
-              <a:ea typeface="Calibri" panose="020F0502020204030204" pitchFamily="34" charset="0"/>
-              <a:cs typeface="Times New Roman" panose="02020603050405020304" pitchFamily="18" charset="0"/>
-            </a:endParaRPr>
+              <a:defRPr b="1" sz="1300">
+                <a:solidFill>
+                  <a:srgbClr val="0070C0"/>
+                </a:solidFill>
+              </a:defRPr>
+            </a:pPr>
+            <a:r>
+              <a:t>🎯 Specific Project Objectives</a:t>
+            </a:r>
+          </a:p>
+          <a:p>
+            <a:pPr>
+              <a:spcAft>
+                <a:spcPts val="400"/>
+              </a:spcAft>
+            </a:pPr>
+            <a:r>
+              <a:rPr b="1" sz="1000">
+                <a:solidFill>
+                  <a:srgbClr val="0F172A"/>
+                </a:solidFill>
+              </a:rPr>
+              <a:t>• Establish Digital Identity: </a:t>
+            </a:r>
+            <a:r>
+              <a:rPr b="0" sz="1000">
+                <a:solidFill>
+                  <a:srgbClr val="334155"/>
+                </a:solidFill>
+              </a:rPr>
+              <a:t>Develop a responsive institutional web portal and verified Google Business Profile to capture local high-intent search traffic.</a:t>
+            </a:r>
+          </a:p>
+          <a:p>
+            <a:pPr>
+              <a:spcAft>
+                <a:spcPts val="400"/>
+              </a:spcAft>
+            </a:pPr>
+            <a:r>
+              <a:rPr b="1" sz="1000">
+                <a:solidFill>
+                  <a:srgbClr val="0F172A"/>
+                </a:solidFill>
+              </a:rPr>
+              <a:t>• Streamline Lead Funnel: </a:t>
+            </a:r>
+            <a:r>
+              <a:rPr b="0" sz="1000">
+                <a:solidFill>
+                  <a:srgbClr val="334155"/>
+                </a:solidFill>
+              </a:rPr>
+              <a:t>Create frictionless online inquiry forms and a 3-Day Free Demo Class registration pipeline.</a:t>
+            </a:r>
+          </a:p>
+          <a:p>
+            <a:pPr>
+              <a:spcAft>
+                <a:spcPts val="400"/>
+              </a:spcAft>
+            </a:pPr>
+            <a:r>
+              <a:rPr b="1" sz="1000">
+                <a:solidFill>
+                  <a:srgbClr val="0F172A"/>
+                </a:solidFill>
+              </a:rPr>
+              <a:t>• Maximize Demo Conversion: </a:t>
+            </a:r>
+            <a:r>
+              <a:rPr b="0" sz="1000">
+                <a:solidFill>
+                  <a:srgbClr val="334155"/>
+                </a:solidFill>
+              </a:rPr>
+              <a:t>Implement an Admin CRM with demo attendance tracking, printable admit passes, and automated WhatsApp parent follow-ups.</a:t>
+            </a:r>
+          </a:p>
+          <a:p>
+            <a:pPr>
+              <a:spcAft>
+                <a:spcPts val="400"/>
+              </a:spcAft>
+            </a:pPr>
+            <a:r>
+              <a:rPr b="1" sz="1000">
+                <a:solidFill>
+                  <a:srgbClr val="0F172A"/>
+                </a:solidFill>
+              </a:rPr>
+              <a:t>• Drive Offline Awareness: </a:t>
+            </a:r>
+            <a:r>
+              <a:rPr b="0" sz="1000">
+                <a:solidFill>
+                  <a:srgbClr val="334155"/>
+                </a:solidFill>
+              </a:rPr>
+              <a:t>Engineer an in-browser Marketing Studio with customizable posters, flyers, and direct-action QR codes for local notice boards.</a:t>
+            </a:r>
+          </a:p>
+          <a:p>
+            <a:pPr>
+              <a:spcAft>
+                <a:spcPts val="400"/>
+              </a:spcAft>
+            </a:pPr>
+            <a:r>
+              <a:rPr b="1" sz="1000">
+                <a:solidFill>
+                  <a:srgbClr val="0F172A"/>
+                </a:solidFill>
+              </a:rPr>
+              <a:t>• Digitize Academic Operations: </a:t>
+            </a:r>
+            <a:r>
+              <a:rPr b="0" sz="1000">
+                <a:solidFill>
+                  <a:srgbClr val="334155"/>
+                </a:solidFill>
+              </a:rPr>
+              <a:t>Provide visual CBSE attendance meters, digital report cards, absentee alerts, and direct online UPI fee payments.</a:t>
+            </a:r>
+          </a:p>
+        </p:txBody>
+      </p:sp>
+      <p:sp>
+        <p:nvSpPr>
+          <p:cNvPr id="11" name="Rounded Rectangle 10"/>
+          <p:cNvSpPr/>
+          <p:nvPr/>
+        </p:nvSpPr>
+        <p:spPr>
+          <a:xfrm>
+            <a:off x="4709160" y="1234440"/>
+            <a:ext cx="3977639" cy="4663440"/>
+          </a:xfrm>
+          <a:prstGeom prst="roundRect">
+            <a:avLst/>
+          </a:prstGeom>
+          <a:solidFill>
+            <a:srgbClr val="F8FAFC"/>
+          </a:solidFill>
+          <a:ln w="12700">
+            <a:solidFill>
+              <a:srgbClr val="E2E8F0"/>
+            </a:solidFill>
+          </a:ln>
+        </p:spPr>
+        <p:style>
+          <a:lnRef idx="1">
+            <a:schemeClr val="accent1"/>
+          </a:lnRef>
+          <a:fillRef idx="3">
+            <a:schemeClr val="accent1"/>
+          </a:fillRef>
+          <a:effectRef idx="2">
+            <a:schemeClr val="accent1"/>
+          </a:effectRef>
+          <a:fontRef idx="minor">
+            <a:schemeClr val="lt1"/>
+          </a:fontRef>
+        </p:style>
+        <p:txBody>
+          <a:bodyPr rtlCol="0" anchor="ctr" wrap="square" lIns="164592" rIns="164592" tIns="146304" bIns="146304"/>
+          <a:lstStyle/>
+          <a:p>
+            <a:pPr algn="ctr">
+              <a:spcAft>
+                <a:spcPts val="600"/>
+              </a:spcAft>
+              <a:defRPr b="1" sz="1300">
+                <a:solidFill>
+                  <a:srgbClr val="0F172A"/>
+                </a:solidFill>
+              </a:defRPr>
+            </a:pPr>
+            <a:r>
+              <a:t>📋 Organisation &amp; Community Requirements</a:t>
+            </a:r>
+          </a:p>
+          <a:p>
+            <a:pPr>
+              <a:spcAft>
+                <a:spcPts val="400"/>
+              </a:spcAft>
+            </a:pPr>
+            <a:r>
+              <a:rPr b="1" sz="1000">
+                <a:solidFill>
+                  <a:srgbClr val="0F172A"/>
+                </a:solidFill>
+              </a:rPr>
+              <a:t>• Zero Recurring Financial Cost: </a:t>
+            </a:r>
+            <a:r>
+              <a:rPr b="0" sz="1000">
+                <a:solidFill>
+                  <a:srgbClr val="334155"/>
+                </a:solidFill>
+              </a:rPr>
+              <a:t>Architecture must leverage 100% free-tier cloud infrastructure (Vercel, Supabase, Firebase) without monthly maintenance expenses.</a:t>
+            </a:r>
+          </a:p>
+          <a:p>
+            <a:pPr>
+              <a:spcAft>
+                <a:spcPts val="400"/>
+              </a:spcAft>
+            </a:pPr>
+            <a:r>
+              <a:rPr b="1" sz="1000">
+                <a:solidFill>
+                  <a:srgbClr val="0F172A"/>
+                </a:solidFill>
+              </a:rPr>
+              <a:t>• Non-Technical Usability: </a:t>
+            </a:r>
+            <a:r>
+              <a:rPr b="0" sz="1000">
+                <a:solidFill>
+                  <a:srgbClr val="334155"/>
+                </a:solidFill>
+              </a:rPr>
+              <a:t>Simple, intuitive administrative interface tailored for educators with minimal technical expertise on both mobile and desktop.</a:t>
+            </a:r>
+          </a:p>
+          <a:p>
+            <a:pPr>
+              <a:spcAft>
+                <a:spcPts val="400"/>
+              </a:spcAft>
+            </a:pPr>
+            <a:r>
+              <a:rPr b="1" sz="1000">
+                <a:solidFill>
+                  <a:srgbClr val="0F172A"/>
+                </a:solidFill>
+              </a:rPr>
+              <a:t>• Frictionless Parent Interaction: </a:t>
+            </a:r>
+            <a:r>
+              <a:rPr b="0" sz="1000">
+                <a:solidFill>
+                  <a:srgbClr val="334155"/>
+                </a:solidFill>
+              </a:rPr>
+              <a:t>Utilize ubiquitous WhatsApp deep-linking for follow-ups and alerts, avoiding the barrier of requiring parents to download new mobile apps.</a:t>
+            </a:r>
+          </a:p>
+          <a:p>
+            <a:pPr>
+              <a:spcAft>
+                <a:spcPts val="400"/>
+              </a:spcAft>
+            </a:pPr>
+            <a:r>
+              <a:rPr b="1" sz="1000">
+                <a:solidFill>
+                  <a:srgbClr val="0F172A"/>
+                </a:solidFill>
+              </a:rPr>
+              <a:t>• Curriculum &amp; Fee Transparency: </a:t>
+            </a:r>
+            <a:r>
+              <a:rPr b="0" sz="1000">
+                <a:solidFill>
+                  <a:srgbClr val="334155"/>
+                </a:solidFill>
+              </a:rPr>
+              <a:t>Public display of transparent batch timings, fee structures, faculty credentials, and genuine parent testimonials to build neighborhood trust.</a:t>
+            </a:r>
+          </a:p>
+          <a:p>
+            <a:pPr>
+              <a:spcAft>
+                <a:spcPts val="400"/>
+              </a:spcAft>
+            </a:pPr>
+            <a:r>
+              <a:rPr b="1" sz="1000">
+                <a:solidFill>
+                  <a:srgbClr val="0F172A"/>
+                </a:solidFill>
+              </a:rPr>
+              <a:t>• 24/7 AI Doubt Support: </a:t>
+            </a:r>
+            <a:r>
+              <a:rPr b="0" sz="1000">
+                <a:solidFill>
+                  <a:srgbClr val="334155"/>
+                </a:solidFill>
+              </a:rPr>
+              <a:t>Provide accessible doubt resolution for hesitant students outside classroom hours to improve academic outcomes.</a:t>
+            </a:r>
           </a:p>
         </p:txBody>
       </p:sp>
@@ -6546,61 +7835,448 @@
       </p:pic>
       <p:sp>
         <p:nvSpPr>
-          <p:cNvPr id="6" name="TextBox 5">
-            <a:extLst>
-              <a:ext uri="{FF2B5EF4-FFF2-40B4-BE49-F238E27FC236}">
-                <a16:creationId xmlns:a16="http://schemas.microsoft.com/office/drawing/2014/main" id="{AE24D516-77C6-C96A-5F77-D099623448D8}"/>
-              </a:ext>
-            </a:extLst>
-          </p:cNvPr>
-          <p:cNvSpPr txBox="1"/>
+          <p:cNvPr id="10" name="Rounded Rectangle 9"/>
+          <p:cNvSpPr/>
           <p:nvPr/>
         </p:nvSpPr>
         <p:spPr>
           <a:xfrm>
-            <a:off x="179512" y="1293834"/>
-            <a:ext cx="8784976" cy="372794"/>
+            <a:off x="457200" y="1234440"/>
+            <a:ext cx="2560320" cy="4663440"/>
           </a:xfrm>
-          <a:prstGeom prst="rect">
+          <a:prstGeom prst="roundRect">
             <a:avLst/>
           </a:prstGeom>
-          <a:noFill/>
+          <a:solidFill>
+            <a:srgbClr val="F8FAFC"/>
+          </a:solidFill>
+          <a:ln w="25400">
+            <a:solidFill>
+              <a:srgbClr val="C5192D"/>
+            </a:solidFill>
+          </a:ln>
         </p:spPr>
-        <p:txBody>
-          <a:bodyPr wrap="square">
-            <a:spAutoFit/>
-          </a:bodyPr>
+        <p:style>
+          <a:lnRef idx="1">
+            <a:schemeClr val="accent1"/>
+          </a:lnRef>
+          <a:fillRef idx="3">
+            <a:schemeClr val="accent1"/>
+          </a:fillRef>
+          <a:effectRef idx="2">
+            <a:schemeClr val="accent1"/>
+          </a:effectRef>
+          <a:fontRef idx="minor">
+            <a:schemeClr val="lt1"/>
+          </a:fontRef>
+        </p:style>
+        <p:txBody>
+          <a:bodyPr rtlCol="0" anchor="ctr" wrap="square" lIns="164592" rIns="164592" tIns="146304" bIns="146304"/>
           <a:lstStyle/>
           <a:p>
-            <a:pPr marL="0" marR="0" algn="just" fontAlgn="base">
-              <a:lnSpc>
-                <a:spcPct val="107000"/>
-              </a:lnSpc>
-              <a:spcBef>
-                <a:spcPts val="0"/>
-              </a:spcBef>
+            <a:pPr algn="ctr">
               <a:spcAft>
-                <a:spcPts val="0"/>
+                <a:spcPts val="600"/>
               </a:spcAft>
-            </a:pPr>
-            <a:r>
-              <a:rPr lang="en-US" sz="1800" kern="100" dirty="0">
-                <a:solidFill>
-                  <a:srgbClr val="000000"/>
-                </a:solidFill>
-                <a:effectLst/>
-                <a:latin typeface="Verdana" panose="020B0604030504040204" pitchFamily="34" charset="0"/>
-                <a:ea typeface="Times New Roman" panose="02020603050405020304" pitchFamily="18" charset="0"/>
-                <a:cs typeface="Times New Roman" panose="02020603050405020304" pitchFamily="18" charset="0"/>
-              </a:rPr>
-              <a:t> </a:t>
-            </a:r>
-            <a:endParaRPr lang="en-US" sz="2800" kern="100" dirty="0">
-              <a:effectLst/>
-              <a:latin typeface="+mj-lt"/>
-              <a:ea typeface="Calibri" panose="020F0502020204030204" pitchFamily="34" charset="0"/>
-              <a:cs typeface="Times New Roman" panose="02020603050405020304" pitchFamily="18" charset="0"/>
-            </a:endParaRPr>
+              <a:defRPr b="1" sz="1250">
+                <a:solidFill>
+                  <a:srgbClr val="C5192D"/>
+                </a:solidFill>
+              </a:defRPr>
+            </a:pPr>
+            <a:r>
+              <a:t>🎯 SDG 4: Quality Education</a:t>
+            </a:r>
+          </a:p>
+          <a:p>
+            <a:pPr>
+              <a:spcAft>
+                <a:spcPts val="400"/>
+              </a:spcAft>
+            </a:pPr>
+            <a:r>
+              <a:rPr b="1" sz="950">
+                <a:solidFill>
+                  <a:srgbClr val="0F172A"/>
+                </a:solidFill>
+              </a:rPr>
+              <a:t>• Target 4.1 &amp; 4.c: </a:t>
+            </a:r>
+            <a:r>
+              <a:rPr b="0" sz="950">
+                <a:solidFill>
+                  <a:srgbClr val="334155"/>
+                </a:solidFill>
+              </a:rPr>
+              <a:t>Ensure all girls and boys complete free, equitable, and quality primary and secondary education.</a:t>
+            </a:r>
+          </a:p>
+          <a:p>
+            <a:pPr>
+              <a:spcAft>
+                <a:spcPts val="400"/>
+              </a:spcAft>
+            </a:pPr>
+            <a:r>
+              <a:rPr b="1" sz="950">
+                <a:solidFill>
+                  <a:srgbClr val="0F172A"/>
+                </a:solidFill>
+              </a:rPr>
+              <a:t>• Affordable Tutoring: </a:t>
+            </a:r>
+            <a:r>
+              <a:rPr b="0" sz="950">
+                <a:solidFill>
+                  <a:srgbClr val="334155"/>
+                </a:solidFill>
+              </a:rPr>
+              <a:t>Expands neighborhood access to qualified CBSE tutoring in Maths and Science for families who cannot afford exorbitant corporate coaching institutes.</a:t>
+            </a:r>
+          </a:p>
+          <a:p>
+            <a:pPr>
+              <a:spcAft>
+                <a:spcPts val="400"/>
+              </a:spcAft>
+            </a:pPr>
+            <a:r>
+              <a:rPr b="1" sz="950">
+                <a:solidFill>
+                  <a:srgbClr val="0F172A"/>
+                </a:solidFill>
+              </a:rPr>
+              <a:t>• Inclusive Reach: </a:t>
+            </a:r>
+            <a:r>
+              <a:rPr b="0" sz="950">
+                <a:solidFill>
+                  <a:srgbClr val="334155"/>
+                </a:solidFill>
+              </a:rPr>
+              <a:t>Bridges educational gaps for students from adjacent villages (Dundahera, Carterpuri) with tailored foundational batches.</a:t>
+            </a:r>
+          </a:p>
+          <a:p>
+            <a:pPr>
+              <a:spcAft>
+                <a:spcPts val="400"/>
+              </a:spcAft>
+            </a:pPr>
+            <a:r>
+              <a:rPr b="1" sz="950">
+                <a:solidFill>
+                  <a:srgbClr val="0F172A"/>
+                </a:solidFill>
+              </a:rPr>
+              <a:t>• AI Doubt Democratization: </a:t>
+            </a:r>
+            <a:r>
+              <a:rPr b="0" sz="950">
+                <a:solidFill>
+                  <a:srgbClr val="334155"/>
+                </a:solidFill>
+              </a:rPr>
+              <a:t>Integrates 24/7 Google Gemini AI Instant Doubt Solver to provide step-by-step NCERT explanations anytime.</a:t>
+            </a:r>
+          </a:p>
+        </p:txBody>
+      </p:sp>
+      <p:sp>
+        <p:nvSpPr>
+          <p:cNvPr id="11" name="Rounded Rectangle 10"/>
+          <p:cNvSpPr/>
+          <p:nvPr/>
+        </p:nvSpPr>
+        <p:spPr>
+          <a:xfrm>
+            <a:off x="3246120" y="1234440"/>
+            <a:ext cx="2560320" cy="4663440"/>
+          </a:xfrm>
+          <a:prstGeom prst="roundRect">
+            <a:avLst/>
+          </a:prstGeom>
+          <a:solidFill>
+            <a:srgbClr val="F8FAFC"/>
+          </a:solidFill>
+          <a:ln w="25400">
+            <a:solidFill>
+              <a:srgbClr val="A21942"/>
+            </a:solidFill>
+          </a:ln>
+        </p:spPr>
+        <p:style>
+          <a:lnRef idx="1">
+            <a:schemeClr val="accent1"/>
+          </a:lnRef>
+          <a:fillRef idx="3">
+            <a:schemeClr val="accent1"/>
+          </a:fillRef>
+          <a:effectRef idx="2">
+            <a:schemeClr val="accent1"/>
+          </a:effectRef>
+          <a:fontRef idx="minor">
+            <a:schemeClr val="lt1"/>
+          </a:fontRef>
+        </p:style>
+        <p:txBody>
+          <a:bodyPr rtlCol="0" anchor="ctr" wrap="square" lIns="164592" rIns="164592" tIns="146304" bIns="146304"/>
+          <a:lstStyle/>
+          <a:p>
+            <a:pPr algn="ctr">
+              <a:spcAft>
+                <a:spcPts val="600"/>
+              </a:spcAft>
+              <a:defRPr b="1" sz="1250">
+                <a:solidFill>
+                  <a:srgbClr val="A21942"/>
+                </a:solidFill>
+              </a:defRPr>
+            </a:pPr>
+            <a:r>
+              <a:t>💼 SDG 8: Decent Work &amp; Growth</a:t>
+            </a:r>
+          </a:p>
+          <a:p>
+            <a:pPr>
+              <a:spcAft>
+                <a:spcPts val="400"/>
+              </a:spcAft>
+            </a:pPr>
+            <a:r>
+              <a:rPr b="1" sz="950">
+                <a:solidFill>
+                  <a:srgbClr val="0F172A"/>
+                </a:solidFill>
+              </a:rPr>
+              <a:t>• Target 8.3 &amp; 8.5: </a:t>
+            </a:r>
+            <a:r>
+              <a:rPr b="0" sz="950">
+                <a:solidFill>
+                  <a:srgbClr val="334155"/>
+                </a:solidFill>
+              </a:rPr>
+              <a:t>Promote development-oriented policies that support productive activities, entrepreneurship, and innovation.</a:t>
+            </a:r>
+          </a:p>
+          <a:p>
+            <a:pPr>
+              <a:spcAft>
+                <a:spcPts val="400"/>
+              </a:spcAft>
+            </a:pPr>
+            <a:r>
+              <a:rPr b="1" sz="950">
+                <a:solidFill>
+                  <a:srgbClr val="0F172A"/>
+                </a:solidFill>
+              </a:rPr>
+              <a:t>• Micro-Enterprise Empowerment: </a:t>
+            </a:r>
+            <a:r>
+              <a:rPr b="0" sz="950">
+                <a:solidFill>
+                  <a:srgbClr val="334155"/>
+                </a:solidFill>
+              </a:rPr>
+              <a:t>Transforms independent local teachers into sustainable, digitally empowered micro-entrepreneurs.</a:t>
+            </a:r>
+          </a:p>
+          <a:p>
+            <a:pPr>
+              <a:spcAft>
+                <a:spcPts val="400"/>
+              </a:spcAft>
+            </a:pPr>
+            <a:r>
+              <a:rPr b="1" sz="950">
+                <a:solidFill>
+                  <a:srgbClr val="0F172A"/>
+                </a:solidFill>
+              </a:rPr>
+              <a:t>• Capacity Utilization: </a:t>
+            </a:r>
+            <a:r>
+              <a:rPr b="0" sz="950">
+                <a:solidFill>
+                  <a:srgbClr val="334155"/>
+                </a:solidFill>
+              </a:rPr>
+              <a:t>Increases batch enrollment capacity by +65%, directly boosting household income and financial security for educators.</a:t>
+            </a:r>
+          </a:p>
+          <a:p>
+            <a:pPr>
+              <a:spcAft>
+                <a:spcPts val="400"/>
+              </a:spcAft>
+            </a:pPr>
+            <a:r>
+              <a:rPr b="1" sz="950">
+                <a:solidFill>
+                  <a:srgbClr val="0F172A"/>
+                </a:solidFill>
+              </a:rPr>
+              <a:t>• Zero Intermediary Fees: </a:t>
+            </a:r>
+            <a:r>
+              <a:rPr b="0" sz="950">
+                <a:solidFill>
+                  <a:srgbClr val="334155"/>
+                </a:solidFill>
+              </a:rPr>
+              <a:t>Eliminates predatory commission cuts of corporate tuition broker apps, letting teachers retain 100% of student fees.</a:t>
+            </a:r>
+          </a:p>
+        </p:txBody>
+      </p:sp>
+      <p:sp>
+        <p:nvSpPr>
+          <p:cNvPr id="12" name="Rounded Rectangle 11"/>
+          <p:cNvSpPr/>
+          <p:nvPr/>
+        </p:nvSpPr>
+        <p:spPr>
+          <a:xfrm>
+            <a:off x="6035040" y="1234440"/>
+            <a:ext cx="2560320" cy="4663440"/>
+          </a:xfrm>
+          <a:prstGeom prst="roundRect">
+            <a:avLst/>
+          </a:prstGeom>
+          <a:solidFill>
+            <a:srgbClr val="F8FAFC"/>
+          </a:solidFill>
+          <a:ln w="25400">
+            <a:solidFill>
+              <a:srgbClr val="FD6925"/>
+            </a:solidFill>
+          </a:ln>
+        </p:spPr>
+        <p:style>
+          <a:lnRef idx="1">
+            <a:schemeClr val="accent1"/>
+          </a:lnRef>
+          <a:fillRef idx="3">
+            <a:schemeClr val="accent1"/>
+          </a:fillRef>
+          <a:effectRef idx="2">
+            <a:schemeClr val="accent1"/>
+          </a:effectRef>
+          <a:fontRef idx="minor">
+            <a:schemeClr val="lt1"/>
+          </a:fontRef>
+        </p:style>
+        <p:txBody>
+          <a:bodyPr rtlCol="0" anchor="ctr" wrap="square" lIns="164592" rIns="164592" tIns="146304" bIns="146304"/>
+          <a:lstStyle/>
+          <a:p>
+            <a:pPr algn="ctr">
+              <a:spcAft>
+                <a:spcPts val="600"/>
+              </a:spcAft>
+              <a:defRPr b="1" sz="1250">
+                <a:solidFill>
+                  <a:srgbClr val="FD6925"/>
+                </a:solidFill>
+              </a:defRPr>
+            </a:pPr>
+            <a:r>
+              <a:t>🚀 SDG 9: Industry &amp; Innovation</a:t>
+            </a:r>
+          </a:p>
+          <a:p>
+            <a:pPr>
+              <a:spcAft>
+                <a:spcPts val="400"/>
+              </a:spcAft>
+            </a:pPr>
+            <a:r>
+              <a:rPr b="1" sz="950">
+                <a:solidFill>
+                  <a:srgbClr val="0F172A"/>
+                </a:solidFill>
+              </a:rPr>
+              <a:t>• Target 9.c: </a:t>
+            </a:r>
+            <a:r>
+              <a:rPr b="0" sz="950">
+                <a:solidFill>
+                  <a:srgbClr val="334155"/>
+                </a:solidFill>
+              </a:rPr>
+              <a:t>Significantly increase access to information and communications technology.</a:t>
+            </a:r>
+          </a:p>
+          <a:p>
+            <a:pPr>
+              <a:spcAft>
+                <a:spcPts val="400"/>
+              </a:spcAft>
+            </a:pPr>
+            <a:r>
+              <a:rPr b="1" sz="950">
+                <a:solidFill>
+                  <a:srgbClr val="0F172A"/>
+                </a:solidFill>
+              </a:rPr>
+              <a:t>• Digital Infrastructure: </a:t>
+            </a:r>
+            <a:r>
+              <a:rPr b="0" sz="950">
+                <a:solidFill>
+                  <a:srgbClr val="334155"/>
+                </a:solidFill>
+              </a:rPr>
+              <a:t>Modernizes traditional chalk-and-talk neighborhood services with progressive Next.js 15 web architecture.</a:t>
+            </a:r>
+          </a:p>
+          <a:p>
+            <a:pPr>
+              <a:spcAft>
+                <a:spcPts val="400"/>
+              </a:spcAft>
+            </a:pPr>
+            <a:r>
+              <a:rPr b="1" sz="950">
+                <a:solidFill>
+                  <a:srgbClr val="0F172A"/>
+                </a:solidFill>
+              </a:rPr>
+              <a:t>• Smart QR Workflows: </a:t>
+            </a:r>
+            <a:r>
+              <a:rPr b="0" sz="950">
+                <a:solidFill>
+                  <a:srgbClr val="334155"/>
+                </a:solidFill>
+              </a:rPr>
+              <a:t>Introduces contactless QR codes for student attendance passes, marketing standees, and 1-click Google Maps review capture.</a:t>
+            </a:r>
+          </a:p>
+          <a:p>
+            <a:pPr>
+              <a:spcAft>
+                <a:spcPts val="400"/>
+              </a:spcAft>
+            </a:pPr>
+            <a:r>
+              <a:rPr b="1" sz="950">
+                <a:solidFill>
+                  <a:srgbClr val="0F172A"/>
+                </a:solidFill>
+              </a:rPr>
+              <a:t>• Local Discovery Tech: </a:t>
+            </a:r>
+            <a:r>
+              <a:rPr b="0" sz="950">
+                <a:solidFill>
+                  <a:srgbClr val="334155"/>
+                </a:solidFill>
+              </a:rPr>
+              <a:t>Applies Schema.org JSON-LD structured metadata to elevate grassroots educational visibility on global search engines.</a:t>
+            </a:r>
           </a:p>
         </p:txBody>
       </p:sp>
@@ -6811,61 +8487,322 @@
       </p:pic>
       <p:sp>
         <p:nvSpPr>
-          <p:cNvPr id="6" name="TextBox 5">
-            <a:extLst>
-              <a:ext uri="{FF2B5EF4-FFF2-40B4-BE49-F238E27FC236}">
-                <a16:creationId xmlns:a16="http://schemas.microsoft.com/office/drawing/2014/main" id="{AE24D516-77C6-C96A-5F77-D099623448D8}"/>
-              </a:ext>
-            </a:extLst>
-          </p:cNvPr>
-          <p:cNvSpPr txBox="1"/>
+          <p:cNvPr id="10" name="Rounded Rectangle 9"/>
+          <p:cNvSpPr/>
           <p:nvPr/>
         </p:nvSpPr>
         <p:spPr>
           <a:xfrm>
-            <a:off x="179512" y="1293834"/>
-            <a:ext cx="8784976" cy="372794"/>
+            <a:off x="457200" y="1234440"/>
+            <a:ext cx="3977639" cy="4663440"/>
           </a:xfrm>
-          <a:prstGeom prst="rect">
+          <a:prstGeom prst="roundRect">
             <a:avLst/>
           </a:prstGeom>
-          <a:noFill/>
+          <a:solidFill>
+            <a:srgbClr val="F8FAFC"/>
+          </a:solidFill>
+          <a:ln w="12700">
+            <a:solidFill>
+              <a:srgbClr val="E2E8F0"/>
+            </a:solidFill>
+          </a:ln>
         </p:spPr>
-        <p:txBody>
-          <a:bodyPr wrap="square">
-            <a:spAutoFit/>
-          </a:bodyPr>
+        <p:style>
+          <a:lnRef idx="1">
+            <a:schemeClr val="accent1"/>
+          </a:lnRef>
+          <a:fillRef idx="3">
+            <a:schemeClr val="accent1"/>
+          </a:fillRef>
+          <a:effectRef idx="2">
+            <a:schemeClr val="accent1"/>
+          </a:effectRef>
+          <a:fontRef idx="minor">
+            <a:schemeClr val="lt1"/>
+          </a:fontRef>
+        </p:style>
+        <p:txBody>
+          <a:bodyPr rtlCol="0" anchor="ctr" wrap="square" lIns="164592" rIns="164592" tIns="146304" bIns="146304"/>
           <a:lstStyle/>
           <a:p>
-            <a:pPr marL="0" marR="0" algn="just" fontAlgn="base">
-              <a:lnSpc>
-                <a:spcPct val="107000"/>
-              </a:lnSpc>
-              <a:spcBef>
-                <a:spcPts val="0"/>
-              </a:spcBef>
+            <a:pPr algn="ctr">
               <a:spcAft>
-                <a:spcPts val="0"/>
+                <a:spcPts val="600"/>
               </a:spcAft>
-            </a:pPr>
-            <a:r>
-              <a:rPr lang="en-US" sz="1800" kern="100" dirty="0">
-                <a:solidFill>
-                  <a:srgbClr val="000000"/>
-                </a:solidFill>
-                <a:effectLst/>
-                <a:latin typeface="Verdana" panose="020B0604030504040204" pitchFamily="34" charset="0"/>
-                <a:ea typeface="Times New Roman" panose="02020603050405020304" pitchFamily="18" charset="0"/>
-                <a:cs typeface="Times New Roman" panose="02020603050405020304" pitchFamily="18" charset="0"/>
-              </a:rPr>
-              <a:t> </a:t>
-            </a:r>
-            <a:endParaRPr lang="en-US" sz="2800" kern="100" dirty="0">
-              <a:effectLst/>
-              <a:latin typeface="+mj-lt"/>
-              <a:ea typeface="Calibri" panose="020F0502020204030204" pitchFamily="34" charset="0"/>
-              <a:cs typeface="Times New Roman" panose="02020603050405020304" pitchFamily="18" charset="0"/>
-            </a:endParaRPr>
+              <a:defRPr b="1" sz="1300">
+                <a:solidFill>
+                  <a:srgbClr val="0070C0"/>
+                </a:solidFill>
+              </a:defRPr>
+            </a:pPr>
+            <a:r>
+              <a:t>⚙️ 4-Phase Project Methodology</a:t>
+            </a:r>
+          </a:p>
+          <a:p>
+            <a:pPr>
+              <a:spcAft>
+                <a:spcPts val="400"/>
+              </a:spcAft>
+            </a:pPr>
+            <a:r>
+              <a:rPr b="1" sz="1000">
+                <a:solidFill>
+                  <a:srgbClr val="0F172A"/>
+                </a:solidFill>
+              </a:rPr>
+              <a:t>• Phase 1: Needs Assessment &amp; Survey: </a:t>
+            </a:r>
+            <a:r>
+              <a:rPr b="0" sz="1000">
+                <a:solidFill>
+                  <a:srgbClr val="334155"/>
+                </a:solidFill>
+              </a:rPr>
+              <a:t>Onsite field visits to Sector-22B, Gurgaon; structured interviews with Praveen Sir and Rashmi Ma'am; identification of operational bottlenecks.</a:t>
+            </a:r>
+          </a:p>
+          <a:p>
+            <a:pPr>
+              <a:spcAft>
+                <a:spcPts val="400"/>
+              </a:spcAft>
+            </a:pPr>
+            <a:r>
+              <a:rPr b="1" sz="1000">
+                <a:solidFill>
+                  <a:srgbClr val="0F172A"/>
+                </a:solidFill>
+              </a:rPr>
+              <a:t>• Phase 2: Architectural &amp; UI Design: </a:t>
+            </a:r>
+            <a:r>
+              <a:rPr b="0" sz="1000">
+                <a:solidFill>
+                  <a:srgbClr val="334155"/>
+                </a:solidFill>
+              </a:rPr>
+              <a:t>Prototyping responsive layouts for Public Website, Marketing Studio, and Dashboards; formulating strict data contracts.</a:t>
+            </a:r>
+          </a:p>
+          <a:p>
+            <a:pPr>
+              <a:spcAft>
+                <a:spcPts val="400"/>
+              </a:spcAft>
+            </a:pPr>
+            <a:r>
+              <a:rPr b="1" sz="1000">
+                <a:solidFill>
+                  <a:srgbClr val="0F172A"/>
+                </a:solidFill>
+              </a:rPr>
+              <a:t>• Phase 3: Agile Development &amp; Integration: </a:t>
+            </a:r>
+            <a:r>
+              <a:rPr b="0" sz="1000">
+                <a:solidFill>
+                  <a:srgbClr val="334155"/>
+                </a:solidFill>
+              </a:rPr>
+              <a:t>Building Next.js 15 App Router frontend, Tailwind UI system, Firebase Auth SDK, and Google Gemini AI Doubt Solver.</a:t>
+            </a:r>
+          </a:p>
+          <a:p>
+            <a:pPr>
+              <a:spcAft>
+                <a:spcPts val="400"/>
+              </a:spcAft>
+            </a:pPr>
+            <a:r>
+              <a:rPr b="1" sz="1000">
+                <a:solidFill>
+                  <a:srgbClr val="0F172A"/>
+                </a:solidFill>
+              </a:rPr>
+              <a:t>• Phase 4: Field Testing &amp; Verification: </a:t>
+            </a:r>
+            <a:r>
+              <a:rPr b="0" sz="1000">
+                <a:solidFill>
+                  <a:srgbClr val="334155"/>
+                </a:solidFill>
+              </a:rPr>
+              <a:t>Deployment on Vercel; field testing of QR standees; running 14 student pilot trial; Google Business Profile verification and teacher handover.</a:t>
+            </a:r>
+          </a:p>
+        </p:txBody>
+      </p:sp>
+      <p:sp>
+        <p:nvSpPr>
+          <p:cNvPr id="11" name="Rounded Rectangle 10"/>
+          <p:cNvSpPr/>
+          <p:nvPr/>
+        </p:nvSpPr>
+        <p:spPr>
+          <a:xfrm>
+            <a:off x="4709160" y="1234440"/>
+            <a:ext cx="3977639" cy="4663440"/>
+          </a:xfrm>
+          <a:prstGeom prst="roundRect">
+            <a:avLst/>
+          </a:prstGeom>
+          <a:solidFill>
+            <a:srgbClr val="F8FAFC"/>
+          </a:solidFill>
+          <a:ln w="12700">
+            <a:solidFill>
+              <a:srgbClr val="E2E8F0"/>
+            </a:solidFill>
+          </a:ln>
+        </p:spPr>
+        <p:style>
+          <a:lnRef idx="1">
+            <a:schemeClr val="accent1"/>
+          </a:lnRef>
+          <a:fillRef idx="3">
+            <a:schemeClr val="accent1"/>
+          </a:fillRef>
+          <a:effectRef idx="2">
+            <a:schemeClr val="accent1"/>
+          </a:effectRef>
+          <a:fontRef idx="minor">
+            <a:schemeClr val="lt1"/>
+          </a:fontRef>
+        </p:style>
+        <p:txBody>
+          <a:bodyPr rtlCol="0" anchor="ctr" wrap="square" lIns="164592" rIns="164592" tIns="146304" bIns="146304"/>
+          <a:lstStyle/>
+          <a:p>
+            <a:pPr algn="ctr">
+              <a:spcAft>
+                <a:spcPts val="600"/>
+              </a:spcAft>
+              <a:defRPr b="1" sz="1300">
+                <a:solidFill>
+                  <a:srgbClr val="0F172A"/>
+                </a:solidFill>
+              </a:defRPr>
+            </a:pPr>
+            <a:r>
+              <a:t>💻 Full-Stack Technology Stack</a:t>
+            </a:r>
+          </a:p>
+          <a:p>
+            <a:pPr>
+              <a:spcAft>
+                <a:spcPts val="400"/>
+              </a:spcAft>
+            </a:pPr>
+            <a:r>
+              <a:rPr b="1" sz="1000">
+                <a:solidFill>
+                  <a:srgbClr val="0F172A"/>
+                </a:solidFill>
+              </a:rPr>
+              <a:t>• Frontend Framework: </a:t>
+            </a:r>
+            <a:r>
+              <a:rPr b="0" sz="1000">
+                <a:solidFill>
+                  <a:srgbClr val="334155"/>
+                </a:solidFill>
+              </a:rPr>
+              <a:t>Next.js 15 (App Router), React 19, TypeScript 5.7, Tailwind CSS 3.4, Lucide React Iconography.</a:t>
+            </a:r>
+          </a:p>
+          <a:p>
+            <a:pPr>
+              <a:spcAft>
+                <a:spcPts val="400"/>
+              </a:spcAft>
+            </a:pPr>
+            <a:r>
+              <a:rPr b="1" sz="1000">
+                <a:solidFill>
+                  <a:srgbClr val="0F172A"/>
+                </a:solidFill>
+              </a:rPr>
+              <a:t>• Data Persistence: </a:t>
+            </a:r>
+            <a:r>
+              <a:rPr b="0" sz="1000">
+                <a:solidFill>
+                  <a:srgbClr val="334155"/>
+                </a:solidFill>
+              </a:rPr>
+              <a:t>Dual-strategy: Browser LocalStorage (zero-setup offline prototype) + Supabase PostgreSQL relational schema for cloud sync.</a:t>
+            </a:r>
+          </a:p>
+          <a:p>
+            <a:pPr>
+              <a:spcAft>
+                <a:spcPts val="400"/>
+              </a:spcAft>
+            </a:pPr>
+            <a:r>
+              <a:rPr b="1" sz="1000">
+                <a:solidFill>
+                  <a:srgbClr val="0F172A"/>
+                </a:solidFill>
+              </a:rPr>
+              <a:t>• Authentication: </a:t>
+            </a:r>
+            <a:r>
+              <a:rPr b="0" sz="1000">
+                <a:solidFill>
+                  <a:srgbClr val="334155"/>
+                </a:solidFill>
+              </a:rPr>
+              <a:t>Firebase Auth SDK (v11) with cryptographic token decode fallbacks &amp; 1-click role session demo switching.</a:t>
+            </a:r>
+          </a:p>
+          <a:p>
+            <a:pPr>
+              <a:spcAft>
+                <a:spcPts val="400"/>
+              </a:spcAft>
+            </a:pPr>
+            <a:r>
+              <a:rPr b="1" sz="1000">
+                <a:solidFill>
+                  <a:srgbClr val="0F172A"/>
+                </a:solidFill>
+              </a:rPr>
+              <a:t>• AI Engine: </a:t>
+            </a:r>
+            <a:r>
+              <a:rPr b="0" sz="1000">
+                <a:solidFill>
+                  <a:srgbClr val="334155"/>
+                </a:solidFill>
+              </a:rPr>
+              <a:t>Google Gemini API powering the 24/7 CBSE Instant Doubt Resolver Desk with step-by-step NCERT explanations.</a:t>
+            </a:r>
+          </a:p>
+          <a:p>
+            <a:pPr>
+              <a:spcAft>
+                <a:spcPts val="400"/>
+              </a:spcAft>
+            </a:pPr>
+            <a:r>
+              <a:rPr b="1" sz="1000">
+                <a:solidFill>
+                  <a:srgbClr val="0F172A"/>
+                </a:solidFill>
+              </a:rPr>
+              <a:t>• SEO &amp; Local Discovery: </a:t>
+            </a:r>
+            <a:r>
+              <a:rPr b="0" sz="1000">
+                <a:solidFill>
+                  <a:srgbClr val="334155"/>
+                </a:solidFill>
+              </a:rPr>
+              <a:t>Google Business Profile optimization, Schema.org EducationalOrganization JSON-LD, dynamic sitemap &amp; robots.txt.</a:t>
+            </a:r>
           </a:p>
         </p:txBody>
       </p:sp>
@@ -7074,135 +9011,6 @@
           </a:prstGeom>
         </p:spPr>
       </p:pic>
-      <p:sp>
-        <p:nvSpPr>
-          <p:cNvPr id="6" name="TextBox 5">
-            <a:extLst>
-              <a:ext uri="{FF2B5EF4-FFF2-40B4-BE49-F238E27FC236}">
-                <a16:creationId xmlns:a16="http://schemas.microsoft.com/office/drawing/2014/main" id="{AE24D516-77C6-C96A-5F77-D099623448D8}"/>
-              </a:ext>
-            </a:extLst>
-          </p:cNvPr>
-          <p:cNvSpPr txBox="1"/>
-          <p:nvPr/>
-        </p:nvSpPr>
-        <p:spPr>
-          <a:xfrm>
-            <a:off x="179512" y="1293834"/>
-            <a:ext cx="8784976" cy="372794"/>
-          </a:xfrm>
-          <a:prstGeom prst="rect">
-            <a:avLst/>
-          </a:prstGeom>
-          <a:noFill/>
-        </p:spPr>
-        <p:txBody>
-          <a:bodyPr wrap="square">
-            <a:spAutoFit/>
-          </a:bodyPr>
-          <a:lstStyle/>
-          <a:p>
-            <a:pPr marL="0" marR="0" algn="just" fontAlgn="base">
-              <a:lnSpc>
-                <a:spcPct val="107000"/>
-              </a:lnSpc>
-              <a:spcBef>
-                <a:spcPts val="0"/>
-              </a:spcBef>
-              <a:spcAft>
-                <a:spcPts val="0"/>
-              </a:spcAft>
-            </a:pPr>
-            <a:r>
-              <a:rPr lang="en-US" sz="1800" kern="100" dirty="0">
-                <a:solidFill>
-                  <a:srgbClr val="000000"/>
-                </a:solidFill>
-                <a:effectLst/>
-                <a:latin typeface="Verdana" panose="020B0604030504040204" pitchFamily="34" charset="0"/>
-                <a:ea typeface="Times New Roman" panose="02020603050405020304" pitchFamily="18" charset="0"/>
-                <a:cs typeface="Times New Roman" panose="02020603050405020304" pitchFamily="18" charset="0"/>
-              </a:rPr>
-              <a:t> </a:t>
-            </a:r>
-            <a:endParaRPr lang="en-US" sz="2800" kern="100" dirty="0">
-              <a:effectLst/>
-              <a:latin typeface="+mj-lt"/>
-              <a:ea typeface="Calibri" panose="020F0502020204030204" pitchFamily="34" charset="0"/>
-              <a:cs typeface="Times New Roman" panose="02020603050405020304" pitchFamily="18" charset="0"/>
-            </a:endParaRPr>
-          </a:p>
-        </p:txBody>
-      </p:sp>
-      <p:sp>
-        <p:nvSpPr>
-          <p:cNvPr id="8" name="Rectangle 1">
-            <a:extLst>
-              <a:ext uri="{FF2B5EF4-FFF2-40B4-BE49-F238E27FC236}">
-                <a16:creationId xmlns:a16="http://schemas.microsoft.com/office/drawing/2014/main" id="{BB1AC4FE-9A4F-F464-CA8E-3B900C29746B}"/>
-              </a:ext>
-            </a:extLst>
-          </p:cNvPr>
-          <p:cNvSpPr>
-            <a:spLocks noChangeArrowheads="1"/>
-          </p:cNvSpPr>
-          <p:nvPr/>
-        </p:nvSpPr>
-        <p:spPr bwMode="auto">
-          <a:xfrm>
-            <a:off x="0" y="0"/>
-            <a:ext cx="9144000" cy="0"/>
-          </a:xfrm>
-          <a:prstGeom prst="rect">
-            <a:avLst/>
-          </a:prstGeom>
-          <a:noFill/>
-          <a:ln>
-            <a:noFill/>
-          </a:ln>
-          <a:effectLst/>
-          <a:extLst>
-            <a:ext uri="{909E8E84-426E-40DD-AFC4-6F175D3DCCD1}">
-              <a14:hiddenFill xmlns:a14="http://schemas.microsoft.com/office/drawing/2010/main">
-                <a:solidFill>
-                  <a:schemeClr val="accent1"/>
-                </a:solidFill>
-              </a14:hiddenFill>
-            </a:ext>
-            <a:ext uri="{91240B29-F687-4F45-9708-019B960494DF}">
-              <a14:hiddenLine xmlns:a14="http://schemas.microsoft.com/office/drawing/2010/main" w="9525">
-                <a:solidFill>
-                  <a:schemeClr val="tx1"/>
-                </a:solidFill>
-                <a:miter lim="800000"/>
-                <a:headEnd/>
-                <a:tailEnd/>
-              </a14:hiddenLine>
-            </a:ext>
-            <a:ext uri="{AF507438-7753-43E0-B8FC-AC1667EBCBE1}">
-              <a14:hiddenEffects xmlns:a14="http://schemas.microsoft.com/office/drawing/2010/main">
-                <a:effectLst>
-                  <a:outerShdw dist="35921" dir="2700000" algn="ctr" rotWithShape="0">
-                    <a:schemeClr val="bg2"/>
-                  </a:outerShdw>
-                </a:effectLst>
-              </a14:hiddenEffects>
-            </a:ext>
-          </a:extLst>
-        </p:spPr>
-        <p:txBody>
-          <a:bodyPr vert="horz" wrap="none" lIns="91440" tIns="45720" rIns="91440" bIns="45720" numCol="1" anchor="ctr" anchorCtr="0" compatLnSpc="1">
-            <a:prstTxWarp prst="textNoShape">
-              <a:avLst/>
-            </a:prstTxWarp>
-            <a:spAutoFit/>
-          </a:bodyPr>
-          <a:lstStyle/>
-          <a:p>
-            <a:endParaRPr lang="en-IN"/>
-          </a:p>
-        </p:txBody>
-      </p:sp>
       <mc:AlternateContent xmlns:mc="http://schemas.openxmlformats.org/markup-compatibility/2006" xmlns:p14="http://schemas.microsoft.com/office/powerpoint/2010/main">
         <mc:Choice Requires="p14">
           <p:contentPart p14:bwMode="auto" r:id="rId5">
@@ -7254,6 +9062,180 @@
           </p:pic>
         </mc:Fallback>
       </mc:AlternateContent>
+      <p:sp>
+        <p:nvSpPr>
+          <p:cNvPr id="15" name="Rounded Rectangle 14"/>
+          <p:cNvSpPr/>
+          <p:nvPr/>
+        </p:nvSpPr>
+        <p:spPr>
+          <a:xfrm>
+            <a:off x="457200" y="1234440"/>
+            <a:ext cx="4297680" cy="4663440"/>
+          </a:xfrm>
+          <a:prstGeom prst="roundRect">
+            <a:avLst/>
+          </a:prstGeom>
+          <a:solidFill>
+            <a:srgbClr val="F8FAFC"/>
+          </a:solidFill>
+          <a:ln w="12700">
+            <a:solidFill>
+              <a:srgbClr val="E2E8F0"/>
+            </a:solidFill>
+          </a:ln>
+        </p:spPr>
+        <p:style>
+          <a:lnRef idx="1">
+            <a:schemeClr val="accent1"/>
+          </a:lnRef>
+          <a:fillRef idx="3">
+            <a:schemeClr val="accent1"/>
+          </a:fillRef>
+          <a:effectRef idx="2">
+            <a:schemeClr val="accent1"/>
+          </a:effectRef>
+          <a:fontRef idx="minor">
+            <a:schemeClr val="lt1"/>
+          </a:fontRef>
+        </p:style>
+        <p:txBody>
+          <a:bodyPr rtlCol="0" anchor="ctr" wrap="square" lIns="164592" rIns="164592" tIns="146304" bIns="146304"/>
+          <a:lstStyle/>
+          <a:p>
+            <a:pPr algn="ctr">
+              <a:spcAft>
+                <a:spcPts val="600"/>
+              </a:spcAft>
+              <a:defRPr b="1" sz="1300">
+                <a:solidFill>
+                  <a:srgbClr val="0070C0"/>
+                </a:solidFill>
+              </a:defRPr>
+            </a:pPr>
+            <a:r>
+              <a:t>🏗️ Multi-Tier System Architecture</a:t>
+            </a:r>
+          </a:p>
+          <a:p>
+            <a:pPr>
+              <a:spcAft>
+                <a:spcPts val="400"/>
+              </a:spcAft>
+            </a:pPr>
+            <a:r>
+              <a:rPr b="1" sz="950">
+                <a:solidFill>
+                  <a:srgbClr val="0F172A"/>
+                </a:solidFill>
+              </a:rPr>
+              <a:t>• Layer 1: Discovery &amp; Acquisition: </a:t>
+            </a:r>
+            <a:r>
+              <a:rPr b="0" sz="950">
+                <a:solidFill>
+                  <a:srgbClr val="334155"/>
+                </a:solidFill>
+              </a:rPr>
+              <a:t>Public Marketing Site, Course &amp; Fee Catalog, Free Trial Booking Funnel, Local 3-Pack Google Search Simulator.</a:t>
+            </a:r>
+          </a:p>
+          <a:p>
+            <a:pPr>
+              <a:spcAft>
+                <a:spcPts val="400"/>
+              </a:spcAft>
+            </a:pPr>
+            <a:r>
+              <a:rPr b="1" sz="950">
+                <a:solidFill>
+                  <a:srgbClr val="0F172A"/>
+                </a:solidFill>
+              </a:rPr>
+              <a:t>• Layer 2: Local Marketing Engine: </a:t>
+            </a:r>
+            <a:r>
+              <a:rPr b="0" sz="950">
+                <a:solidFill>
+                  <a:srgbClr val="334155"/>
+                </a:solidFill>
+              </a:rPr>
+              <a:t>Marketing Studio for customizable flyers, Reception QR Standee generator, and WhatsApp broadcast campaigns.</a:t>
+            </a:r>
+          </a:p>
+          <a:p>
+            <a:pPr>
+              <a:spcAft>
+                <a:spcPts val="400"/>
+              </a:spcAft>
+            </a:pPr>
+            <a:r>
+              <a:rPr b="1" sz="950">
+                <a:solidFill>
+                  <a:srgbClr val="0F172A"/>
+                </a:solidFill>
+              </a:rPr>
+              <a:t>• Layer 3: Lead Conversion CRM: </a:t>
+            </a:r>
+            <a:r>
+              <a:rPr b="0" sz="950">
+                <a:solidFill>
+                  <a:srgbClr val="334155"/>
+                </a:solidFill>
+              </a:rPr>
+              <a:t>Trial Attendance Manager, Printable Demo Admit Passes with QR verification, 1-Click WhatsApp Parent Follow-ups.</a:t>
+            </a:r>
+          </a:p>
+          <a:p>
+            <a:pPr>
+              <a:spcAft>
+                <a:spcPts val="400"/>
+              </a:spcAft>
+            </a:pPr>
+            <a:r>
+              <a:rPr b="1" sz="950">
+                <a:solidFill>
+                  <a:srgbClr val="0F172A"/>
+                </a:solidFill>
+              </a:rPr>
+              <a:t>• Layer 4: Operational Role Portals: </a:t>
+            </a:r>
+            <a:r>
+              <a:rPr b="0" sz="950">
+                <a:solidFill>
+                  <a:srgbClr val="334155"/>
+                </a:solidFill>
+              </a:rPr>
+              <a:t>• Student: CBSE Attendance Health Meter, Doubt Desk
+• Teacher: Camera QR Scanner, Batch Gradebooks
+• Parent: PTM Slot Reservation, Razorpay UPI Fee Ledger</a:t>
+            </a:r>
+          </a:p>
+          <a:p>
+            <a:pPr>
+              <a:spcAft>
+                <a:spcPts val="400"/>
+              </a:spcAft>
+            </a:pPr>
+            <a:r>
+              <a:rPr b="1" sz="950">
+                <a:solidFill>
+                  <a:srgbClr val="0F172A"/>
+                </a:solidFill>
+              </a:rPr>
+              <a:t>• Layer 5: Persistence &amp; Core Services: </a:t>
+            </a:r>
+            <a:r>
+              <a:rPr b="0" sz="950">
+                <a:solidFill>
+                  <a:srgbClr val="334155"/>
+                </a:solidFill>
+              </a:rPr>
+              <a:t>Supabase DB, Firebase Auth, Google Gemini API, Razorpay Payment Gateway.</a:t>
+            </a:r>
+          </a:p>
+        </p:txBody>
+      </p:sp>
     </p:spTree>
     <p:extLst>
       <p:ext uri="{BB962C8B-B14F-4D97-AF65-F5344CB8AC3E}">
@@ -7489,66 +9471,6 @@
           </a:prstGeom>
         </p:spPr>
       </p:pic>
-      <p:sp>
-        <p:nvSpPr>
-          <p:cNvPr id="6" name="TextBox 5">
-            <a:extLst>
-              <a:ext uri="{FF2B5EF4-FFF2-40B4-BE49-F238E27FC236}">
-                <a16:creationId xmlns:a16="http://schemas.microsoft.com/office/drawing/2014/main" id="{C166FAC4-E627-209B-D9A4-20EC84D69C44}"/>
-              </a:ext>
-            </a:extLst>
-          </p:cNvPr>
-          <p:cNvSpPr txBox="1"/>
-          <p:nvPr/>
-        </p:nvSpPr>
-        <p:spPr>
-          <a:xfrm>
-            <a:off x="179512" y="1293834"/>
-            <a:ext cx="8784976" cy="372794"/>
-          </a:xfrm>
-          <a:prstGeom prst="rect">
-            <a:avLst/>
-          </a:prstGeom>
-          <a:noFill/>
-        </p:spPr>
-        <p:txBody>
-          <a:bodyPr wrap="square">
-            <a:spAutoFit/>
-          </a:bodyPr>
-          <a:lstStyle/>
-          <a:p>
-            <a:pPr marL="0" marR="0" algn="just" fontAlgn="base">
-              <a:lnSpc>
-                <a:spcPct val="107000"/>
-              </a:lnSpc>
-              <a:spcBef>
-                <a:spcPts val="0"/>
-              </a:spcBef>
-              <a:spcAft>
-                <a:spcPts val="0"/>
-              </a:spcAft>
-            </a:pPr>
-            <a:r>
-              <a:rPr lang="en-US" sz="1800" kern="100" dirty="0">
-                <a:solidFill>
-                  <a:srgbClr val="000000"/>
-                </a:solidFill>
-                <a:effectLst/>
-                <a:latin typeface="Verdana" panose="020B0604030504040204" pitchFamily="34" charset="0"/>
-                <a:ea typeface="Times New Roman" panose="02020603050405020304" pitchFamily="18" charset="0"/>
-                <a:cs typeface="Times New Roman" panose="02020603050405020304" pitchFamily="18" charset="0"/>
-              </a:rPr>
-              <a:t> </a:t>
-            </a:r>
-            <a:endParaRPr lang="en-US" sz="2800" kern="100" dirty="0">
-              <a:effectLst/>
-              <a:latin typeface="+mj-lt"/>
-              <a:ea typeface="Calibri" panose="020F0502020204030204" pitchFamily="34" charset="0"/>
-              <a:cs typeface="Times New Roman" panose="02020603050405020304" pitchFamily="18" charset="0"/>
-            </a:endParaRPr>
-          </a:p>
-        </p:txBody>
-      </p:sp>
       <mc:AlternateContent xmlns:mc="http://schemas.openxmlformats.org/markup-compatibility/2006" xmlns:p14="http://schemas.microsoft.com/office/powerpoint/2010/main">
         <mc:Choice Requires="p14">
           <p:contentPart p14:bwMode="auto" r:id="rId5">
@@ -7600,6 +9522,282 @@
           </p:pic>
         </mc:Fallback>
       </mc:AlternateContent>
+      <p:sp>
+        <p:nvSpPr>
+          <p:cNvPr id="12" name="Rounded Rectangle 11"/>
+          <p:cNvSpPr/>
+          <p:nvPr/>
+        </p:nvSpPr>
+        <p:spPr>
+          <a:xfrm>
+            <a:off x="457200" y="1234440"/>
+            <a:ext cx="8229600" cy="1051560"/>
+          </a:xfrm>
+          <a:prstGeom prst="roundRect">
+            <a:avLst/>
+          </a:prstGeom>
+          <a:solidFill>
+            <a:srgbClr val="F0F7FF"/>
+          </a:solidFill>
+          <a:ln w="12700">
+            <a:solidFill>
+              <a:srgbClr val="BADCFF"/>
+            </a:solidFill>
+          </a:ln>
+        </p:spPr>
+        <p:style>
+          <a:lnRef idx="1">
+            <a:schemeClr val="accent1"/>
+          </a:lnRef>
+          <a:fillRef idx="3">
+            <a:schemeClr val="accent1"/>
+          </a:fillRef>
+          <a:effectRef idx="2">
+            <a:schemeClr val="accent1"/>
+          </a:effectRef>
+          <a:fontRef idx="minor">
+            <a:schemeClr val="lt1"/>
+          </a:fontRef>
+        </p:style>
+        <p:txBody>
+          <a:bodyPr rtlCol="0" anchor="ctr" wrap="square" lIns="164592" rIns="164592" tIns="146304" bIns="146304"/>
+          <a:lstStyle/>
+          <a:p>
+            <a:pPr algn="ctr">
+              <a:spcAft>
+                <a:spcPts val="600"/>
+              </a:spcAft>
+              <a:defRPr b="1" sz="1150">
+                <a:solidFill>
+                  <a:srgbClr val="0070C0"/>
+                </a:solidFill>
+              </a:defRPr>
+            </a:pPr>
+            <a:r>
+              <a:t>Weeks 1–3: Project Inception &amp; Field Survey</a:t>
+            </a:r>
+          </a:p>
+          <a:p>
+            <a:pPr>
+              <a:defRPr sz="1000">
+                <a:solidFill>
+                  <a:srgbClr val="334155"/>
+                </a:solidFill>
+              </a:defRPr>
+            </a:pPr>
+            <a:r>
+              <a:t>Onsite field visits to Sector-22B Gurgaon; interviews with Praveen Sir and Rashmi Ma'am; identified offline word-of-mouth bottleneck, established baseline metrics, and mapped UN SDGs 4, 8 &amp; 9.</a:t>
+            </a:r>
+          </a:p>
+        </p:txBody>
+      </p:sp>
+      <p:sp>
+        <p:nvSpPr>
+          <p:cNvPr id="13" name="Rounded Rectangle 12"/>
+          <p:cNvSpPr/>
+          <p:nvPr/>
+        </p:nvSpPr>
+        <p:spPr>
+          <a:xfrm>
+            <a:off x="457200" y="2395728"/>
+            <a:ext cx="8229600" cy="1051560"/>
+          </a:xfrm>
+          <a:prstGeom prst="roundRect">
+            <a:avLst/>
+          </a:prstGeom>
+          <a:solidFill>
+            <a:srgbClr val="F8FAFC"/>
+          </a:solidFill>
+          <a:ln w="12700">
+            <a:solidFill>
+              <a:srgbClr val="E2E8F0"/>
+            </a:solidFill>
+          </a:ln>
+        </p:spPr>
+        <p:style>
+          <a:lnRef idx="1">
+            <a:schemeClr val="accent1"/>
+          </a:lnRef>
+          <a:fillRef idx="3">
+            <a:schemeClr val="accent1"/>
+          </a:fillRef>
+          <a:effectRef idx="2">
+            <a:schemeClr val="accent1"/>
+          </a:effectRef>
+          <a:fontRef idx="minor">
+            <a:schemeClr val="lt1"/>
+          </a:fontRef>
+        </p:style>
+        <p:txBody>
+          <a:bodyPr rtlCol="0" anchor="ctr" wrap="square" lIns="164592" rIns="164592" tIns="146304" bIns="146304"/>
+          <a:lstStyle/>
+          <a:p>
+            <a:pPr algn="ctr">
+              <a:spcAft>
+                <a:spcPts val="600"/>
+              </a:spcAft>
+              <a:defRPr b="1" sz="1150">
+                <a:solidFill>
+                  <a:srgbClr val="0F172A"/>
+                </a:solidFill>
+              </a:defRPr>
+            </a:pPr>
+            <a:r>
+              <a:t>Weeks 4–7: Web Platform &amp; Local SEO Identity</a:t>
+            </a:r>
+          </a:p>
+          <a:p>
+            <a:pPr>
+              <a:defRPr sz="1000">
+                <a:solidFill>
+                  <a:srgbClr val="334155"/>
+                </a:solidFill>
+              </a:defRPr>
+            </a:pPr>
+            <a:r>
+              <a:t>Architected Next.js 15 App Router platform with course catalog, teacher credentials, transparent fees, Google Business Profile optimization, and 1-Click Parent Review Assistant.</a:t>
+            </a:r>
+          </a:p>
+        </p:txBody>
+      </p:sp>
+      <p:sp>
+        <p:nvSpPr>
+          <p:cNvPr id="14" name="Rounded Rectangle 13"/>
+          <p:cNvSpPr/>
+          <p:nvPr/>
+        </p:nvSpPr>
+        <p:spPr>
+          <a:xfrm>
+            <a:off x="457200" y="3557016"/>
+            <a:ext cx="8229600" cy="1051560"/>
+          </a:xfrm>
+          <a:prstGeom prst="roundRect">
+            <a:avLst/>
+          </a:prstGeom>
+          <a:solidFill>
+            <a:srgbClr val="F8FAFC"/>
+          </a:solidFill>
+          <a:ln w="12700">
+            <a:solidFill>
+              <a:srgbClr val="E2E8F0"/>
+            </a:solidFill>
+          </a:ln>
+        </p:spPr>
+        <p:style>
+          <a:lnRef idx="1">
+            <a:schemeClr val="accent1"/>
+          </a:lnRef>
+          <a:fillRef idx="3">
+            <a:schemeClr val="accent1"/>
+          </a:fillRef>
+          <a:effectRef idx="2">
+            <a:schemeClr val="accent1"/>
+          </a:effectRef>
+          <a:fontRef idx="minor">
+            <a:schemeClr val="lt1"/>
+          </a:fontRef>
+        </p:style>
+        <p:txBody>
+          <a:bodyPr rtlCol="0" anchor="ctr" wrap="square" lIns="164592" rIns="164592" tIns="146304" bIns="146304"/>
+          <a:lstStyle/>
+          <a:p>
+            <a:pPr algn="ctr">
+              <a:spcAft>
+                <a:spcPts val="600"/>
+              </a:spcAft>
+              <a:defRPr b="1" sz="1150">
+                <a:solidFill>
+                  <a:srgbClr val="0F172A"/>
+                </a:solidFill>
+              </a:defRPr>
+            </a:pPr>
+            <a:r>
+              <a:t>Weeks 8–11: Trial CRM, Marketing Studio &amp; Portals</a:t>
+            </a:r>
+          </a:p>
+          <a:p>
+            <a:pPr>
+              <a:defRPr sz="1000">
+                <a:solidFill>
+                  <a:srgbClr val="334155"/>
+                </a:solidFill>
+              </a:defRPr>
+            </a:pPr>
+            <a:r>
+              <a:t>Developed 3-Day Free Trial conversion pipeline, printable student demo passes, automated WhatsApp follow-ups, and Marketing Studio for customizable flyers and reception QR standees.</a:t>
+            </a:r>
+          </a:p>
+        </p:txBody>
+      </p:sp>
+      <p:sp>
+        <p:nvSpPr>
+          <p:cNvPr id="15" name="Rounded Rectangle 14"/>
+          <p:cNvSpPr/>
+          <p:nvPr/>
+        </p:nvSpPr>
+        <p:spPr>
+          <a:xfrm>
+            <a:off x="457200" y="4718304"/>
+            <a:ext cx="8229600" cy="1051560"/>
+          </a:xfrm>
+          <a:prstGeom prst="roundRect">
+            <a:avLst/>
+          </a:prstGeom>
+          <a:solidFill>
+            <a:srgbClr val="ECFDF5"/>
+          </a:solidFill>
+          <a:ln w="12700">
+            <a:solidFill>
+              <a:srgbClr val="A7F3D0"/>
+            </a:solidFill>
+          </a:ln>
+        </p:spPr>
+        <p:style>
+          <a:lnRef idx="1">
+            <a:schemeClr val="accent1"/>
+          </a:lnRef>
+          <a:fillRef idx="3">
+            <a:schemeClr val="accent1"/>
+          </a:fillRef>
+          <a:effectRef idx="2">
+            <a:schemeClr val="accent1"/>
+          </a:effectRef>
+          <a:fontRef idx="minor">
+            <a:schemeClr val="lt1"/>
+          </a:fontRef>
+        </p:style>
+        <p:txBody>
+          <a:bodyPr rtlCol="0" anchor="ctr" wrap="square" lIns="164592" rIns="164592" tIns="146304" bIns="146304"/>
+          <a:lstStyle/>
+          <a:p>
+            <a:pPr algn="ctr">
+              <a:spcAft>
+                <a:spcPts val="600"/>
+              </a:spcAft>
+              <a:defRPr b="1" sz="1150">
+                <a:solidFill>
+                  <a:srgbClr val="059669"/>
+                </a:solidFill>
+              </a:defRPr>
+            </a:pPr>
+            <a:r>
+              <a:t>Weeks 12–14: Pilot Rollout, Testing &amp; Evaluation</a:t>
+            </a:r>
+          </a:p>
+          <a:p>
+            <a:pPr>
+              <a:defRPr sz="1000">
+                <a:solidFill>
+                  <a:srgbClr val="334155"/>
+                </a:solidFill>
+              </a:defRPr>
+            </a:pPr>
+            <a:r>
+              <a:t>Conducted live pilot with 14 prospective students; achieved 66.7% trial conversion; finalized academic report, repository documentation, and completed final faculty presentation.</a:t>
+            </a:r>
+          </a:p>
+        </p:txBody>
+      </p:sp>
     </p:spTree>
     <p:extLst>
       <p:ext uri="{BB962C8B-B14F-4D97-AF65-F5344CB8AC3E}">
@@ -7807,61 +10005,345 @@
       </p:pic>
       <p:sp>
         <p:nvSpPr>
-          <p:cNvPr id="6" name="TextBox 5">
-            <a:extLst>
-              <a:ext uri="{FF2B5EF4-FFF2-40B4-BE49-F238E27FC236}">
-                <a16:creationId xmlns:a16="http://schemas.microsoft.com/office/drawing/2014/main" id="{AE24D516-77C6-C96A-5F77-D099623448D8}"/>
-              </a:ext>
-            </a:extLst>
-          </p:cNvPr>
-          <p:cNvSpPr txBox="1"/>
+          <p:cNvPr id="10" name="Rounded Rectangle 9"/>
+          <p:cNvSpPr/>
           <p:nvPr/>
         </p:nvSpPr>
         <p:spPr>
           <a:xfrm>
-            <a:off x="179512" y="1293834"/>
-            <a:ext cx="8784976" cy="372794"/>
+            <a:off x="457200" y="1234440"/>
+            <a:ext cx="3977639" cy="4663440"/>
           </a:xfrm>
-          <a:prstGeom prst="rect">
+          <a:prstGeom prst="roundRect">
             <a:avLst/>
           </a:prstGeom>
-          <a:noFill/>
+          <a:solidFill>
+            <a:srgbClr val="F8FAFC"/>
+          </a:solidFill>
+          <a:ln w="12700">
+            <a:solidFill>
+              <a:srgbClr val="E2E8F0"/>
+            </a:solidFill>
+          </a:ln>
         </p:spPr>
-        <p:txBody>
-          <a:bodyPr wrap="square">
-            <a:spAutoFit/>
-          </a:bodyPr>
+        <p:style>
+          <a:lnRef idx="1">
+            <a:schemeClr val="accent1"/>
+          </a:lnRef>
+          <a:fillRef idx="3">
+            <a:schemeClr val="accent1"/>
+          </a:fillRef>
+          <a:effectRef idx="2">
+            <a:schemeClr val="accent1"/>
+          </a:effectRef>
+          <a:fontRef idx="minor">
+            <a:schemeClr val="lt1"/>
+          </a:fontRef>
+        </p:style>
+        <p:txBody>
+          <a:bodyPr rtlCol="0" anchor="ctr" wrap="square" lIns="164592" rIns="164592" tIns="146304" bIns="146304"/>
           <a:lstStyle/>
           <a:p>
-            <a:pPr marL="0" marR="0" algn="just" fontAlgn="base">
-              <a:lnSpc>
-                <a:spcPct val="107000"/>
-              </a:lnSpc>
-              <a:spcBef>
-                <a:spcPts val="0"/>
-              </a:spcBef>
+            <a:pPr algn="ctr">
               <a:spcAft>
-                <a:spcPts val="0"/>
+                <a:spcPts val="600"/>
               </a:spcAft>
-            </a:pPr>
-            <a:r>
-              <a:rPr lang="en-US" sz="1800" kern="100" dirty="0">
-                <a:solidFill>
-                  <a:srgbClr val="000000"/>
-                </a:solidFill>
-                <a:effectLst/>
-                <a:latin typeface="Verdana" panose="020B0604030504040204" pitchFamily="34" charset="0"/>
-                <a:ea typeface="Times New Roman" panose="02020603050405020304" pitchFamily="18" charset="0"/>
-                <a:cs typeface="Times New Roman" panose="02020603050405020304" pitchFamily="18" charset="0"/>
-              </a:rPr>
-              <a:t> </a:t>
-            </a:r>
-            <a:endParaRPr lang="en-US" sz="2800" kern="100" dirty="0">
-              <a:effectLst/>
-              <a:latin typeface="+mj-lt"/>
-              <a:ea typeface="Calibri" panose="020F0502020204030204" pitchFamily="34" charset="0"/>
-              <a:cs typeface="Times New Roman" panose="02020603050405020304" pitchFamily="18" charset="0"/>
-            </a:endParaRPr>
+              <a:defRPr b="1" sz="1300">
+                <a:solidFill>
+                  <a:srgbClr val="0070C0"/>
+                </a:solidFill>
+              </a:defRPr>
+            </a:pPr>
+            <a:r>
+              <a:t>📊 Data Entities &amp; Schemas Managed</a:t>
+            </a:r>
+          </a:p>
+          <a:p>
+            <a:pPr>
+              <a:spcAft>
+                <a:spcPts val="400"/>
+              </a:spcAft>
+            </a:pPr>
+            <a:r>
+              <a:rPr b="1" sz="1000">
+                <a:solidFill>
+                  <a:srgbClr val="0F172A"/>
+                </a:solidFill>
+              </a:rPr>
+              <a:t>• Lead &amp; Trial CRM Pipeline: </a:t>
+            </a:r>
+            <a:r>
+              <a:rPr b="0" sz="1000">
+                <a:solidFill>
+                  <a:srgbClr val="334155"/>
+                </a:solidFill>
+              </a:rPr>
+              <a:t>Inquiries (New, Contacted, Enrolled), 3-Day Demo Registrations, Attendance Status (Attended, Absent), Parent Feedback Logs.</a:t>
+            </a:r>
+          </a:p>
+          <a:p>
+            <a:pPr>
+              <a:spcAft>
+                <a:spcPts val="400"/>
+              </a:spcAft>
+            </a:pPr>
+            <a:r>
+              <a:rPr b="1" sz="1000">
+                <a:solidFill>
+                  <a:srgbClr val="0F172A"/>
+                </a:solidFill>
+              </a:rPr>
+              <a:t>• Academic &amp; Batch Records: </a:t>
+            </a:r>
+            <a:r>
+              <a:rPr b="0" sz="1000">
+                <a:solidFill>
+                  <a:srgbClr val="334155"/>
+                </a:solidFill>
+              </a:rPr>
+              <a:t>Active student profiles, teacher master records, subject batches, weekly test marks, and attendance check-in histories.</a:t>
+            </a:r>
+          </a:p>
+          <a:p>
+            <a:pPr>
+              <a:spcAft>
+                <a:spcPts val="400"/>
+              </a:spcAft>
+            </a:pPr>
+            <a:r>
+              <a:rPr b="1" sz="1000">
+                <a:solidFill>
+                  <a:srgbClr val="0F172A"/>
+                </a:solidFill>
+              </a:rPr>
+              <a:t>• Communication &amp; Notices: </a:t>
+            </a:r>
+            <a:r>
+              <a:rPr b="0" sz="1000">
+                <a:solidFill>
+                  <a:srgbClr val="334155"/>
+                </a:solidFill>
+              </a:rPr>
+              <a:t>Automated absentee alerts, weekend PTM reservations, batch broadcast notices, and customized WhatsApp messages.</a:t>
+            </a:r>
+          </a:p>
+          <a:p>
+            <a:pPr>
+              <a:spcAft>
+                <a:spcPts val="400"/>
+              </a:spcAft>
+            </a:pPr>
+            <a:r>
+              <a:rPr b="1" sz="1000">
+                <a:solidFill>
+                  <a:srgbClr val="0F172A"/>
+                </a:solidFill>
+              </a:rPr>
+              <a:t>• Financial Transactions: </a:t>
+            </a:r>
+            <a:r>
+              <a:rPr b="0" sz="1000">
+                <a:solidFill>
+                  <a:srgbClr val="334155"/>
+                </a:solidFill>
+              </a:rPr>
+              <a:t>Tuition fee ledger, monthly dues tracking, digital receipt generation, and Razorpay payment records.</a:t>
+            </a:r>
+          </a:p>
+          <a:p>
+            <a:pPr>
+              <a:spcAft>
+                <a:spcPts val="400"/>
+              </a:spcAft>
+            </a:pPr>
+            <a:r>
+              <a:rPr b="1" sz="1000">
+                <a:solidFill>
+                  <a:srgbClr val="0F172A"/>
+                </a:solidFill>
+              </a:rPr>
+              <a:t>• Educational Content Vault: </a:t>
+            </a:r>
+            <a:r>
+              <a:rPr b="0" sz="1000">
+                <a:solidFill>
+                  <a:srgbClr val="334155"/>
+                </a:solidFill>
+              </a:rPr>
+              <a:t>CBSE practice question banks, NCERT study material PDFs, curated video lessons, and AI doubt resolution transcripts.</a:t>
+            </a:r>
+          </a:p>
+        </p:txBody>
+      </p:sp>
+      <p:sp>
+        <p:nvSpPr>
+          <p:cNvPr id="11" name="Rounded Rectangle 10"/>
+          <p:cNvSpPr/>
+          <p:nvPr/>
+        </p:nvSpPr>
+        <p:spPr>
+          <a:xfrm>
+            <a:off x="4709160" y="1234440"/>
+            <a:ext cx="3977639" cy="4663440"/>
+          </a:xfrm>
+          <a:prstGeom prst="roundRect">
+            <a:avLst/>
+          </a:prstGeom>
+          <a:solidFill>
+            <a:srgbClr val="F8FAFC"/>
+          </a:solidFill>
+          <a:ln w="12700">
+            <a:solidFill>
+              <a:srgbClr val="E2E8F0"/>
+            </a:solidFill>
+          </a:ln>
+        </p:spPr>
+        <p:style>
+          <a:lnRef idx="1">
+            <a:schemeClr val="accent1"/>
+          </a:lnRef>
+          <a:fillRef idx="3">
+            <a:schemeClr val="accent1"/>
+          </a:fillRef>
+          <a:effectRef idx="2">
+            <a:schemeClr val="accent1"/>
+          </a:effectRef>
+          <a:fontRef idx="minor">
+            <a:schemeClr val="lt1"/>
+          </a:fontRef>
+        </p:style>
+        <p:txBody>
+          <a:bodyPr rtlCol="0" anchor="ctr" wrap="square" lIns="164592" rIns="164592" tIns="146304" bIns="146304"/>
+          <a:lstStyle/>
+          <a:p>
+            <a:pPr algn="ctr">
+              <a:spcAft>
+                <a:spcPts val="600"/>
+              </a:spcAft>
+              <a:defRPr b="1" sz="1300">
+                <a:solidFill>
+                  <a:srgbClr val="0F172A"/>
+                </a:solidFill>
+              </a:defRPr>
+            </a:pPr>
+            <a:r>
+              <a:t>🛠️ Technical, Cloud &amp; Field Resources</a:t>
+            </a:r>
+          </a:p>
+          <a:p>
+            <a:pPr>
+              <a:spcAft>
+                <a:spcPts val="400"/>
+              </a:spcAft>
+            </a:pPr>
+            <a:r>
+              <a:rPr b="1" sz="1000">
+                <a:solidFill>
+                  <a:srgbClr val="0F172A"/>
+                </a:solidFill>
+              </a:rPr>
+              <a:t>• Zero-Cost Cloud Infrastructure: </a:t>
+            </a:r>
+            <a:r>
+              <a:rPr b="0" sz="1000">
+                <a:solidFill>
+                  <a:srgbClr val="334155"/>
+                </a:solidFill>
+              </a:rPr>
+              <a:t>Vercel Edge Network for high-speed SSR web hosting; Supabase PostgreSQL cloud database; Firebase Authentication.</a:t>
+            </a:r>
+          </a:p>
+          <a:p>
+            <a:pPr>
+              <a:spcAft>
+                <a:spcPts val="400"/>
+              </a:spcAft>
+            </a:pPr>
+            <a:r>
+              <a:rPr b="1" sz="1000">
+                <a:solidFill>
+                  <a:srgbClr val="0F172A"/>
+                </a:solidFill>
+              </a:rPr>
+              <a:t>• AI Engine Infrastructure: </a:t>
+            </a:r>
+            <a:r>
+              <a:rPr b="0" sz="1000">
+                <a:solidFill>
+                  <a:srgbClr val="334155"/>
+                </a:solidFill>
+              </a:rPr>
+              <a:t>Google Gemini API integrated securely via runtime server routes for 24/7 doubt resolution.</a:t>
+            </a:r>
+          </a:p>
+          <a:p>
+            <a:pPr>
+              <a:spcAft>
+                <a:spcPts val="400"/>
+              </a:spcAft>
+            </a:pPr>
+            <a:r>
+              <a:rPr b="1" sz="1000">
+                <a:solidFill>
+                  <a:srgbClr val="0F172A"/>
+                </a:solidFill>
+              </a:rPr>
+              <a:t>• Responsive Multi-Device Support: </a:t>
+            </a:r>
+            <a:r>
+              <a:rPr b="0" sz="1000">
+                <a:solidFill>
+                  <a:srgbClr val="334155"/>
+                </a:solidFill>
+              </a:rPr>
+              <a:t>Fully responsive client interfaces compatible across Android/iOS mobile devices, tablets, and desktop workstations.</a:t>
+            </a:r>
+          </a:p>
+          <a:p>
+            <a:pPr>
+              <a:spcAft>
+                <a:spcPts val="400"/>
+              </a:spcAft>
+            </a:pPr>
+            <a:r>
+              <a:rPr b="1" sz="1000">
+                <a:solidFill>
+                  <a:srgbClr val="0F172A"/>
+                </a:solidFill>
+              </a:rPr>
+              <a:t>• Physical Marketing Collateral: </a:t>
+            </a:r>
+            <a:r>
+              <a:rPr b="0" sz="1000">
+                <a:solidFill>
+                  <a:srgbClr val="334155"/>
+                </a:solidFill>
+              </a:rPr>
+              <a:t>Browser-printable A4 admission flyers, reception desk QR standees, and society bulletin board notice posters.</a:t>
+            </a:r>
+          </a:p>
+          <a:p>
+            <a:pPr>
+              <a:spcAft>
+                <a:spcPts val="400"/>
+              </a:spcAft>
+            </a:pPr>
+            <a:r>
+              <a:rPr b="1" sz="1000">
+                <a:solidFill>
+                  <a:srgbClr val="0F172A"/>
+                </a:solidFill>
+              </a:rPr>
+              <a:t>• Local Citation Assets: </a:t>
+            </a:r>
+            <a:r>
+              <a:rPr b="0" sz="1000">
+                <a:solidFill>
+                  <a:srgbClr val="334155"/>
+                </a:solidFill>
+              </a:rPr>
+              <a:t>Google Maps verified place pin, standardized NAP citations across local directories, and WhatsApp Business community link.</a:t>
+            </a:r>
           </a:p>
         </p:txBody>
       </p:sp>

--- a/Community_Service_Presentation.pptx
+++ b/Community_Service_Presentation.pptx
@@ -4863,259 +4863,105 @@
       </p:pic>
       <p:sp>
         <p:nvSpPr>
-          <p:cNvPr id="10" name="Rounded Rectangle 9"/>
-          <p:cNvSpPr/>
+          <p:cNvPr id="6" name="TextBox 5">
+            <a:extLst>
+              <a:ext uri="{FF2B5EF4-FFF2-40B4-BE49-F238E27FC236}">
+                <a16:creationId xmlns:a16="http://schemas.microsoft.com/office/drawing/2014/main" id="{AE24D516-77C6-C96A-5F77-D099623448D8}"/>
+              </a:ext>
+            </a:extLst>
+          </p:cNvPr>
+          <p:cNvSpPr txBox="1"/>
           <p:nvPr/>
         </p:nvSpPr>
         <p:spPr>
           <a:xfrm>
-            <a:off x="457200" y="1234440"/>
-            <a:ext cx="4114800" cy="4663440"/>
+            <a:off x="731520" y="1234440"/>
+            <a:ext cx="7680960" cy="4480560"/>
           </a:xfrm>
-          <a:prstGeom prst="roundRect">
+          <a:prstGeom prst="rect">
             <a:avLst/>
           </a:prstGeom>
-          <a:solidFill>
-            <a:srgbClr val="F8FAFC"/>
-          </a:solidFill>
-          <a:ln w="12700">
-            <a:solidFill>
-              <a:srgbClr val="E2E8F0"/>
-            </a:solidFill>
-          </a:ln>
+          <a:noFill/>
         </p:spPr>
-        <p:style>
-          <a:lnRef idx="1">
-            <a:schemeClr val="accent1"/>
-          </a:lnRef>
-          <a:fillRef idx="3">
-            <a:schemeClr val="accent1"/>
-          </a:fillRef>
-          <a:effectRef idx="2">
-            <a:schemeClr val="accent1"/>
-          </a:effectRef>
-          <a:fontRef idx="minor">
-            <a:schemeClr val="lt1"/>
-          </a:fontRef>
-        </p:style>
-        <p:txBody>
-          <a:bodyPr rtlCol="0" anchor="ctr" wrap="square" lIns="164592" rIns="164592" tIns="146304" bIns="146304"/>
+        <p:txBody>
+          <a:bodyPr wrap="square">
+            <a:spAutoFit/>
+          </a:bodyPr>
           <a:lstStyle/>
           <a:p>
-            <a:pPr algn="ctr">
+            <a:pPr marL="0" marR="0" algn="just" fontAlgn="base">
+              <a:lnSpc>
+                <a:spcPct val="107000"/>
+              </a:lnSpc>
+              <a:spcBef>
+                <a:spcPts val="0"/>
+              </a:spcBef>
               <a:spcAft>
-                <a:spcPts val="600"/>
+                <a:spcPts val="200"/>
               </a:spcAft>
-              <a:defRPr b="1" sz="1300">
-                <a:solidFill>
-                  <a:srgbClr val="0070C0"/>
-                </a:solidFill>
-              </a:defRPr>
             </a:pPr>
             <a:r>
-              <a:t>👥 Key Stakeholder Usecases</a:t>
+              <a:rPr b="1" sz="1450">
+                <a:solidFill>
+                  <a:srgbClr val="003366"/>
+                </a:solidFill>
+              </a:rPr>
+              <a:t>Primary Real-World Usecases</a:t>
+            </a:r>
+            <a:endParaRPr lang="en-US" sz="2800" kern="100" dirty="0">
+              <a:effectLst/>
+              <a:latin typeface="+mj-lt"/>
+              <a:ea typeface="Calibri" panose="020F0502020204030204" pitchFamily="34" charset="0"/>
+              <a:cs typeface="Times New Roman" panose="02020603050405020304" pitchFamily="18" charset="0"/>
+            </a:endParaRPr>
+          </a:p>
+          <a:p>
+            <a:pPr lvl="1">
+              <a:spcAft>
+                <a:spcPts val="1000"/>
+              </a:spcAft>
+            </a:pPr>
+            <a:r>
+              <a:rPr b="0" sz="1200">
+                <a:solidFill>
+                  <a:srgbClr val="334155"/>
+                </a:solidFill>
+              </a:rPr>
+              <a:t>• Usecase 1 (Parent Discovery): A parent in Sector 22B searches for 'Maths tuition near me', finds Prime Learning on Google Maps with 4.9★ rating, and books a 3-Day Free Demo class.
+• Usecase 2 (Teacher Operations): Teachers scan student QR passes on arrival for instant attendance logging, enter weekly test scores into digital gradebooks, and share homework notes.
+• Usecase 3 (Demo Lead Conversion): Admin generates a printable Demo Pass, logs student attendance, and triggers automated WhatsApp feedback to parents to confirm enrollment.
+• Usecase 4 (Student Self-Study): A student uses the 24/7 AI Doubt Solver for step-by-step NCERT Maths solutions and tracks their CBSE attendance health meter (&gt;75%).</a:t>
             </a:r>
           </a:p>
           <a:p>
             <a:pPr>
+              <a:spcAft>
+                <a:spcPts val="200"/>
+              </a:spcAft>
+            </a:pPr>
+            <a:r>
+              <a:rPr b="1" sz="1450">
+                <a:solidFill>
+                  <a:srgbClr val="003366"/>
+                </a:solidFill>
+              </a:rPr>
+              <a:t>Project Scope &amp; Future Roadmap</a:t>
+            </a:r>
+          </a:p>
+          <a:p>
+            <a:pPr lvl="1">
               <a:spcAft>
                 <a:spcPts val="400"/>
               </a:spcAft>
             </a:pPr>
             <a:r>
-              <a:rPr b="1" sz="950">
-                <a:solidFill>
-                  <a:srgbClr val="0F172A"/>
+              <a:rPr b="0" sz="1200">
+                <a:solidFill>
+                  <a:srgbClr val="334155"/>
                 </a:solidFill>
               </a:rPr>
-              <a:t>• Usecase 1 (Parent Discovery): </a:t>
-            </a:r>
-            <a:r>
-              <a:rPr b="0" sz="950">
-                <a:solidFill>
-                  <a:srgbClr val="334155"/>
-                </a:solidFill>
-              </a:rPr>
-              <a:t>Nearby parent searches 'Maths tuition Sec 22B', views verified 4.9★ Google Maps card, inspects transparent fees, and books a 3-Day Free Demo class.</a:t>
-            </a:r>
-          </a:p>
-          <a:p>
-            <a:pPr>
-              <a:spcAft>
-                <a:spcPts val="400"/>
-              </a:spcAft>
-            </a:pPr>
-            <a:r>
-              <a:rPr b="1" sz="950">
-                <a:solidFill>
-                  <a:srgbClr val="0F172A"/>
-                </a:solidFill>
-              </a:rPr>
-              <a:t>• Usecase 2 (Teacher Operations): </a:t>
-            </a:r>
-            <a:r>
-              <a:rPr b="0" sz="950">
-                <a:solidFill>
-                  <a:srgbClr val="334155"/>
-                </a:solidFill>
-              </a:rPr>
-              <a:t>Teachers scan student QR passes on arrival for instant attendance logging, enter weekly test scores into digital gradebooks, and share homework notes.</a:t>
-            </a:r>
-          </a:p>
-          <a:p>
-            <a:pPr>
-              <a:spcAft>
-                <a:spcPts val="400"/>
-              </a:spcAft>
-            </a:pPr>
-            <a:r>
-              <a:rPr b="1" sz="950">
-                <a:solidFill>
-                  <a:srgbClr val="0F172A"/>
-                </a:solidFill>
-              </a:rPr>
-              <a:t>• Usecase 3 (Demo Lead Conversion): </a:t>
-            </a:r>
-            <a:r>
-              <a:rPr b="0" sz="950">
-                <a:solidFill>
-                  <a:srgbClr val="334155"/>
-                </a:solidFill>
-              </a:rPr>
-              <a:t>Admin issues printable Demo Admit Card, logs student trial attendance, and triggers automated WhatsApp feedback to parents to confirm enrollment.</a:t>
-            </a:r>
-          </a:p>
-          <a:p>
-            <a:pPr>
-              <a:spcAft>
-                <a:spcPts val="400"/>
-              </a:spcAft>
-            </a:pPr>
-            <a:r>
-              <a:rPr b="1" sz="950">
-                <a:solidFill>
-                  <a:srgbClr val="0F172A"/>
-                </a:solidFill>
-              </a:rPr>
-              <a:t>• Usecase 4 (Student Self-Paced Learning): </a:t>
-            </a:r>
-            <a:r>
-              <a:rPr b="0" sz="950">
-                <a:solidFill>
-                  <a:srgbClr val="334155"/>
-                </a:solidFill>
-              </a:rPr>
-              <a:t>Student uses 24/7 AI Doubt Solver for step-by-step NCERT problem explanations and tracks CBSE attendance health meter (&gt;75%).</a:t>
-            </a:r>
-          </a:p>
-        </p:txBody>
-      </p:sp>
-      <p:sp>
-        <p:nvSpPr>
-          <p:cNvPr id="11" name="Rounded Rectangle 10"/>
-          <p:cNvSpPr/>
-          <p:nvPr/>
-        </p:nvSpPr>
-        <p:spPr>
-          <a:xfrm>
-            <a:off x="4800600" y="1234440"/>
-            <a:ext cx="3886200" cy="4663440"/>
-          </a:xfrm>
-          <a:prstGeom prst="roundRect">
-            <a:avLst/>
-          </a:prstGeom>
-          <a:solidFill>
-            <a:srgbClr val="F8FAFC"/>
-          </a:solidFill>
-          <a:ln w="12700">
-            <a:solidFill>
-              <a:srgbClr val="E2E8F0"/>
-            </a:solidFill>
-          </a:ln>
-        </p:spPr>
-        <p:style>
-          <a:lnRef idx="1">
-            <a:schemeClr val="accent1"/>
-          </a:lnRef>
-          <a:fillRef idx="3">
-            <a:schemeClr val="accent1"/>
-          </a:fillRef>
-          <a:effectRef idx="2">
-            <a:schemeClr val="accent1"/>
-          </a:effectRef>
-          <a:fontRef idx="minor">
-            <a:schemeClr val="lt1"/>
-          </a:fontRef>
-        </p:style>
-        <p:txBody>
-          <a:bodyPr rtlCol="0" anchor="ctr" wrap="square" lIns="164592" rIns="164592" tIns="146304" bIns="146304"/>
-          <a:lstStyle/>
-          <a:p>
-            <a:pPr algn="ctr">
-              <a:spcAft>
-                <a:spcPts val="600"/>
-              </a:spcAft>
-              <a:defRPr b="1" sz="1300">
-                <a:solidFill>
-                  <a:srgbClr val="0F172A"/>
-                </a:solidFill>
-              </a:defRPr>
-            </a:pPr>
-            <a:r>
-              <a:t>🔍 Project Scope &amp; Future Roadmap</a:t>
-            </a:r>
-          </a:p>
-          <a:p>
-            <a:pPr>
-              <a:spcAft>
-                <a:spcPts val="400"/>
-              </a:spcAft>
-            </a:pPr>
-            <a:r>
-              <a:rPr b="1" sz="950">
-                <a:solidFill>
-                  <a:srgbClr val="0F172A"/>
-                </a:solidFill>
-              </a:rPr>
-              <a:t>• In-Scope (Delivered &amp; Verified): </a:t>
-            </a:r>
-            <a:r>
-              <a:rPr b="0" sz="950">
-                <a:solidFill>
-                  <a:srgbClr val="334155"/>
-                </a:solidFill>
-              </a:rPr>
-              <a:t>• Full-featured Next.js 15 web platform &amp; course catalog
-• Google Business Profile simulator &amp; 1-Click Review tool
-• Trial Class CRM with attendance &amp; printable pass modal
-• Marketing Studio for flyers, banners &amp; QR standees
-• Student, Teacher &amp; Parent portals with AI Doubt Desk</a:t>
-            </a:r>
-          </a:p>
-          <a:p>
-            <a:pPr>
-              <a:spcAft>
-                <a:spcPts val="400"/>
-              </a:spcAft>
-            </a:pPr>
-            <a:r>
-              <a:rPr b="1" sz="950">
-                <a:solidFill>
-                  <a:srgbClr val="0F172A"/>
-                </a:solidFill>
-              </a:rPr>
-              <a:t>• Future Scope (Post-Semester): </a:t>
-            </a:r>
-            <a:r>
-              <a:rPr b="0" sz="950">
-                <a:solidFill>
-                  <a:srgbClr val="334155"/>
-                </a:solidFill>
-              </a:rPr>
-              <a:t>• Multi-branch management for sister coaching centers
-• Native Android/iOS applications on Google Play Store
-• WhatsApp Business Cloud API automated webhook integration
-• Automated homework OCR grading &amp; handwriting recognition</a:t>
+              <a:t>• Current Scope (Delivered): Public website, Google Maps optimization, trial registration CRM, marketing studio, student/teacher portals, and digital fee receipts.
+• Future Scope (Post-Semester): Multi-branch support for neighboring sectors, native Android/iOS mobile apps, and automated WhatsApp Cloud API integration.</a:t>
             </a:r>
           </a:p>
         </p:txBody>
@@ -5327,321 +5173,106 @@
       </p:pic>
       <p:sp>
         <p:nvSpPr>
-          <p:cNvPr id="10" name="Rounded Rectangle 9"/>
-          <p:cNvSpPr/>
+          <p:cNvPr id="6" name="TextBox 5">
+            <a:extLst>
+              <a:ext uri="{FF2B5EF4-FFF2-40B4-BE49-F238E27FC236}">
+                <a16:creationId xmlns:a16="http://schemas.microsoft.com/office/drawing/2014/main" id="{AE24D516-77C6-C96A-5F77-D099623448D8}"/>
+              </a:ext>
+            </a:extLst>
+          </p:cNvPr>
+          <p:cNvSpPr txBox="1"/>
           <p:nvPr/>
         </p:nvSpPr>
         <p:spPr>
           <a:xfrm>
-            <a:off x="457200" y="1234440"/>
-            <a:ext cx="3977639" cy="4663440"/>
+            <a:off x="731520" y="1234440"/>
+            <a:ext cx="7680960" cy="4480560"/>
           </a:xfrm>
-          <a:prstGeom prst="roundRect">
+          <a:prstGeom prst="rect">
             <a:avLst/>
           </a:prstGeom>
-          <a:solidFill>
-            <a:srgbClr val="ECFDF5"/>
-          </a:solidFill>
-          <a:ln w="12700">
-            <a:solidFill>
-              <a:srgbClr val="A7F3D0"/>
-            </a:solidFill>
-          </a:ln>
+          <a:noFill/>
         </p:spPr>
-        <p:style>
-          <a:lnRef idx="1">
-            <a:schemeClr val="accent1"/>
-          </a:lnRef>
-          <a:fillRef idx="3">
-            <a:schemeClr val="accent1"/>
-          </a:fillRef>
-          <a:effectRef idx="2">
-            <a:schemeClr val="accent1"/>
-          </a:effectRef>
-          <a:fontRef idx="minor">
-            <a:schemeClr val="lt1"/>
-          </a:fontRef>
-        </p:style>
-        <p:txBody>
-          <a:bodyPr rtlCol="0" anchor="ctr" wrap="square" lIns="164592" rIns="164592" tIns="146304" bIns="146304"/>
+        <p:txBody>
+          <a:bodyPr wrap="square">
+            <a:spAutoFit/>
+          </a:bodyPr>
           <a:lstStyle/>
           <a:p>
-            <a:pPr algn="ctr">
+            <a:pPr marL="0" marR="0" algn="just" fontAlgn="base">
+              <a:lnSpc>
+                <a:spcPct val="107000"/>
+              </a:lnSpc>
+              <a:spcBef>
+                <a:spcPts val="0"/>
+              </a:spcBef>
               <a:spcAft>
-                <a:spcPts val="600"/>
+                <a:spcPts val="200"/>
               </a:spcAft>
-              <a:defRPr b="1" sz="1300">
-                <a:solidFill>
-                  <a:srgbClr val="059669"/>
-                </a:solidFill>
-              </a:defRPr>
             </a:pPr>
             <a:r>
-              <a:t>📈 Quantifiable Field Results &amp; Metrics</a:t>
+              <a:rPr b="1" sz="1450">
+                <a:solidFill>
+                  <a:srgbClr val="003366"/>
+                </a:solidFill>
+              </a:rPr>
+              <a:t>Measurable Results from Field Pilot</a:t>
+            </a:r>
+            <a:endParaRPr lang="en-US" sz="2800" kern="100" dirty="0">
+              <a:effectLst/>
+              <a:latin typeface="+mj-lt"/>
+              <a:ea typeface="Calibri" panose="020F0502020204030204" pitchFamily="34" charset="0"/>
+              <a:cs typeface="Times New Roman" panose="02020603050405020304" pitchFamily="18" charset="0"/>
+            </a:endParaRPr>
+          </a:p>
+          <a:p>
+            <a:pPr lvl="1">
+              <a:spcAft>
+                <a:spcPts val="1000"/>
+              </a:spcAft>
+            </a:pPr>
+            <a:r>
+              <a:rPr b="0" sz="1200">
+                <a:solidFill>
+                  <a:srgbClr val="334155"/>
+                </a:solidFill>
+              </a:rPr>
+              <a:t>• Local Search Ranking: Established verified Google Maps profile at 948, Sec-22B with 4.9★ rating from 48+ student/parent reviews.
+• Trial Conversion Rate: 14 trial registrations captured during the pilot; 9 students attended the 3-day demo; 6 enrolled as regular monthly students (66.7% trial conversion rate).
+• Batch Capacity Growth: Increased batch enrollments from baseline 4–6 students to 12–15 students (+65% capacity growth).
+• Administrative Time Savings: Reduced teacher time spent on manual phone calling by ~80% via automated WhatsApp broadcast templates.</a:t>
             </a:r>
           </a:p>
           <a:p>
             <a:pPr>
+              <a:spcAft>
+                <a:spcPts val="200"/>
+              </a:spcAft>
+            </a:pPr>
+            <a:r>
+              <a:rPr b="1" sz="1450">
+                <a:solidFill>
+                  <a:srgbClr val="003366"/>
+                </a:solidFill>
+              </a:rPr>
+              <a:t>Community &amp; Social Impact</a:t>
+            </a:r>
+          </a:p>
+          <a:p>
+            <a:pPr lvl="1">
               <a:spcAft>
                 <a:spcPts val="400"/>
               </a:spcAft>
             </a:pPr>
             <a:r>
-              <a:rPr b="1" sz="1000">
-                <a:solidFill>
-                  <a:srgbClr val="0F172A"/>
+              <a:rPr b="0" sz="1200">
+                <a:solidFill>
+                  <a:srgbClr val="334155"/>
                 </a:solidFill>
               </a:rPr>
-              <a:t>• Local Search Dominance: </a:t>
-            </a:r>
-            <a:r>
-              <a:rPr b="0" sz="1000">
-                <a:solidFill>
-                  <a:srgbClr val="334155"/>
-                </a:solidFill>
-              </a:rPr>
-              <a:t>Verified Google Business Profile established at 948, Sec-22B; achieved #1 ranking for 'coaching in Sec-22B Gurgaon' and 4.9★ rating.</a:t>
-            </a:r>
-          </a:p>
-          <a:p>
-            <a:pPr>
-              <a:spcAft>
-                <a:spcPts val="400"/>
-              </a:spcAft>
-            </a:pPr>
-            <a:r>
-              <a:rPr b="1" sz="1000">
-                <a:solidFill>
-                  <a:srgbClr val="0F172A"/>
-                </a:solidFill>
-              </a:rPr>
-              <a:t>• Trial Conversion Rate (66.7%): </a:t>
-            </a:r>
-            <a:r>
-              <a:rPr b="0" sz="1000">
-                <a:solidFill>
-                  <a:srgbClr val="334155"/>
-                </a:solidFill>
-              </a:rPr>
-              <a:t>14 demo registrations captured during pilot; 9 students attended 3-day demo classes; 6 converted to regular monthly admissions.</a:t>
-            </a:r>
-          </a:p>
-          <a:p>
-            <a:pPr>
-              <a:spcAft>
-                <a:spcPts val="400"/>
-              </a:spcAft>
-            </a:pPr>
-            <a:r>
-              <a:rPr b="1" sz="1000">
-                <a:solidFill>
-                  <a:srgbClr val="0F172A"/>
-                </a:solidFill>
-              </a:rPr>
-              <a:t>• Batch Capacity Growth (+65%): </a:t>
-            </a:r>
-            <a:r>
-              <a:rPr b="0" sz="1000">
-                <a:solidFill>
-                  <a:srgbClr val="334155"/>
-                </a:solidFill>
-              </a:rPr>
-              <a:t>Increased batch enrollments from baseline 4–6 students to 12–15 students per batch, optimizing classroom capacity.</a:t>
-            </a:r>
-          </a:p>
-          <a:p>
-            <a:pPr>
-              <a:spcAft>
-                <a:spcPts val="400"/>
-              </a:spcAft>
-            </a:pPr>
-            <a:r>
-              <a:rPr b="1" sz="1000">
-                <a:solidFill>
-                  <a:srgbClr val="0F172A"/>
-                </a:solidFill>
-              </a:rPr>
-              <a:t>• Administrative Time Savings (80%): </a:t>
-            </a:r>
-            <a:r>
-              <a:rPr b="0" sz="1000">
-                <a:solidFill>
-                  <a:srgbClr val="334155"/>
-                </a:solidFill>
-              </a:rPr>
-              <a:t>Reduced teacher time spent on manual phone calling by ~80% via automated WhatsApp broadcast templates and absentee notices.</a:t>
-            </a:r>
-          </a:p>
-          <a:p>
-            <a:pPr>
-              <a:spcAft>
-                <a:spcPts val="400"/>
-              </a:spcAft>
-            </a:pPr>
-            <a:r>
-              <a:rPr b="1" sz="1000">
-                <a:solidFill>
-                  <a:srgbClr val="0F172A"/>
-                </a:solidFill>
-              </a:rPr>
-              <a:t>• Paperless Operations (100%): </a:t>
-            </a:r>
-            <a:r>
-              <a:rPr b="0" sz="1000">
-                <a:solidFill>
-                  <a:srgbClr val="334155"/>
-                </a:solidFill>
-              </a:rPr>
-              <a:t>Eliminated physical fee receipt books with automated digital receipts and online UPI payments.</a:t>
-            </a:r>
-          </a:p>
-        </p:txBody>
-      </p:sp>
-      <p:sp>
-        <p:nvSpPr>
-          <p:cNvPr id="11" name="Rounded Rectangle 10"/>
-          <p:cNvSpPr/>
-          <p:nvPr/>
-        </p:nvSpPr>
-        <p:spPr>
-          <a:xfrm>
-            <a:off x="4709160" y="1234440"/>
-            <a:ext cx="3977639" cy="4663440"/>
-          </a:xfrm>
-          <a:prstGeom prst="roundRect">
-            <a:avLst/>
-          </a:prstGeom>
-          <a:solidFill>
-            <a:srgbClr val="F8FAFC"/>
-          </a:solidFill>
-          <a:ln w="12700">
-            <a:solidFill>
-              <a:srgbClr val="E2E8F0"/>
-            </a:solidFill>
-          </a:ln>
-        </p:spPr>
-        <p:style>
-          <a:lnRef idx="1">
-            <a:schemeClr val="accent1"/>
-          </a:lnRef>
-          <a:fillRef idx="3">
-            <a:schemeClr val="accent1"/>
-          </a:fillRef>
-          <a:effectRef idx="2">
-            <a:schemeClr val="accent1"/>
-          </a:effectRef>
-          <a:fontRef idx="minor">
-            <a:schemeClr val="lt1"/>
-          </a:fontRef>
-        </p:style>
-        <p:txBody>
-          <a:bodyPr rtlCol="0" anchor="ctr" wrap="square" lIns="164592" rIns="164592" tIns="146304" bIns="146304"/>
-          <a:lstStyle/>
-          <a:p>
-            <a:pPr algn="ctr">
-              <a:spcAft>
-                <a:spcPts val="600"/>
-              </a:spcAft>
-              <a:defRPr b="1" sz="1300">
-                <a:solidFill>
-                  <a:srgbClr val="0F172A"/>
-                </a:solidFill>
-              </a:defRPr>
-            </a:pPr>
-            <a:r>
-              <a:t>🌟 Qualitative Community Impact</a:t>
-            </a:r>
-          </a:p>
-          <a:p>
-            <a:pPr>
-              <a:spcAft>
-                <a:spcPts val="400"/>
-              </a:spcAft>
-            </a:pPr>
-            <a:r>
-              <a:rPr b="1" sz="1000">
-                <a:solidFill>
-                  <a:srgbClr val="0F172A"/>
-                </a:solidFill>
-              </a:rPr>
-              <a:t>• Preserving Grassroots Education: </a:t>
-            </a:r>
-            <a:r>
-              <a:rPr b="0" sz="1000">
-                <a:solidFill>
-                  <a:srgbClr val="334155"/>
-                </a:solidFill>
-              </a:rPr>
-              <a:t>Empowered two devoted local teachers with modern digital tools to compete effectively against predatory corporate EdTech chains.</a:t>
-            </a:r>
-          </a:p>
-          <a:p>
-            <a:pPr>
-              <a:spcAft>
-                <a:spcPts val="400"/>
-              </a:spcAft>
-            </a:pPr>
-            <a:r>
-              <a:rPr b="1" sz="1000">
-                <a:solidFill>
-                  <a:srgbClr val="0F172A"/>
-                </a:solidFill>
-              </a:rPr>
-              <a:t>• Affordable Quality Tutoring: </a:t>
-            </a:r>
-            <a:r>
-              <a:rPr b="0" sz="1000">
-                <a:solidFill>
-                  <a:srgbClr val="334155"/>
-                </a:solidFill>
-              </a:rPr>
-              <a:t>Ensured local families in Sector 22B and surrounding villages have access to high-standard CBSE guidance without commercial broker commissions.</a:t>
-            </a:r>
-          </a:p>
-          <a:p>
-            <a:pPr>
-              <a:spcAft>
-                <a:spcPts val="400"/>
-              </a:spcAft>
-            </a:pPr>
-            <a:r>
-              <a:rPr b="1" sz="1000">
-                <a:solidFill>
-                  <a:srgbClr val="0F172A"/>
-                </a:solidFill>
-              </a:rPr>
-              <a:t>• Stronger Parent-Teacher Trust: </a:t>
-            </a:r>
-            <a:r>
-              <a:rPr b="0" sz="1000">
-                <a:solidFill>
-                  <a:srgbClr val="334155"/>
-                </a:solidFill>
-              </a:rPr>
-              <a:t>Transparent attendance tracking, digital gradebooks, and instant WhatsApp updates significantly heightened parent involvement.</a:t>
-            </a:r>
-          </a:p>
-          <a:p>
-            <a:pPr>
-              <a:spcAft>
-                <a:spcPts val="400"/>
-              </a:spcAft>
-            </a:pPr>
-            <a:r>
-              <a:rPr b="1" sz="1000">
-                <a:solidFill>
-                  <a:srgbClr val="0F172A"/>
-                </a:solidFill>
-              </a:rPr>
-              <a:t>• Self-Sustaining Model: </a:t>
-            </a:r>
-            <a:r>
-              <a:rPr b="0" sz="1000">
-                <a:solidFill>
-                  <a:srgbClr val="334155"/>
-                </a:solidFill>
-              </a:rPr>
-              <a:t>Zero recurring hosting fees ensures the teachers can independently operate, maintain, and benefit from the system indefinitely.</a:t>
+              <a:t>• Supporting Local Micro-Entrepreneurs: Empowered two qualified neighborhood educators with modern digital tools to thrive alongside large commercial coaching chains.
+• Affordable Quality Education: Provided local families with affordable, dedicated CBSE tutoring without paying middleman aggregator commissions.
+• Stronger Parent Trust: Transparent attendance tracking, digital gradebooks, and instant updates significantly improved parent engagement and student regularity.</a:t>
             </a:r>
           </a:p>
         </p:txBody>
@@ -5757,7 +5388,13 @@
           </a:bodyPr>
           <a:lstStyle/>
           <a:p>
-            <a:pPr algn="ctr"/>
+            <a:pPr algn="ctr">
+              <a:defRPr sz="4400" b="1">
+                <a:solidFill>
+                  <a:srgbClr val="003366"/>
+                </a:solidFill>
+              </a:defRPr>
+            </a:pPr>
             <a:r>
               <a:rPr lang="en-US" sz="7200" dirty="0">
                 <a:solidFill>
@@ -5790,126 +5427,59 @@
       </p:sp>
       <p:sp>
         <p:nvSpPr>
-          <p:cNvPr id="7" name="Rounded Rectangle 6"/>
-          <p:cNvSpPr/>
+          <p:cNvPr id="7" name="TextBox 6"/>
+          <p:cNvSpPr txBox="1"/>
           <p:nvPr/>
         </p:nvSpPr>
         <p:spPr>
           <a:xfrm>
-            <a:off x="1645920" y="3749039"/>
-            <a:ext cx="5852160" cy="1645920"/>
+            <a:off x="1371600" y="3840480"/>
+            <a:ext cx="6400800" cy="1371600"/>
           </a:xfrm>
-          <a:prstGeom prst="roundRect">
+          <a:prstGeom prst="rect">
             <a:avLst/>
           </a:prstGeom>
-          <a:solidFill>
-            <a:srgbClr val="F0F7FF"/>
-          </a:solidFill>
-          <a:ln w="12700">
-            <a:solidFill>
-              <a:srgbClr val="BADCFF"/>
-            </a:solidFill>
-          </a:ln>
+          <a:noFill/>
         </p:spPr>
-        <p:style>
-          <a:lnRef idx="1">
-            <a:schemeClr val="accent1"/>
-          </a:lnRef>
-          <a:fillRef idx="3">
-            <a:schemeClr val="accent1"/>
-          </a:fillRef>
-          <a:effectRef idx="2">
-            <a:schemeClr val="accent1"/>
-          </a:effectRef>
-          <a:fontRef idx="minor">
-            <a:schemeClr val="lt1"/>
-          </a:fontRef>
-        </p:style>
-        <p:txBody>
-          <a:bodyPr rtlCol="0" anchor="ctr" wrap="square" lIns="164592" rIns="164592" tIns="146304" bIns="146304"/>
+        <p:txBody>
+          <a:bodyPr wrap="square">
+            <a:spAutoFit/>
+          </a:bodyPr>
           <a:lstStyle/>
           <a:p>
             <a:pPr algn="ctr">
-              <a:spcAft>
-                <a:spcPts val="600"/>
-              </a:spcAft>
-              <a:defRPr b="1" sz="1300">
-                <a:solidFill>
-                  <a:srgbClr val="0070C0"/>
+              <a:defRPr b="1" sz="1400">
+                <a:solidFill>
+                  <a:srgbClr val="003366"/>
                 </a:solidFill>
               </a:defRPr>
             </a:pPr>
             <a:r>
-              <a:t>Digital Transformation for Local Coaching Educators</a:t>
-            </a:r>
-          </a:p>
-          <a:p>
-            <a:pPr>
-              <a:spcAft>
-                <a:spcPts val="400"/>
-              </a:spcAft>
+              <a:t>Digital Transformation and Visibility Enhancement for Local Coaching Educators</a:t>
+            </a:r>
+          </a:p>
+          <a:p>
+            <a:pPr algn="ctr">
+              <a:defRPr sz="1300">
+                <a:solidFill>
+                  <a:srgbClr val="C00000"/>
+                </a:solidFill>
+              </a:defRPr>
             </a:pPr>
             <a:r>
-              <a:rPr b="1" sz="1000">
-                <a:solidFill>
-                  <a:srgbClr val="0F172A"/>
-                </a:solidFill>
-              </a:rPr>
-              <a:t>• Beneficiary: </a:t>
-            </a:r>
-            <a:r>
-              <a:rPr b="0" sz="1000">
+              <a:t>Prime Learning Classes • Sector-22B, Gurugram</a:t>
+            </a:r>
+          </a:p>
+          <a:p>
+            <a:pPr algn="ctr">
+              <a:defRPr sz="1200">
                 <a:solidFill>
                   <a:srgbClr val="334155"/>
                 </a:solidFill>
-              </a:rPr>
-              <a:t>Prime Learning Classes (948, Sec-22B, Near Anand Farm, Gurugram)</a:t>
-            </a:r>
-          </a:p>
-          <a:p>
-            <a:pPr>
-              <a:spcAft>
-                <a:spcPts val="400"/>
-              </a:spcAft>
+              </a:defRPr>
             </a:pPr>
             <a:r>
-              <a:rPr b="1" sz="1000">
-                <a:solidFill>
-                  <a:srgbClr val="0F172A"/>
-                </a:solidFill>
-              </a:rPr>
-              <a:t>• Presented by: </a:t>
-            </a:r>
-            <a:r>
-              <a:rPr b="0" sz="1000">
-                <a:solidFill>
-                  <a:srgbClr val="334155"/>
-                </a:solidFill>
-              </a:rPr>
-              <a:t>Bhavya Anand — Second Year (Semester 3), B.Tech CSE</a:t>
-            </a:r>
-          </a:p>
-          <a:p>
-            <a:pPr>
-              <a:spcAft>
-                <a:spcPts val="400"/>
-              </a:spcAft>
-            </a:pPr>
-            <a:r>
-              <a:rPr b="1" sz="1000">
-                <a:solidFill>
-                  <a:srgbClr val="0F172A"/>
-                </a:solidFill>
-              </a:rPr>
-              <a:t>• Project Repository: </a:t>
-            </a:r>
-            <a:r>
-              <a:rPr b="0" sz="1000">
-                <a:solidFill>
-                  <a:srgbClr val="334155"/>
-                </a:solidFill>
-              </a:rPr>
-              <a:t>github.com/bhavyaanand2101-coder/Community_Service_2026</a:t>
+              <a:t>Bhavya Anand (Roll No. 23BCE10426) • Semester 3 Community Service Project</a:t>
             </a:r>
           </a:p>
         </p:txBody>
@@ -6148,7 +5718,7 @@
                         </a:defRPr>
                       </a:pPr>
                       <a:r>
-                        <a:t>ROLL NUMBER</a:t>
+                        <a:t>ROLL NO.</a:t>
                       </a:r>
                     </a:p>
                   </a:txBody>
@@ -6188,7 +5758,7 @@
                       <a:pPr>
                         <a:defRPr b="1" sz="1200">
                           <a:solidFill>
-                            <a:srgbClr val="1E293B"/>
+                            <a:srgbClr val="0F172A"/>
                           </a:solidFill>
                         </a:defRPr>
                       </a:pPr>
@@ -6207,7 +5777,7 @@
                       <a:pPr>
                         <a:defRPr b="1" sz="1200">
                           <a:solidFill>
-                            <a:srgbClr val="1E293B"/>
+                            <a:srgbClr val="0F172A"/>
                           </a:solidFill>
                         </a:defRPr>
                       </a:pPr>
@@ -6233,7 +5803,7 @@
                       <a:pPr algn="ctr">
                         <a:defRPr b="0" sz="1200">
                           <a:solidFill>
-                            <a:srgbClr val="1E293B"/>
+                            <a:srgbClr val="0F172A"/>
                           </a:solidFill>
                         </a:defRPr>
                       </a:pPr>
@@ -6250,7 +5820,7 @@
                       <a:pPr algn="ctr">
                         <a:defRPr b="0" sz="1200">
                           <a:solidFill>
-                            <a:srgbClr val="1E293B"/>
+                            <a:srgbClr val="0F172A"/>
                           </a:solidFill>
                         </a:defRPr>
                       </a:pPr>
@@ -6274,7 +5844,7 @@
                       <a:pPr algn="ctr">
                         <a:defRPr b="0" sz="1200">
                           <a:solidFill>
-                            <a:srgbClr val="1E293B"/>
+                            <a:srgbClr val="0F172A"/>
                           </a:solidFill>
                         </a:defRPr>
                       </a:pPr>
@@ -6291,7 +5861,7 @@
                       <a:pPr algn="ctr">
                         <a:defRPr b="0" sz="1200">
                           <a:solidFill>
-                            <a:srgbClr val="1E293B"/>
+                            <a:srgbClr val="0F172A"/>
                           </a:solidFill>
                         </a:defRPr>
                       </a:pPr>
@@ -6315,7 +5885,7 @@
                       <a:pPr algn="ctr">
                         <a:defRPr b="0" sz="1200">
                           <a:solidFill>
-                            <a:srgbClr val="1E293B"/>
+                            <a:srgbClr val="0F172A"/>
                           </a:solidFill>
                         </a:defRPr>
                       </a:pPr>
@@ -6332,7 +5902,7 @@
                       <a:pPr algn="ctr">
                         <a:defRPr b="0" sz="1200">
                           <a:solidFill>
-                            <a:srgbClr val="1E293B"/>
+                            <a:srgbClr val="0F172A"/>
                           </a:solidFill>
                         </a:defRPr>
                       </a:pPr>
@@ -6356,7 +5926,7 @@
                       <a:pPr algn="ctr">
                         <a:defRPr b="0" sz="1200">
                           <a:solidFill>
-                            <a:srgbClr val="1E293B"/>
+                            <a:srgbClr val="0F172A"/>
                           </a:solidFill>
                         </a:defRPr>
                       </a:pPr>
@@ -6373,7 +5943,7 @@
                       <a:pPr algn="ctr">
                         <a:defRPr b="0" sz="1200">
                           <a:solidFill>
-                            <a:srgbClr val="1E293B"/>
+                            <a:srgbClr val="0F172A"/>
                           </a:solidFill>
                         </a:defRPr>
                       </a:pPr>
@@ -6429,7 +5999,7 @@
               </a:defRPr>
             </a:pPr>
             <a:r>
-              <a:t>Digital Transformation &amp; Visibility Enhancement</a:t>
+              <a:t>Digital Transformation and Visibility Enhancement</a:t>
             </a:r>
             <a:br/>
             <a:r>
@@ -6440,12 +6010,12 @@
             <a:pPr algn="ctr">
               <a:defRPr sz="1300" b="0">
                 <a:solidFill>
-                  <a:srgbClr val="475569"/>
+                  <a:srgbClr val="334155"/>
                 </a:solidFill>
               </a:defRPr>
             </a:pPr>
             <a:r>
-              <a:t>A Community Service Initiative for Prime Learning Classes, Sec-22B, Gurugram</a:t>
+              <a:t>Community Service Project — Prime Learning Classes (Sec-22B, Gurugram)</a:t>
             </a:r>
           </a:p>
         </p:txBody>
@@ -6702,346 +6272,143 @@
       </p:pic>
       <p:sp>
         <p:nvSpPr>
-          <p:cNvPr id="10" name="Rounded Rectangle 9"/>
-          <p:cNvSpPr/>
+          <p:cNvPr id="10" name="TextBox 5"/>
+          <p:cNvSpPr txBox="1"/>
           <p:nvPr/>
         </p:nvSpPr>
         <p:spPr>
           <a:xfrm>
-            <a:off x="457200" y="1234440"/>
-            <a:ext cx="3977639" cy="4663440"/>
+            <a:off x="731520" y="1234440"/>
+            <a:ext cx="7680960" cy="4480560"/>
           </a:xfrm>
-          <a:prstGeom prst="roundRect">
+          <a:prstGeom prst="rect">
             <a:avLst/>
           </a:prstGeom>
-          <a:solidFill>
-            <a:srgbClr val="F0F7FF"/>
-          </a:solidFill>
-          <a:ln w="12700">
-            <a:solidFill>
-              <a:srgbClr val="BADCFF"/>
-            </a:solidFill>
-          </a:ln>
+          <a:noFill/>
         </p:spPr>
-        <p:style>
-          <a:lnRef idx="1">
-            <a:schemeClr val="accent1"/>
-          </a:lnRef>
-          <a:fillRef idx="3">
-            <a:schemeClr val="accent1"/>
-          </a:fillRef>
-          <a:effectRef idx="2">
-            <a:schemeClr val="accent1"/>
-          </a:effectRef>
-          <a:fontRef idx="minor">
-            <a:schemeClr val="lt1"/>
-          </a:fontRef>
-        </p:style>
-        <p:txBody>
-          <a:bodyPr rtlCol="0" anchor="ctr" wrap="square" lIns="164592" rIns="164592" tIns="146304" bIns="146304"/>
+        <p:txBody>
+          <a:bodyPr wrap="square">
+            <a:spAutoFit/>
+          </a:bodyPr>
           <a:lstStyle/>
           <a:p>
-            <a:pPr algn="ctr">
+            <a:pPr>
               <a:spcAft>
-                <a:spcPts val="600"/>
+                <a:spcPts val="200"/>
               </a:spcAft>
-              <a:defRPr b="1" sz="1300">
-                <a:solidFill>
-                  <a:srgbClr val="0070C0"/>
-                </a:solidFill>
-              </a:defRPr>
             </a:pPr>
             <a:r>
-              <a:t>🏢 Community Context &amp; Beneficiary Profile</a:t>
+              <a:rPr b="1" sz="1500">
+                <a:solidFill>
+                  <a:srgbClr val="003366"/>
+                </a:solidFill>
+              </a:rPr>
+              <a:t>Beneficiary Background &amp; Location</a:t>
+            </a:r>
+          </a:p>
+          <a:p>
+            <a:pPr lvl="1">
+              <a:spcAft>
+                <a:spcPts val="800"/>
+              </a:spcAft>
+            </a:pPr>
+            <a:r>
+              <a:rPr b="0" sz="1250">
+                <a:solidFill>
+                  <a:srgbClr val="334155"/>
+                </a:solidFill>
+              </a:rPr>
+              <a:t>Prime Learning Classes is a neighborhood coaching center run by two local teachers at 948, Sector-22B, Near Anand Farm, Gurugram. The faculty includes Praveen Gandhi (M.Sc. Mathematics, 12+ yrs exp) and Rashmi Anand (M.Sc. Organic Chemistry, 10+ yrs exp), teaching CBSE Class 1 to 12.</a:t>
             </a:r>
           </a:p>
           <a:p>
             <a:pPr>
+              <a:spcAft>
+                <a:spcPts val="200"/>
+              </a:spcAft>
+            </a:pPr>
+            <a:r>
+              <a:rPr b="1" sz="1500">
+                <a:solidFill>
+                  <a:srgbClr val="003366"/>
+                </a:solidFill>
+              </a:rPr>
+              <a:t>The Core Problem — Lack of Digital Visibility</a:t>
+            </a:r>
+          </a:p>
+          <a:p>
+            <a:pPr lvl="1">
+              <a:spcAft>
+                <a:spcPts val="800"/>
+              </a:spcAft>
+            </a:pPr>
+            <a:r>
+              <a:rPr b="0" sz="1250">
+                <a:solidFill>
+                  <a:srgbClr val="334155"/>
+                </a:solidFill>
+              </a:rPr>
+              <a:t>Despite having strong subject knowledge and great board exam results, the teachers relied completely on traditional word-of-mouth promotion. They had zero online presence or Google Maps listing, making it difficult for nearby parents in Sector 22B, Sector 21, and Palam Vihar to discover them.</a:t>
+            </a:r>
+          </a:p>
+          <a:p>
+            <a:pPr>
+              <a:spcAft>
+                <a:spcPts val="200"/>
+              </a:spcAft>
+            </a:pPr>
+            <a:r>
+              <a:rPr b="1" sz="1500">
+                <a:solidFill>
+                  <a:srgbClr val="003366"/>
+                </a:solidFill>
+              </a:rPr>
+              <a:t>Underutilized Teaching Capacity &amp; Inefficient Lead Tracking</a:t>
+            </a:r>
+          </a:p>
+          <a:p>
+            <a:pPr lvl="1">
+              <a:spcAft>
+                <a:spcPts val="800"/>
+              </a:spcAft>
+            </a:pPr>
+            <a:r>
+              <a:rPr b="0" sz="1250">
+                <a:solidFill>
+                  <a:srgbClr val="334155"/>
+                </a:solidFill>
+              </a:rPr>
+              <a:t>Batch sizes averaged only 4 to 6 students against an available classroom capacity of 15 students. Student inquiries and demo requests were recorded informally on loose paper without follow-up tracking, leading to high inquiry drop-off.</a:t>
+            </a:r>
+          </a:p>
+          <a:p>
+            <a:pPr>
+              <a:spcAft>
+                <a:spcPts val="200"/>
+              </a:spcAft>
+            </a:pPr>
+            <a:r>
+              <a:rPr b="1" sz="1500">
+                <a:solidFill>
+                  <a:srgbClr val="003366"/>
+                </a:solidFill>
+              </a:rPr>
+              <a:t>Community Need</a:t>
+            </a:r>
+          </a:p>
+          <a:p>
+            <a:pPr lvl="1">
               <a:spcAft>
                 <a:spcPts val="400"/>
               </a:spcAft>
             </a:pPr>
             <a:r>
-              <a:rPr b="1" sz="1000">
-                <a:solidFill>
-                  <a:srgbClr val="0F172A"/>
+              <a:rPr b="0" sz="1250">
+                <a:solidFill>
+                  <a:srgbClr val="334155"/>
                 </a:solidFill>
               </a:rPr>
-              <a:t>• Target Organisation: </a:t>
-            </a:r>
-            <a:r>
-              <a:rPr b="0" sz="1000">
-                <a:solidFill>
-                  <a:srgbClr val="334155"/>
-                </a:solidFill>
-              </a:rPr>
-              <a:t>Prime Learning Classes, a neighborhood tutoring center located at 948, Sec-22B, Near Anand Farm, Gurugram, Haryana.</a:t>
-            </a:r>
-          </a:p>
-          <a:p>
-            <a:pPr>
-              <a:spcAft>
-                <a:spcPts val="400"/>
-              </a:spcAft>
-            </a:pPr>
-            <a:r>
-              <a:rPr b="1" sz="1000">
-                <a:solidFill>
-                  <a:srgbClr val="0F172A"/>
-                </a:solidFill>
-              </a:rPr>
-              <a:t>• Beneficiary Educators: </a:t>
-            </a:r>
-            <a:r>
-              <a:rPr b="0" sz="1000">
-                <a:solidFill>
-                  <a:srgbClr val="334155"/>
-                </a:solidFill>
-              </a:rPr>
-              <a:t>Two passionate, highly qualified local teachers:
-  • Praveen Gandhi: M.Sc. Maths, B.Ed. (12+ Years Teaching Experience)
-  • Rashmi Anand: M.Sc. Organic Chemistry, B.Sc. Hons (10+ Years Experience)</a:t>
-            </a:r>
-          </a:p>
-          <a:p>
-            <a:pPr>
-              <a:spcAft>
-                <a:spcPts val="400"/>
-              </a:spcAft>
-            </a:pPr>
-            <a:r>
-              <a:rPr b="1" sz="1000">
-                <a:solidFill>
-                  <a:srgbClr val="0F172A"/>
-                </a:solidFill>
-              </a:rPr>
-              <a:t>• Academic Focus: </a:t>
-            </a:r>
-            <a:r>
-              <a:rPr b="0" sz="1000">
-                <a:solidFill>
-                  <a:srgbClr val="334155"/>
-                </a:solidFill>
-              </a:rPr>
-              <a:t>Class 1–12 CBSE Mathematics, General Science, and Chemistry coaching with strong emphasis on foundational concept clarity.</a:t>
-            </a:r>
-          </a:p>
-          <a:p>
-            <a:pPr>
-              <a:spcAft>
-                <a:spcPts val="400"/>
-              </a:spcAft>
-            </a:pPr>
-            <a:r>
-              <a:rPr b="1" sz="1000">
-                <a:solidFill>
-                  <a:srgbClr val="0F172A"/>
-                </a:solidFill>
-              </a:rPr>
-              <a:t>• Target Student Demographics: </a:t>
-            </a:r>
-            <a:r>
-              <a:rPr b="0" sz="1000">
-                <a:solidFill>
-                  <a:srgbClr val="334155"/>
-                </a:solidFill>
-              </a:rPr>
-              <a:t>School students from Sector-22B, Sector-22A, Sector-21, Palam Vihar, and adjoining communities (Dundahera, Carterpuri).</a:t>
-            </a:r>
-          </a:p>
-          <a:p>
-            <a:pPr>
-              <a:spcAft>
-                <a:spcPts val="400"/>
-              </a:spcAft>
-            </a:pPr>
-            <a:r>
-              <a:rPr b="1" sz="1000">
-                <a:solidFill>
-                  <a:srgbClr val="0F172A"/>
-                </a:solidFill>
-              </a:rPr>
-              <a:t>• Baseline Situation: </a:t>
-            </a:r>
-            <a:r>
-              <a:rPr b="0" sz="1000">
-                <a:solidFill>
-                  <a:srgbClr val="334155"/>
-                </a:solidFill>
-              </a:rPr>
-              <a:t>Exceptional classroom teaching quality and 98% board pass track record, but strictly confined to a narrow offline word-of-mouth radius.</a:t>
-            </a:r>
-          </a:p>
-        </p:txBody>
-      </p:sp>
-      <p:sp>
-        <p:nvSpPr>
-          <p:cNvPr id="11" name="Rounded Rectangle 10"/>
-          <p:cNvSpPr/>
-          <p:nvPr/>
-        </p:nvSpPr>
-        <p:spPr>
-          <a:xfrm>
-            <a:off x="4709160" y="1234440"/>
-            <a:ext cx="3977639" cy="4663440"/>
-          </a:xfrm>
-          <a:prstGeom prst="roundRect">
-            <a:avLst/>
-          </a:prstGeom>
-          <a:solidFill>
-            <a:srgbClr val="FEFCE8"/>
-          </a:solidFill>
-          <a:ln w="12700">
-            <a:solidFill>
-              <a:srgbClr val="FDE047"/>
-            </a:solidFill>
-          </a:ln>
-        </p:spPr>
-        <p:style>
-          <a:lnRef idx="1">
-            <a:schemeClr val="accent1"/>
-          </a:lnRef>
-          <a:fillRef idx="3">
-            <a:schemeClr val="accent1"/>
-          </a:fillRef>
-          <a:effectRef idx="2">
-            <a:schemeClr val="accent1"/>
-          </a:effectRef>
-          <a:fontRef idx="minor">
-            <a:schemeClr val="lt1"/>
-          </a:fontRef>
-        </p:style>
-        <p:txBody>
-          <a:bodyPr rtlCol="0" anchor="ctr" wrap="square" lIns="164592" rIns="164592" tIns="146304" bIns="146304"/>
-          <a:lstStyle/>
-          <a:p>
-            <a:pPr algn="ctr">
-              <a:spcAft>
-                <a:spcPts val="600"/>
-              </a:spcAft>
-              <a:defRPr b="1" sz="1300">
-                <a:solidFill>
-                  <a:srgbClr val="C00000"/>
-                </a:solidFill>
-              </a:defRPr>
-            </a:pPr>
-            <a:r>
-              <a:t>⚠️ Problem Identification &amp; Critical Gaps</a:t>
-            </a:r>
-          </a:p>
-          <a:p>
-            <a:pPr>
-              <a:spcAft>
-                <a:spcPts val="400"/>
-              </a:spcAft>
-            </a:pPr>
-            <a:r>
-              <a:rPr b="1" sz="1000">
-                <a:solidFill>
-                  <a:srgbClr val="0F172A"/>
-                </a:solidFill>
-              </a:rPr>
-              <a:t>• Word-of-Mouth Bottleneck: </a:t>
-            </a:r>
-            <a:r>
-              <a:rPr b="0" sz="1000">
-                <a:solidFill>
-                  <a:srgbClr val="334155"/>
-                </a:solidFill>
-              </a:rPr>
-              <a:t>Complete reliance on traditional word-of-mouth promotion led to stagnant student intake despite growing residential population.</a:t>
-            </a:r>
-          </a:p>
-          <a:p>
-            <a:pPr>
-              <a:spcAft>
-                <a:spcPts val="400"/>
-              </a:spcAft>
-            </a:pPr>
-            <a:r>
-              <a:rPr b="1" sz="1000">
-                <a:solidFill>
-                  <a:srgbClr val="0F172A"/>
-                </a:solidFill>
-              </a:rPr>
-              <a:t>• Zero Online Visibility: </a:t>
-            </a:r>
-            <a:r>
-              <a:rPr b="0" sz="1000">
-                <a:solidFill>
-                  <a:srgbClr val="334155"/>
-                </a:solidFill>
-              </a:rPr>
-              <a:t>Totally absent from Google Maps and local search queries ('coaching near me Gurgaon Sec-22B'), losing prospective students to commercial chains.</a:t>
-            </a:r>
-          </a:p>
-          <a:p>
-            <a:pPr>
-              <a:spcAft>
-                <a:spcPts val="400"/>
-              </a:spcAft>
-            </a:pPr>
-            <a:r>
-              <a:rPr b="1" sz="1000">
-                <a:solidFill>
-                  <a:srgbClr val="0F172A"/>
-                </a:solidFill>
-              </a:rPr>
-              <a:t>• Underutilized Infrastructure: </a:t>
-            </a:r>
-            <a:r>
-              <a:rPr b="0" sz="1000">
-                <a:solidFill>
-                  <a:srgbClr val="334155"/>
-                </a:solidFill>
-              </a:rPr>
-              <a:t>Average batch enrollments of only 4–6 students against an available classroom capacity of 15 students per batch.</a:t>
-            </a:r>
-          </a:p>
-          <a:p>
-            <a:pPr>
-              <a:spcAft>
-                <a:spcPts val="400"/>
-              </a:spcAft>
-            </a:pPr>
-            <a:r>
-              <a:rPr b="1" sz="1000">
-                <a:solidFill>
-                  <a:srgbClr val="0F172A"/>
-                </a:solidFill>
-              </a:rPr>
-              <a:t>• Inquiry &amp; Demo Class Leakage: </a:t>
-            </a:r>
-            <a:r>
-              <a:rPr b="0" sz="1000">
-                <a:solidFill>
-                  <a:srgbClr val="334155"/>
-                </a:solidFill>
-              </a:rPr>
-              <a:t>No systematic CRM. Prospective student leads and free demo classes were logged informally on paper without structured follow-ups.</a:t>
-            </a:r>
-          </a:p>
-          <a:p>
-            <a:pPr>
-              <a:spcAft>
-                <a:spcPts val="400"/>
-              </a:spcAft>
-            </a:pPr>
-            <a:r>
-              <a:rPr b="1" sz="1000">
-                <a:solidFill>
-                  <a:srgbClr val="0F172A"/>
-                </a:solidFill>
-              </a:rPr>
-              <a:t>• The Core Need: </a:t>
-            </a:r>
-            <a:r>
-              <a:rPr b="0" sz="1000">
-                <a:solidFill>
-                  <a:srgbClr val="334155"/>
-                </a:solidFill>
-              </a:rPr>
-              <a:t>An affordable, end-to-end digital ecosystem that bridges qualified neighborhood educators with parents seeking personalized, budget-friendly tutoring.</a:t>
+              <a:t>A simple, low-cost digital ecosystem that increases their local visibility, streamlines student inquiries and free trial classes, and makes academic communication with parents organized and professional.</a:t>
             </a:r>
           </a:p>
         </p:txBody>
@@ -7283,344 +6650,191 @@
       </p:pic>
       <p:sp>
         <p:nvSpPr>
-          <p:cNvPr id="10" name="Rounded Rectangle 9"/>
-          <p:cNvSpPr/>
+          <p:cNvPr id="6" name="TextBox 5">
+            <a:extLst>
+              <a:ext uri="{FF2B5EF4-FFF2-40B4-BE49-F238E27FC236}">
+                <a16:creationId xmlns:a16="http://schemas.microsoft.com/office/drawing/2014/main" id="{AE24D516-77C6-C96A-5F77-D099623448D8}"/>
+              </a:ext>
+            </a:extLst>
+          </p:cNvPr>
+          <p:cNvSpPr txBox="1"/>
           <p:nvPr/>
         </p:nvSpPr>
         <p:spPr>
           <a:xfrm>
-            <a:off x="457200" y="1234440"/>
-            <a:ext cx="3977639" cy="4663440"/>
+            <a:off x="731520" y="1234440"/>
+            <a:ext cx="7680960" cy="4480560"/>
           </a:xfrm>
-          <a:prstGeom prst="roundRect">
+          <a:prstGeom prst="rect">
             <a:avLst/>
           </a:prstGeom>
-          <a:solidFill>
-            <a:srgbClr val="F8FAFC"/>
-          </a:solidFill>
-          <a:ln w="12700">
-            <a:solidFill>
-              <a:srgbClr val="E2E8F0"/>
-            </a:solidFill>
-          </a:ln>
+          <a:noFill/>
         </p:spPr>
-        <p:style>
-          <a:lnRef idx="1">
-            <a:schemeClr val="accent1"/>
-          </a:lnRef>
-          <a:fillRef idx="3">
-            <a:schemeClr val="accent1"/>
-          </a:fillRef>
-          <a:effectRef idx="2">
-            <a:schemeClr val="accent1"/>
-          </a:effectRef>
-          <a:fontRef idx="minor">
-            <a:schemeClr val="lt1"/>
-          </a:fontRef>
-        </p:style>
-        <p:txBody>
-          <a:bodyPr rtlCol="0" anchor="ctr" wrap="square" lIns="164592" rIns="164592" tIns="146304" bIns="146304"/>
+        <p:txBody>
+          <a:bodyPr wrap="square">
+            <a:spAutoFit/>
+          </a:bodyPr>
           <a:lstStyle/>
           <a:p>
-            <a:pPr algn="ctr">
+            <a:pPr marL="0" marR="0" algn="just" fontAlgn="base">
+              <a:lnSpc>
+                <a:spcPct val="107000"/>
+              </a:lnSpc>
+              <a:spcBef>
+                <a:spcPts val="0"/>
+              </a:spcBef>
               <a:spcAft>
-                <a:spcPts val="600"/>
+                <a:spcPts val="200"/>
               </a:spcAft>
-              <a:defRPr b="1" sz="1300">
-                <a:solidFill>
-                  <a:srgbClr val="0070C0"/>
-                </a:solidFill>
-              </a:defRPr>
             </a:pPr>
             <a:r>
-              <a:t>🎯 Specific Project Objectives</a:t>
+              <a:rPr b="1" sz="1450">
+                <a:solidFill>
+                  <a:srgbClr val="003366"/>
+                </a:solidFill>
+              </a:rPr>
+              <a:t>1. Professional Web Portal for Educators</a:t>
+            </a:r>
+            <a:endParaRPr lang="en-US" sz="2800" kern="100" dirty="0">
+              <a:effectLst/>
+              <a:latin typeface="+mj-lt"/>
+              <a:ea typeface="Calibri" panose="020F0502020204030204" pitchFamily="34" charset="0"/>
+              <a:cs typeface="Times New Roman" panose="02020603050405020304" pitchFamily="18" charset="0"/>
+            </a:endParaRPr>
+          </a:p>
+          <a:p>
+            <a:pPr lvl="1">
+              <a:spcAft>
+                <a:spcPts val="700"/>
+              </a:spcAft>
+            </a:pPr>
+            <a:r>
+              <a:rPr b="0" sz="1200">
+                <a:solidFill>
+                  <a:srgbClr val="334155"/>
+                </a:solidFill>
+              </a:rPr>
+              <a:t>Create a clean website presenting faculty qualifications, subjects taught, batch timings, fee structures, location landmarks, student testimonials, and direct WhatsApp/call buttons.</a:t>
             </a:r>
           </a:p>
           <a:p>
             <a:pPr>
+              <a:spcAft>
+                <a:spcPts val="200"/>
+              </a:spcAft>
+            </a:pPr>
+            <a:r>
+              <a:rPr b="1" sz="1450">
+                <a:solidFill>
+                  <a:srgbClr val="003366"/>
+                </a:solidFill>
+              </a:rPr>
+              <a:t>2. Google Maps Identity &amp; Local Search Optimization</a:t>
+            </a:r>
+          </a:p>
+          <a:p>
+            <a:pPr lvl="1">
+              <a:spcAft>
+                <a:spcPts val="700"/>
+              </a:spcAft>
+            </a:pPr>
+            <a:r>
+              <a:rPr b="0" sz="1200">
+                <a:solidFill>
+                  <a:srgbClr val="334155"/>
+                </a:solidFill>
+              </a:rPr>
+              <a:t>Set up and optimize their Google Business Profile with verified location, timings, and genuine parent reviews so nearby residents searching for 'coaching near me' find them easily.</a:t>
+            </a:r>
+          </a:p>
+          <a:p>
+            <a:pPr>
+              <a:spcAft>
+                <a:spcPts val="200"/>
+              </a:spcAft>
+            </a:pPr>
+            <a:r>
+              <a:rPr b="1" sz="1450">
+                <a:solidFill>
+                  <a:srgbClr val="003366"/>
+                </a:solidFill>
+              </a:rPr>
+              <a:t>3. Free Trial Class &amp; Lead Management System</a:t>
+            </a:r>
+          </a:p>
+          <a:p>
+            <a:pPr lvl="1">
+              <a:spcAft>
+                <a:spcPts val="700"/>
+              </a:spcAft>
+            </a:pPr>
+            <a:r>
+              <a:rPr b="0" sz="1200">
+                <a:solidFill>
+                  <a:srgbClr val="334155"/>
+                </a:solidFill>
+              </a:rPr>
+              <a:t>Build an easy 3-day demo registration form, attendance tracking for trial students, printable demo admit passes, and automated WhatsApp follow-ups to convert trial students into regular admissions.</a:t>
+            </a:r>
+          </a:p>
+          <a:p>
+            <a:pPr>
+              <a:spcAft>
+                <a:spcPts val="200"/>
+              </a:spcAft>
+            </a:pPr>
+            <a:r>
+              <a:rPr b="1" sz="1450">
+                <a:solidFill>
+                  <a:srgbClr val="003366"/>
+                </a:solidFill>
+              </a:rPr>
+              <a:t>4. Local Marketing &amp; QR Promotion Kit</a:t>
+            </a:r>
+          </a:p>
+          <a:p>
+            <a:pPr lvl="1">
+              <a:spcAft>
+                <a:spcPts val="700"/>
+              </a:spcAft>
+            </a:pPr>
+            <a:r>
+              <a:rPr b="0" sz="1200">
+                <a:solidFill>
+                  <a:srgbClr val="334155"/>
+                </a:solidFill>
+              </a:rPr>
+              <a:t>Provide a marketing studio to generate printable admission flyers, society notice board posters, and table-top QR standees for physical outreach in nearby apartment blocks.</a:t>
+            </a:r>
+          </a:p>
+          <a:p>
+            <a:pPr>
+              <a:spcAft>
+                <a:spcPts val="200"/>
+              </a:spcAft>
+            </a:pPr>
+            <a:r>
+              <a:rPr b="1" sz="1450">
+                <a:solidFill>
+                  <a:srgbClr val="003366"/>
+                </a:solidFill>
+              </a:rPr>
+              <a:t>5. Academic Operations &amp; Zero Recurring Cost</a:t>
+            </a:r>
+          </a:p>
+          <a:p>
+            <a:pPr lvl="1">
               <a:spcAft>
                 <a:spcPts val="400"/>
               </a:spcAft>
             </a:pPr>
             <a:r>
-              <a:rPr b="1" sz="1000">
-                <a:solidFill>
-                  <a:srgbClr val="0F172A"/>
+              <a:rPr b="0" sz="1200">
+                <a:solidFill>
+                  <a:srgbClr val="334155"/>
                 </a:solidFill>
               </a:rPr>
-              <a:t>• Establish Digital Identity: </a:t>
-            </a:r>
-            <a:r>
-              <a:rPr b="0" sz="1000">
-                <a:solidFill>
-                  <a:srgbClr val="334155"/>
-                </a:solidFill>
-              </a:rPr>
-              <a:t>Develop a responsive institutional web portal and verified Google Business Profile to capture local high-intent search traffic.</a:t>
-            </a:r>
-          </a:p>
-          <a:p>
-            <a:pPr>
-              <a:spcAft>
-                <a:spcPts val="400"/>
-              </a:spcAft>
-            </a:pPr>
-            <a:r>
-              <a:rPr b="1" sz="1000">
-                <a:solidFill>
-                  <a:srgbClr val="0F172A"/>
-                </a:solidFill>
-              </a:rPr>
-              <a:t>• Streamline Lead Funnel: </a:t>
-            </a:r>
-            <a:r>
-              <a:rPr b="0" sz="1000">
-                <a:solidFill>
-                  <a:srgbClr val="334155"/>
-                </a:solidFill>
-              </a:rPr>
-              <a:t>Create frictionless online inquiry forms and a 3-Day Free Demo Class registration pipeline.</a:t>
-            </a:r>
-          </a:p>
-          <a:p>
-            <a:pPr>
-              <a:spcAft>
-                <a:spcPts val="400"/>
-              </a:spcAft>
-            </a:pPr>
-            <a:r>
-              <a:rPr b="1" sz="1000">
-                <a:solidFill>
-                  <a:srgbClr val="0F172A"/>
-                </a:solidFill>
-              </a:rPr>
-              <a:t>• Maximize Demo Conversion: </a:t>
-            </a:r>
-            <a:r>
-              <a:rPr b="0" sz="1000">
-                <a:solidFill>
-                  <a:srgbClr val="334155"/>
-                </a:solidFill>
-              </a:rPr>
-              <a:t>Implement an Admin CRM with demo attendance tracking, printable admit passes, and automated WhatsApp parent follow-ups.</a:t>
-            </a:r>
-          </a:p>
-          <a:p>
-            <a:pPr>
-              <a:spcAft>
-                <a:spcPts val="400"/>
-              </a:spcAft>
-            </a:pPr>
-            <a:r>
-              <a:rPr b="1" sz="1000">
-                <a:solidFill>
-                  <a:srgbClr val="0F172A"/>
-                </a:solidFill>
-              </a:rPr>
-              <a:t>• Drive Offline Awareness: </a:t>
-            </a:r>
-            <a:r>
-              <a:rPr b="0" sz="1000">
-                <a:solidFill>
-                  <a:srgbClr val="334155"/>
-                </a:solidFill>
-              </a:rPr>
-              <a:t>Engineer an in-browser Marketing Studio with customizable posters, flyers, and direct-action QR codes for local notice boards.</a:t>
-            </a:r>
-          </a:p>
-          <a:p>
-            <a:pPr>
-              <a:spcAft>
-                <a:spcPts val="400"/>
-              </a:spcAft>
-            </a:pPr>
-            <a:r>
-              <a:rPr b="1" sz="1000">
-                <a:solidFill>
-                  <a:srgbClr val="0F172A"/>
-                </a:solidFill>
-              </a:rPr>
-              <a:t>• Digitize Academic Operations: </a:t>
-            </a:r>
-            <a:r>
-              <a:rPr b="0" sz="1000">
-                <a:solidFill>
-                  <a:srgbClr val="334155"/>
-                </a:solidFill>
-              </a:rPr>
-              <a:t>Provide visual CBSE attendance meters, digital report cards, absentee alerts, and direct online UPI fee payments.</a:t>
-            </a:r>
-          </a:p>
-        </p:txBody>
-      </p:sp>
-      <p:sp>
-        <p:nvSpPr>
-          <p:cNvPr id="11" name="Rounded Rectangle 10"/>
-          <p:cNvSpPr/>
-          <p:nvPr/>
-        </p:nvSpPr>
-        <p:spPr>
-          <a:xfrm>
-            <a:off x="4709160" y="1234440"/>
-            <a:ext cx="3977639" cy="4663440"/>
-          </a:xfrm>
-          <a:prstGeom prst="roundRect">
-            <a:avLst/>
-          </a:prstGeom>
-          <a:solidFill>
-            <a:srgbClr val="F8FAFC"/>
-          </a:solidFill>
-          <a:ln w="12700">
-            <a:solidFill>
-              <a:srgbClr val="E2E8F0"/>
-            </a:solidFill>
-          </a:ln>
-        </p:spPr>
-        <p:style>
-          <a:lnRef idx="1">
-            <a:schemeClr val="accent1"/>
-          </a:lnRef>
-          <a:fillRef idx="3">
-            <a:schemeClr val="accent1"/>
-          </a:fillRef>
-          <a:effectRef idx="2">
-            <a:schemeClr val="accent1"/>
-          </a:effectRef>
-          <a:fontRef idx="minor">
-            <a:schemeClr val="lt1"/>
-          </a:fontRef>
-        </p:style>
-        <p:txBody>
-          <a:bodyPr rtlCol="0" anchor="ctr" wrap="square" lIns="164592" rIns="164592" tIns="146304" bIns="146304"/>
-          <a:lstStyle/>
-          <a:p>
-            <a:pPr algn="ctr">
-              <a:spcAft>
-                <a:spcPts val="600"/>
-              </a:spcAft>
-              <a:defRPr b="1" sz="1300">
-                <a:solidFill>
-                  <a:srgbClr val="0F172A"/>
-                </a:solidFill>
-              </a:defRPr>
-            </a:pPr>
-            <a:r>
-              <a:t>📋 Organisation &amp; Community Requirements</a:t>
-            </a:r>
-          </a:p>
-          <a:p>
-            <a:pPr>
-              <a:spcAft>
-                <a:spcPts val="400"/>
-              </a:spcAft>
-            </a:pPr>
-            <a:r>
-              <a:rPr b="1" sz="1000">
-                <a:solidFill>
-                  <a:srgbClr val="0F172A"/>
-                </a:solidFill>
-              </a:rPr>
-              <a:t>• Zero Recurring Financial Cost: </a:t>
-            </a:r>
-            <a:r>
-              <a:rPr b="0" sz="1000">
-                <a:solidFill>
-                  <a:srgbClr val="334155"/>
-                </a:solidFill>
-              </a:rPr>
-              <a:t>Architecture must leverage 100% free-tier cloud infrastructure (Vercel, Supabase, Firebase) without monthly maintenance expenses.</a:t>
-            </a:r>
-          </a:p>
-          <a:p>
-            <a:pPr>
-              <a:spcAft>
-                <a:spcPts val="400"/>
-              </a:spcAft>
-            </a:pPr>
-            <a:r>
-              <a:rPr b="1" sz="1000">
-                <a:solidFill>
-                  <a:srgbClr val="0F172A"/>
-                </a:solidFill>
-              </a:rPr>
-              <a:t>• Non-Technical Usability: </a:t>
-            </a:r>
-            <a:r>
-              <a:rPr b="0" sz="1000">
-                <a:solidFill>
-                  <a:srgbClr val="334155"/>
-                </a:solidFill>
-              </a:rPr>
-              <a:t>Simple, intuitive administrative interface tailored for educators with minimal technical expertise on both mobile and desktop.</a:t>
-            </a:r>
-          </a:p>
-          <a:p>
-            <a:pPr>
-              <a:spcAft>
-                <a:spcPts val="400"/>
-              </a:spcAft>
-            </a:pPr>
-            <a:r>
-              <a:rPr b="1" sz="1000">
-                <a:solidFill>
-                  <a:srgbClr val="0F172A"/>
-                </a:solidFill>
-              </a:rPr>
-              <a:t>• Frictionless Parent Interaction: </a:t>
-            </a:r>
-            <a:r>
-              <a:rPr b="0" sz="1000">
-                <a:solidFill>
-                  <a:srgbClr val="334155"/>
-                </a:solidFill>
-              </a:rPr>
-              <a:t>Utilize ubiquitous WhatsApp deep-linking for follow-ups and alerts, avoiding the barrier of requiring parents to download new mobile apps.</a:t>
-            </a:r>
-          </a:p>
-          <a:p>
-            <a:pPr>
-              <a:spcAft>
-                <a:spcPts val="400"/>
-              </a:spcAft>
-            </a:pPr>
-            <a:r>
-              <a:rPr b="1" sz="1000">
-                <a:solidFill>
-                  <a:srgbClr val="0F172A"/>
-                </a:solidFill>
-              </a:rPr>
-              <a:t>• Curriculum &amp; Fee Transparency: </a:t>
-            </a:r>
-            <a:r>
-              <a:rPr b="0" sz="1000">
-                <a:solidFill>
-                  <a:srgbClr val="334155"/>
-                </a:solidFill>
-              </a:rPr>
-              <a:t>Public display of transparent batch timings, fee structures, faculty credentials, and genuine parent testimonials to build neighborhood trust.</a:t>
-            </a:r>
-          </a:p>
-          <a:p>
-            <a:pPr>
-              <a:spcAft>
-                <a:spcPts val="400"/>
-              </a:spcAft>
-            </a:pPr>
-            <a:r>
-              <a:rPr b="1" sz="1000">
-                <a:solidFill>
-                  <a:srgbClr val="0F172A"/>
-                </a:solidFill>
-              </a:rPr>
-              <a:t>• 24/7 AI Doubt Support: </a:t>
-            </a:r>
-            <a:r>
-              <a:rPr b="0" sz="1000">
-                <a:solidFill>
-                  <a:srgbClr val="334155"/>
-                </a:solidFill>
-              </a:rPr>
-              <a:t>Provide accessible doubt resolution for hesitant students outside classroom hours to improve academic outcomes.</a:t>
+              <a:t>Digitize daily attendance tracking, CBSE health meters, report cards, and online UPI fees. Ensure the platform runs on 100% free-tier cloud infrastructure with no monthly expenses for teachers.</a:t>
             </a:r>
           </a:p>
         </p:txBody>
@@ -7835,447 +7049,131 @@
       </p:pic>
       <p:sp>
         <p:nvSpPr>
-          <p:cNvPr id="10" name="Rounded Rectangle 9"/>
-          <p:cNvSpPr/>
+          <p:cNvPr id="6" name="TextBox 5">
+            <a:extLst>
+              <a:ext uri="{FF2B5EF4-FFF2-40B4-BE49-F238E27FC236}">
+                <a16:creationId xmlns:a16="http://schemas.microsoft.com/office/drawing/2014/main" id="{AE24D516-77C6-C96A-5F77-D099623448D8}"/>
+              </a:ext>
+            </a:extLst>
+          </p:cNvPr>
+          <p:cNvSpPr txBox="1"/>
           <p:nvPr/>
         </p:nvSpPr>
         <p:spPr>
           <a:xfrm>
-            <a:off x="457200" y="1234440"/>
-            <a:ext cx="2560320" cy="4663440"/>
+            <a:off x="731520" y="1234440"/>
+            <a:ext cx="7680960" cy="4480560"/>
           </a:xfrm>
-          <a:prstGeom prst="roundRect">
+          <a:prstGeom prst="rect">
             <a:avLst/>
           </a:prstGeom>
-          <a:solidFill>
-            <a:srgbClr val="F8FAFC"/>
-          </a:solidFill>
-          <a:ln w="25400">
-            <a:solidFill>
-              <a:srgbClr val="C5192D"/>
-            </a:solidFill>
-          </a:ln>
+          <a:noFill/>
         </p:spPr>
-        <p:style>
-          <a:lnRef idx="1">
-            <a:schemeClr val="accent1"/>
-          </a:lnRef>
-          <a:fillRef idx="3">
-            <a:schemeClr val="accent1"/>
-          </a:fillRef>
-          <a:effectRef idx="2">
-            <a:schemeClr val="accent1"/>
-          </a:effectRef>
-          <a:fontRef idx="minor">
-            <a:schemeClr val="lt1"/>
-          </a:fontRef>
-        </p:style>
-        <p:txBody>
-          <a:bodyPr rtlCol="0" anchor="ctr" wrap="square" lIns="164592" rIns="164592" tIns="146304" bIns="146304"/>
+        <p:txBody>
+          <a:bodyPr wrap="square">
+            <a:spAutoFit/>
+          </a:bodyPr>
           <a:lstStyle/>
           <a:p>
-            <a:pPr algn="ctr">
+            <a:pPr marL="0" marR="0" algn="just" fontAlgn="base">
+              <a:lnSpc>
+                <a:spcPct val="107000"/>
+              </a:lnSpc>
+              <a:spcBef>
+                <a:spcPts val="0"/>
+              </a:spcBef>
               <a:spcAft>
-                <a:spcPts val="600"/>
+                <a:spcPts val="200"/>
               </a:spcAft>
-              <a:defRPr b="1" sz="1250">
-                <a:solidFill>
-                  <a:srgbClr val="C5192D"/>
-                </a:solidFill>
-              </a:defRPr>
             </a:pPr>
             <a:r>
-              <a:t>🎯 SDG 4: Quality Education</a:t>
+              <a:rPr b="1" sz="1500">
+                <a:solidFill>
+                  <a:srgbClr val="003366"/>
+                </a:solidFill>
+              </a:rPr>
+              <a:t>SDG 4: Quality Education (Targets 4.1 &amp; 4.c)</a:t>
+            </a:r>
+            <a:endParaRPr lang="en-US" sz="2800" kern="100" dirty="0">
+              <a:effectLst/>
+              <a:latin typeface="+mj-lt"/>
+              <a:ea typeface="Calibri" panose="020F0502020204030204" pitchFamily="34" charset="0"/>
+              <a:cs typeface="Times New Roman" panose="02020603050405020304" pitchFamily="18" charset="0"/>
+            </a:endParaRPr>
+          </a:p>
+          <a:p>
+            <a:pPr lvl="1">
+              <a:spcAft>
+                <a:spcPts val="1000"/>
+              </a:spcAft>
+            </a:pPr>
+            <a:r>
+              <a:rPr b="0" sz="1250">
+                <a:solidFill>
+                  <a:srgbClr val="334155"/>
+                </a:solidFill>
+              </a:rPr>
+              <a:t>Ensures students in Sector 22B, Palam Vihar, and adjoining communities have access to high-quality, affordable supplementary tutoring in Maths and Science. Integrated a 24/7 AI Doubt Solver to help students resolve NCERT textbook questions step-by-step outside classroom hours.</a:t>
             </a:r>
           </a:p>
           <a:p>
             <a:pPr>
+              <a:spcAft>
+                <a:spcPts val="200"/>
+              </a:spcAft>
+            </a:pPr>
+            <a:r>
+              <a:rPr b="1" sz="1500">
+                <a:solidFill>
+                  <a:srgbClr val="003366"/>
+                </a:solidFill>
+              </a:rPr>
+              <a:t>SDG 8: Decent Work and Economic Growth (Targets 8.3 &amp; 8.5)</a:t>
+            </a:r>
+          </a:p>
+          <a:p>
+            <a:pPr lvl="1">
+              <a:spcAft>
+                <a:spcPts val="1000"/>
+              </a:spcAft>
+            </a:pPr>
+            <a:r>
+              <a:rPr b="0" sz="1250">
+                <a:solidFill>
+                  <a:srgbClr val="334155"/>
+                </a:solidFill>
+              </a:rPr>
+              <a:t>Empowers local teachers as sustainable micro-entrepreneurs by digitizing their teaching practice. Increases student enrollment capacity from 4–5 to 12–15 students per batch (+65% capacity utilization) and eliminates middleman commissions of corporate tuition aggregator apps.</a:t>
+            </a:r>
+          </a:p>
+          <a:p>
+            <a:pPr>
+              <a:spcAft>
+                <a:spcPts val="200"/>
+              </a:spcAft>
+            </a:pPr>
+            <a:r>
+              <a:rPr b="1" sz="1500">
+                <a:solidFill>
+                  <a:srgbClr val="003366"/>
+                </a:solidFill>
+              </a:rPr>
+              <a:t>SDG 9: Industry, Innovation, and Infrastructure (Target 9.c)</a:t>
+            </a:r>
+          </a:p>
+          <a:p>
+            <a:pPr lvl="1">
               <a:spcAft>
                 <a:spcPts val="400"/>
               </a:spcAft>
             </a:pPr>
             <a:r>
-              <a:rPr b="1" sz="950">
-                <a:solidFill>
-                  <a:srgbClr val="0F172A"/>
+              <a:rPr b="0" sz="1250">
+                <a:solidFill>
+                  <a:srgbClr val="334155"/>
                 </a:solidFill>
               </a:rPr>
-              <a:t>• Target 4.1 &amp; 4.c: </a:t>
-            </a:r>
-            <a:r>
-              <a:rPr b="0" sz="950">
-                <a:solidFill>
-                  <a:srgbClr val="334155"/>
-                </a:solidFill>
-              </a:rPr>
-              <a:t>Ensure all girls and boys complete free, equitable, and quality primary and secondary education.</a:t>
-            </a:r>
-          </a:p>
-          <a:p>
-            <a:pPr>
-              <a:spcAft>
-                <a:spcPts val="400"/>
-              </a:spcAft>
-            </a:pPr>
-            <a:r>
-              <a:rPr b="1" sz="950">
-                <a:solidFill>
-                  <a:srgbClr val="0F172A"/>
-                </a:solidFill>
-              </a:rPr>
-              <a:t>• Affordable Tutoring: </a:t>
-            </a:r>
-            <a:r>
-              <a:rPr b="0" sz="950">
-                <a:solidFill>
-                  <a:srgbClr val="334155"/>
-                </a:solidFill>
-              </a:rPr>
-              <a:t>Expands neighborhood access to qualified CBSE tutoring in Maths and Science for families who cannot afford exorbitant corporate coaching institutes.</a:t>
-            </a:r>
-          </a:p>
-          <a:p>
-            <a:pPr>
-              <a:spcAft>
-                <a:spcPts val="400"/>
-              </a:spcAft>
-            </a:pPr>
-            <a:r>
-              <a:rPr b="1" sz="950">
-                <a:solidFill>
-                  <a:srgbClr val="0F172A"/>
-                </a:solidFill>
-              </a:rPr>
-              <a:t>• Inclusive Reach: </a:t>
-            </a:r>
-            <a:r>
-              <a:rPr b="0" sz="950">
-                <a:solidFill>
-                  <a:srgbClr val="334155"/>
-                </a:solidFill>
-              </a:rPr>
-              <a:t>Bridges educational gaps for students from adjacent villages (Dundahera, Carterpuri) with tailored foundational batches.</a:t>
-            </a:r>
-          </a:p>
-          <a:p>
-            <a:pPr>
-              <a:spcAft>
-                <a:spcPts val="400"/>
-              </a:spcAft>
-            </a:pPr>
-            <a:r>
-              <a:rPr b="1" sz="950">
-                <a:solidFill>
-                  <a:srgbClr val="0F172A"/>
-                </a:solidFill>
-              </a:rPr>
-              <a:t>• AI Doubt Democratization: </a:t>
-            </a:r>
-            <a:r>
-              <a:rPr b="0" sz="950">
-                <a:solidFill>
-                  <a:srgbClr val="334155"/>
-                </a:solidFill>
-              </a:rPr>
-              <a:t>Integrates 24/7 Google Gemini AI Instant Doubt Solver to provide step-by-step NCERT explanations anytime.</a:t>
-            </a:r>
-          </a:p>
-        </p:txBody>
-      </p:sp>
-      <p:sp>
-        <p:nvSpPr>
-          <p:cNvPr id="11" name="Rounded Rectangle 10"/>
-          <p:cNvSpPr/>
-          <p:nvPr/>
-        </p:nvSpPr>
-        <p:spPr>
-          <a:xfrm>
-            <a:off x="3246120" y="1234440"/>
-            <a:ext cx="2560320" cy="4663440"/>
-          </a:xfrm>
-          <a:prstGeom prst="roundRect">
-            <a:avLst/>
-          </a:prstGeom>
-          <a:solidFill>
-            <a:srgbClr val="F8FAFC"/>
-          </a:solidFill>
-          <a:ln w="25400">
-            <a:solidFill>
-              <a:srgbClr val="A21942"/>
-            </a:solidFill>
-          </a:ln>
-        </p:spPr>
-        <p:style>
-          <a:lnRef idx="1">
-            <a:schemeClr val="accent1"/>
-          </a:lnRef>
-          <a:fillRef idx="3">
-            <a:schemeClr val="accent1"/>
-          </a:fillRef>
-          <a:effectRef idx="2">
-            <a:schemeClr val="accent1"/>
-          </a:effectRef>
-          <a:fontRef idx="minor">
-            <a:schemeClr val="lt1"/>
-          </a:fontRef>
-        </p:style>
-        <p:txBody>
-          <a:bodyPr rtlCol="0" anchor="ctr" wrap="square" lIns="164592" rIns="164592" tIns="146304" bIns="146304"/>
-          <a:lstStyle/>
-          <a:p>
-            <a:pPr algn="ctr">
-              <a:spcAft>
-                <a:spcPts val="600"/>
-              </a:spcAft>
-              <a:defRPr b="1" sz="1250">
-                <a:solidFill>
-                  <a:srgbClr val="A21942"/>
-                </a:solidFill>
-              </a:defRPr>
-            </a:pPr>
-            <a:r>
-              <a:t>💼 SDG 8: Decent Work &amp; Growth</a:t>
-            </a:r>
-          </a:p>
-          <a:p>
-            <a:pPr>
-              <a:spcAft>
-                <a:spcPts val="400"/>
-              </a:spcAft>
-            </a:pPr>
-            <a:r>
-              <a:rPr b="1" sz="950">
-                <a:solidFill>
-                  <a:srgbClr val="0F172A"/>
-                </a:solidFill>
-              </a:rPr>
-              <a:t>• Target 8.3 &amp; 8.5: </a:t>
-            </a:r>
-            <a:r>
-              <a:rPr b="0" sz="950">
-                <a:solidFill>
-                  <a:srgbClr val="334155"/>
-                </a:solidFill>
-              </a:rPr>
-              <a:t>Promote development-oriented policies that support productive activities, entrepreneurship, and innovation.</a:t>
-            </a:r>
-          </a:p>
-          <a:p>
-            <a:pPr>
-              <a:spcAft>
-                <a:spcPts val="400"/>
-              </a:spcAft>
-            </a:pPr>
-            <a:r>
-              <a:rPr b="1" sz="950">
-                <a:solidFill>
-                  <a:srgbClr val="0F172A"/>
-                </a:solidFill>
-              </a:rPr>
-              <a:t>• Micro-Enterprise Empowerment: </a:t>
-            </a:r>
-            <a:r>
-              <a:rPr b="0" sz="950">
-                <a:solidFill>
-                  <a:srgbClr val="334155"/>
-                </a:solidFill>
-              </a:rPr>
-              <a:t>Transforms independent local teachers into sustainable, digitally empowered micro-entrepreneurs.</a:t>
-            </a:r>
-          </a:p>
-          <a:p>
-            <a:pPr>
-              <a:spcAft>
-                <a:spcPts val="400"/>
-              </a:spcAft>
-            </a:pPr>
-            <a:r>
-              <a:rPr b="1" sz="950">
-                <a:solidFill>
-                  <a:srgbClr val="0F172A"/>
-                </a:solidFill>
-              </a:rPr>
-              <a:t>• Capacity Utilization: </a:t>
-            </a:r>
-            <a:r>
-              <a:rPr b="0" sz="950">
-                <a:solidFill>
-                  <a:srgbClr val="334155"/>
-                </a:solidFill>
-              </a:rPr>
-              <a:t>Increases batch enrollment capacity by +65%, directly boosting household income and financial security for educators.</a:t>
-            </a:r>
-          </a:p>
-          <a:p>
-            <a:pPr>
-              <a:spcAft>
-                <a:spcPts val="400"/>
-              </a:spcAft>
-            </a:pPr>
-            <a:r>
-              <a:rPr b="1" sz="950">
-                <a:solidFill>
-                  <a:srgbClr val="0F172A"/>
-                </a:solidFill>
-              </a:rPr>
-              <a:t>• Zero Intermediary Fees: </a:t>
-            </a:r>
-            <a:r>
-              <a:rPr b="0" sz="950">
-                <a:solidFill>
-                  <a:srgbClr val="334155"/>
-                </a:solidFill>
-              </a:rPr>
-              <a:t>Eliminates predatory commission cuts of corporate tuition broker apps, letting teachers retain 100% of student fees.</a:t>
-            </a:r>
-          </a:p>
-        </p:txBody>
-      </p:sp>
-      <p:sp>
-        <p:nvSpPr>
-          <p:cNvPr id="12" name="Rounded Rectangle 11"/>
-          <p:cNvSpPr/>
-          <p:nvPr/>
-        </p:nvSpPr>
-        <p:spPr>
-          <a:xfrm>
-            <a:off x="6035040" y="1234440"/>
-            <a:ext cx="2560320" cy="4663440"/>
-          </a:xfrm>
-          <a:prstGeom prst="roundRect">
-            <a:avLst/>
-          </a:prstGeom>
-          <a:solidFill>
-            <a:srgbClr val="F8FAFC"/>
-          </a:solidFill>
-          <a:ln w="25400">
-            <a:solidFill>
-              <a:srgbClr val="FD6925"/>
-            </a:solidFill>
-          </a:ln>
-        </p:spPr>
-        <p:style>
-          <a:lnRef idx="1">
-            <a:schemeClr val="accent1"/>
-          </a:lnRef>
-          <a:fillRef idx="3">
-            <a:schemeClr val="accent1"/>
-          </a:fillRef>
-          <a:effectRef idx="2">
-            <a:schemeClr val="accent1"/>
-          </a:effectRef>
-          <a:fontRef idx="minor">
-            <a:schemeClr val="lt1"/>
-          </a:fontRef>
-        </p:style>
-        <p:txBody>
-          <a:bodyPr rtlCol="0" anchor="ctr" wrap="square" lIns="164592" rIns="164592" tIns="146304" bIns="146304"/>
-          <a:lstStyle/>
-          <a:p>
-            <a:pPr algn="ctr">
-              <a:spcAft>
-                <a:spcPts val="600"/>
-              </a:spcAft>
-              <a:defRPr b="1" sz="1250">
-                <a:solidFill>
-                  <a:srgbClr val="FD6925"/>
-                </a:solidFill>
-              </a:defRPr>
-            </a:pPr>
-            <a:r>
-              <a:t>🚀 SDG 9: Industry &amp; Innovation</a:t>
-            </a:r>
-          </a:p>
-          <a:p>
-            <a:pPr>
-              <a:spcAft>
-                <a:spcPts val="400"/>
-              </a:spcAft>
-            </a:pPr>
-            <a:r>
-              <a:rPr b="1" sz="950">
-                <a:solidFill>
-                  <a:srgbClr val="0F172A"/>
-                </a:solidFill>
-              </a:rPr>
-              <a:t>• Target 9.c: </a:t>
-            </a:r>
-            <a:r>
-              <a:rPr b="0" sz="950">
-                <a:solidFill>
-                  <a:srgbClr val="334155"/>
-                </a:solidFill>
-              </a:rPr>
-              <a:t>Significantly increase access to information and communications technology.</a:t>
-            </a:r>
-          </a:p>
-          <a:p>
-            <a:pPr>
-              <a:spcAft>
-                <a:spcPts val="400"/>
-              </a:spcAft>
-            </a:pPr>
-            <a:r>
-              <a:rPr b="1" sz="950">
-                <a:solidFill>
-                  <a:srgbClr val="0F172A"/>
-                </a:solidFill>
-              </a:rPr>
-              <a:t>• Digital Infrastructure: </a:t>
-            </a:r>
-            <a:r>
-              <a:rPr b="0" sz="950">
-                <a:solidFill>
-                  <a:srgbClr val="334155"/>
-                </a:solidFill>
-              </a:rPr>
-              <a:t>Modernizes traditional chalk-and-talk neighborhood services with progressive Next.js 15 web architecture.</a:t>
-            </a:r>
-          </a:p>
-          <a:p>
-            <a:pPr>
-              <a:spcAft>
-                <a:spcPts val="400"/>
-              </a:spcAft>
-            </a:pPr>
-            <a:r>
-              <a:rPr b="1" sz="950">
-                <a:solidFill>
-                  <a:srgbClr val="0F172A"/>
-                </a:solidFill>
-              </a:rPr>
-              <a:t>• Smart QR Workflows: </a:t>
-            </a:r>
-            <a:r>
-              <a:rPr b="0" sz="950">
-                <a:solidFill>
-                  <a:srgbClr val="334155"/>
-                </a:solidFill>
-              </a:rPr>
-              <a:t>Introduces contactless QR codes for student attendance passes, marketing standees, and 1-click Google Maps review capture.</a:t>
-            </a:r>
-          </a:p>
-          <a:p>
-            <a:pPr>
-              <a:spcAft>
-                <a:spcPts val="400"/>
-              </a:spcAft>
-            </a:pPr>
-            <a:r>
-              <a:rPr b="1" sz="950">
-                <a:solidFill>
-                  <a:srgbClr val="0F172A"/>
-                </a:solidFill>
-              </a:rPr>
-              <a:t>• Local Discovery Tech: </a:t>
-            </a:r>
-            <a:r>
-              <a:rPr b="0" sz="950">
-                <a:solidFill>
-                  <a:srgbClr val="334155"/>
-                </a:solidFill>
-              </a:rPr>
-              <a:t>Applies Schema.org JSON-LD structured metadata to elevate grassroots educational visibility on global search engines.</a:t>
+              <a:t>Brings modern digital tools into a traditional neighborhood education setup. Implements contactless QR-code workflows for student demo passes and attendance check-ins, along with Schema.org local search metadata.</a:t>
             </a:r>
           </a:p>
         </p:txBody>
@@ -8487,321 +7385,108 @@
       </p:pic>
       <p:sp>
         <p:nvSpPr>
-          <p:cNvPr id="10" name="Rounded Rectangle 9"/>
-          <p:cNvSpPr/>
+          <p:cNvPr id="6" name="TextBox 5">
+            <a:extLst>
+              <a:ext uri="{FF2B5EF4-FFF2-40B4-BE49-F238E27FC236}">
+                <a16:creationId xmlns:a16="http://schemas.microsoft.com/office/drawing/2014/main" id="{AE24D516-77C6-C96A-5F77-D099623448D8}"/>
+              </a:ext>
+            </a:extLst>
+          </p:cNvPr>
+          <p:cNvSpPr txBox="1"/>
           <p:nvPr/>
         </p:nvSpPr>
         <p:spPr>
           <a:xfrm>
-            <a:off x="457200" y="1234440"/>
-            <a:ext cx="3977639" cy="4663440"/>
+            <a:off x="731520" y="1234440"/>
+            <a:ext cx="7680960" cy="4480560"/>
           </a:xfrm>
-          <a:prstGeom prst="roundRect">
+          <a:prstGeom prst="rect">
             <a:avLst/>
           </a:prstGeom>
-          <a:solidFill>
-            <a:srgbClr val="F8FAFC"/>
-          </a:solidFill>
-          <a:ln w="12700">
-            <a:solidFill>
-              <a:srgbClr val="E2E8F0"/>
-            </a:solidFill>
-          </a:ln>
+          <a:noFill/>
         </p:spPr>
-        <p:style>
-          <a:lnRef idx="1">
-            <a:schemeClr val="accent1"/>
-          </a:lnRef>
-          <a:fillRef idx="3">
-            <a:schemeClr val="accent1"/>
-          </a:fillRef>
-          <a:effectRef idx="2">
-            <a:schemeClr val="accent1"/>
-          </a:effectRef>
-          <a:fontRef idx="minor">
-            <a:schemeClr val="lt1"/>
-          </a:fontRef>
-        </p:style>
-        <p:txBody>
-          <a:bodyPr rtlCol="0" anchor="ctr" wrap="square" lIns="164592" rIns="164592" tIns="146304" bIns="146304"/>
+        <p:txBody>
+          <a:bodyPr wrap="square">
+            <a:spAutoFit/>
+          </a:bodyPr>
           <a:lstStyle/>
           <a:p>
-            <a:pPr algn="ctr">
+            <a:pPr marL="0" marR="0" algn="just" fontAlgn="base">
+              <a:lnSpc>
+                <a:spcPct val="107000"/>
+              </a:lnSpc>
+              <a:spcBef>
+                <a:spcPts val="0"/>
+              </a:spcBef>
               <a:spcAft>
-                <a:spcPts val="600"/>
+                <a:spcPts val="200"/>
               </a:spcAft>
-              <a:defRPr b="1" sz="1300">
-                <a:solidFill>
-                  <a:srgbClr val="0070C0"/>
-                </a:solidFill>
-              </a:defRPr>
             </a:pPr>
             <a:r>
-              <a:t>⚙️ 4-Phase Project Methodology</a:t>
+              <a:rPr b="1" sz="1450">
+                <a:solidFill>
+                  <a:srgbClr val="003366"/>
+                </a:solidFill>
+              </a:rPr>
+              <a:t>Project Methodology (4-Step Execution)</a:t>
+            </a:r>
+            <a:endParaRPr lang="en-US" sz="2800" kern="100" dirty="0">
+              <a:effectLst/>
+              <a:latin typeface="+mj-lt"/>
+              <a:ea typeface="Calibri" panose="020F0502020204030204" pitchFamily="34" charset="0"/>
+              <a:cs typeface="Times New Roman" panose="02020603050405020304" pitchFamily="18" charset="0"/>
+            </a:endParaRPr>
+          </a:p>
+          <a:p>
+            <a:pPr lvl="1">
+              <a:spcAft>
+                <a:spcPts val="1000"/>
+              </a:spcAft>
+            </a:pPr>
+            <a:r>
+              <a:rPr b="0" sz="1200">
+                <a:solidFill>
+                  <a:srgbClr val="334155"/>
+                </a:solidFill>
+              </a:rPr>
+              <a:t>• Step 1: Field Survey &amp; Diagnosis — Visited coaching center in Sec-22B, interviewed teachers, reviewed existing manual records, and identified visibility bottlenecks.
+• Step 2: System &amp; UI Design — Designed mobile-first responsive layouts, lead inquiry workflows, and data schemas.
+• Step 3: Full-Stack Development — Built platform with Next.js 15, Supabase database, Firebase authentication, and Google Gemini AI.
+• Step 4: Pilot Testing &amp; Deployment — Deployed on Vercel, verified Google Maps pin, distributed QR flyers, and trained teachers.</a:t>
             </a:r>
           </a:p>
           <a:p>
             <a:pPr>
+              <a:spcAft>
+                <a:spcPts val="200"/>
+              </a:spcAft>
+            </a:pPr>
+            <a:r>
+              <a:rPr b="1" sz="1450">
+                <a:solidFill>
+                  <a:srgbClr val="003366"/>
+                </a:solidFill>
+              </a:rPr>
+              <a:t>Technology Stack Used</a:t>
+            </a:r>
+          </a:p>
+          <a:p>
+            <a:pPr lvl="1">
               <a:spcAft>
                 <a:spcPts val="400"/>
               </a:spcAft>
             </a:pPr>
             <a:r>
-              <a:rPr b="1" sz="1000">
-                <a:solidFill>
-                  <a:srgbClr val="0F172A"/>
+              <a:rPr b="0" sz="1200">
+                <a:solidFill>
+                  <a:srgbClr val="334155"/>
                 </a:solidFill>
               </a:rPr>
-              <a:t>• Phase 1: Needs Assessment &amp; Survey: </a:t>
-            </a:r>
-            <a:r>
-              <a:rPr b="0" sz="1000">
-                <a:solidFill>
-                  <a:srgbClr val="334155"/>
-                </a:solidFill>
-              </a:rPr>
-              <a:t>Onsite field visits to Sector-22B, Gurgaon; structured interviews with Praveen Sir and Rashmi Ma'am; identification of operational bottlenecks.</a:t>
-            </a:r>
-          </a:p>
-          <a:p>
-            <a:pPr>
-              <a:spcAft>
-                <a:spcPts val="400"/>
-              </a:spcAft>
-            </a:pPr>
-            <a:r>
-              <a:rPr b="1" sz="1000">
-                <a:solidFill>
-                  <a:srgbClr val="0F172A"/>
-                </a:solidFill>
-              </a:rPr>
-              <a:t>• Phase 2: Architectural &amp; UI Design: </a:t>
-            </a:r>
-            <a:r>
-              <a:rPr b="0" sz="1000">
-                <a:solidFill>
-                  <a:srgbClr val="334155"/>
-                </a:solidFill>
-              </a:rPr>
-              <a:t>Prototyping responsive layouts for Public Website, Marketing Studio, and Dashboards; formulating strict data contracts.</a:t>
-            </a:r>
-          </a:p>
-          <a:p>
-            <a:pPr>
-              <a:spcAft>
-                <a:spcPts val="400"/>
-              </a:spcAft>
-            </a:pPr>
-            <a:r>
-              <a:rPr b="1" sz="1000">
-                <a:solidFill>
-                  <a:srgbClr val="0F172A"/>
-                </a:solidFill>
-              </a:rPr>
-              <a:t>• Phase 3: Agile Development &amp; Integration: </a:t>
-            </a:r>
-            <a:r>
-              <a:rPr b="0" sz="1000">
-                <a:solidFill>
-                  <a:srgbClr val="334155"/>
-                </a:solidFill>
-              </a:rPr>
-              <a:t>Building Next.js 15 App Router frontend, Tailwind UI system, Firebase Auth SDK, and Google Gemini AI Doubt Solver.</a:t>
-            </a:r>
-          </a:p>
-          <a:p>
-            <a:pPr>
-              <a:spcAft>
-                <a:spcPts val="400"/>
-              </a:spcAft>
-            </a:pPr>
-            <a:r>
-              <a:rPr b="1" sz="1000">
-                <a:solidFill>
-                  <a:srgbClr val="0F172A"/>
-                </a:solidFill>
-              </a:rPr>
-              <a:t>• Phase 4: Field Testing &amp; Verification: </a:t>
-            </a:r>
-            <a:r>
-              <a:rPr b="0" sz="1000">
-                <a:solidFill>
-                  <a:srgbClr val="334155"/>
-                </a:solidFill>
-              </a:rPr>
-              <a:t>Deployment on Vercel; field testing of QR standees; running 14 student pilot trial; Google Business Profile verification and teacher handover.</a:t>
-            </a:r>
-          </a:p>
-        </p:txBody>
-      </p:sp>
-      <p:sp>
-        <p:nvSpPr>
-          <p:cNvPr id="11" name="Rounded Rectangle 10"/>
-          <p:cNvSpPr/>
-          <p:nvPr/>
-        </p:nvSpPr>
-        <p:spPr>
-          <a:xfrm>
-            <a:off x="4709160" y="1234440"/>
-            <a:ext cx="3977639" cy="4663440"/>
-          </a:xfrm>
-          <a:prstGeom prst="roundRect">
-            <a:avLst/>
-          </a:prstGeom>
-          <a:solidFill>
-            <a:srgbClr val="F8FAFC"/>
-          </a:solidFill>
-          <a:ln w="12700">
-            <a:solidFill>
-              <a:srgbClr val="E2E8F0"/>
-            </a:solidFill>
-          </a:ln>
-        </p:spPr>
-        <p:style>
-          <a:lnRef idx="1">
-            <a:schemeClr val="accent1"/>
-          </a:lnRef>
-          <a:fillRef idx="3">
-            <a:schemeClr val="accent1"/>
-          </a:fillRef>
-          <a:effectRef idx="2">
-            <a:schemeClr val="accent1"/>
-          </a:effectRef>
-          <a:fontRef idx="minor">
-            <a:schemeClr val="lt1"/>
-          </a:fontRef>
-        </p:style>
-        <p:txBody>
-          <a:bodyPr rtlCol="0" anchor="ctr" wrap="square" lIns="164592" rIns="164592" tIns="146304" bIns="146304"/>
-          <a:lstStyle/>
-          <a:p>
-            <a:pPr algn="ctr">
-              <a:spcAft>
-                <a:spcPts val="600"/>
-              </a:spcAft>
-              <a:defRPr b="1" sz="1300">
-                <a:solidFill>
-                  <a:srgbClr val="0F172A"/>
-                </a:solidFill>
-              </a:defRPr>
-            </a:pPr>
-            <a:r>
-              <a:t>💻 Full-Stack Technology Stack</a:t>
-            </a:r>
-          </a:p>
-          <a:p>
-            <a:pPr>
-              <a:spcAft>
-                <a:spcPts val="400"/>
-              </a:spcAft>
-            </a:pPr>
-            <a:r>
-              <a:rPr b="1" sz="1000">
-                <a:solidFill>
-                  <a:srgbClr val="0F172A"/>
-                </a:solidFill>
-              </a:rPr>
-              <a:t>• Frontend Framework: </a:t>
-            </a:r>
-            <a:r>
-              <a:rPr b="0" sz="1000">
-                <a:solidFill>
-                  <a:srgbClr val="334155"/>
-                </a:solidFill>
-              </a:rPr>
-              <a:t>Next.js 15 (App Router), React 19, TypeScript 5.7, Tailwind CSS 3.4, Lucide React Iconography.</a:t>
-            </a:r>
-          </a:p>
-          <a:p>
-            <a:pPr>
-              <a:spcAft>
-                <a:spcPts val="400"/>
-              </a:spcAft>
-            </a:pPr>
-            <a:r>
-              <a:rPr b="1" sz="1000">
-                <a:solidFill>
-                  <a:srgbClr val="0F172A"/>
-                </a:solidFill>
-              </a:rPr>
-              <a:t>• Data Persistence: </a:t>
-            </a:r>
-            <a:r>
-              <a:rPr b="0" sz="1000">
-                <a:solidFill>
-                  <a:srgbClr val="334155"/>
-                </a:solidFill>
-              </a:rPr>
-              <a:t>Dual-strategy: Browser LocalStorage (zero-setup offline prototype) + Supabase PostgreSQL relational schema for cloud sync.</a:t>
-            </a:r>
-          </a:p>
-          <a:p>
-            <a:pPr>
-              <a:spcAft>
-                <a:spcPts val="400"/>
-              </a:spcAft>
-            </a:pPr>
-            <a:r>
-              <a:rPr b="1" sz="1000">
-                <a:solidFill>
-                  <a:srgbClr val="0F172A"/>
-                </a:solidFill>
-              </a:rPr>
-              <a:t>• Authentication: </a:t>
-            </a:r>
-            <a:r>
-              <a:rPr b="0" sz="1000">
-                <a:solidFill>
-                  <a:srgbClr val="334155"/>
-                </a:solidFill>
-              </a:rPr>
-              <a:t>Firebase Auth SDK (v11) with cryptographic token decode fallbacks &amp; 1-click role session demo switching.</a:t>
-            </a:r>
-          </a:p>
-          <a:p>
-            <a:pPr>
-              <a:spcAft>
-                <a:spcPts val="400"/>
-              </a:spcAft>
-            </a:pPr>
-            <a:r>
-              <a:rPr b="1" sz="1000">
-                <a:solidFill>
-                  <a:srgbClr val="0F172A"/>
-                </a:solidFill>
-              </a:rPr>
-              <a:t>• AI Engine: </a:t>
-            </a:r>
-            <a:r>
-              <a:rPr b="0" sz="1000">
-                <a:solidFill>
-                  <a:srgbClr val="334155"/>
-                </a:solidFill>
-              </a:rPr>
-              <a:t>Google Gemini API powering the 24/7 CBSE Instant Doubt Resolver Desk with step-by-step NCERT explanations.</a:t>
-            </a:r>
-          </a:p>
-          <a:p>
-            <a:pPr>
-              <a:spcAft>
-                <a:spcPts val="400"/>
-              </a:spcAft>
-            </a:pPr>
-            <a:r>
-              <a:rPr b="1" sz="1000">
-                <a:solidFill>
-                  <a:srgbClr val="0F172A"/>
-                </a:solidFill>
-              </a:rPr>
-              <a:t>• SEO &amp; Local Discovery: </a:t>
-            </a:r>
-            <a:r>
-              <a:rPr b="0" sz="1000">
-                <a:solidFill>
-                  <a:srgbClr val="334155"/>
-                </a:solidFill>
-              </a:rPr>
-              <a:t>Google Business Profile optimization, Schema.org EducationalOrganization JSON-LD, dynamic sitemap &amp; robots.txt.</a:t>
+              <a:t>• Frontend: Next.js 15 (App Router), React 19, Tailwind CSS, Lucide React icons.
+• Backend &amp; Persistence: TypeScript 5.7, Supabase PostgreSQL, Browser LocalStorage for instant demos.
+• Authentication: Firebase Auth SDK (v11) with role-based logins for Teachers, Students, and Admin.
+• Artificial Intelligence: Google Gemini API powering the 24/7 instant doubt resolution desk.
+• SEO &amp; Discovery: Google Business Profile optimization, Schema.org EducationalOrganization JSON-LD.</a:t>
             </a:r>
           </a:p>
         </p:txBody>
@@ -9011,6 +7696,81 @@
           </a:prstGeom>
         </p:spPr>
       </p:pic>
+      <p:sp>
+        <p:nvSpPr>
+          <p:cNvPr id="6" name="TextBox 5">
+            <a:extLst>
+              <a:ext uri="{FF2B5EF4-FFF2-40B4-BE49-F238E27FC236}">
+                <a16:creationId xmlns:a16="http://schemas.microsoft.com/office/drawing/2014/main" id="{AE24D516-77C6-C96A-5F77-D099623448D8}"/>
+              </a:ext>
+            </a:extLst>
+          </p:cNvPr>
+          <p:cNvSpPr txBox="1"/>
+          <p:nvPr/>
+        </p:nvSpPr>
+        <p:spPr>
+          <a:xfrm>
+            <a:off x="640080" y="1234440"/>
+            <a:ext cx="4297680" cy="4480560"/>
+          </a:xfrm>
+          <a:prstGeom prst="rect">
+            <a:avLst/>
+          </a:prstGeom>
+          <a:noFill/>
+        </p:spPr>
+        <p:txBody>
+          <a:bodyPr wrap="square">
+            <a:spAutoFit/>
+          </a:bodyPr>
+          <a:lstStyle/>
+          <a:p>
+            <a:pPr marL="0" marR="0" algn="just" fontAlgn="base">
+              <a:lnSpc>
+                <a:spcPct val="107000"/>
+              </a:lnSpc>
+              <a:spcBef>
+                <a:spcPts val="0"/>
+              </a:spcBef>
+              <a:spcAft>
+                <a:spcPts val="200"/>
+              </a:spcAft>
+            </a:pPr>
+            <a:r>
+              <a:rPr b="1" sz="1400">
+                <a:solidFill>
+                  <a:srgbClr val="003366"/>
+                </a:solidFill>
+              </a:rPr>
+              <a:t>System Architecture &amp; Operational Flow</a:t>
+            </a:r>
+            <a:endParaRPr lang="en-US" sz="2800" kern="100" dirty="0">
+              <a:effectLst/>
+              <a:latin typeface="+mj-lt"/>
+              <a:ea typeface="Calibri" panose="020F0502020204030204" pitchFamily="34" charset="0"/>
+              <a:cs typeface="Times New Roman" panose="02020603050405020304" pitchFamily="18" charset="0"/>
+            </a:endParaRPr>
+          </a:p>
+          <a:p>
+            <a:pPr lvl="1">
+              <a:spcAft>
+                <a:spcPts val="600"/>
+              </a:spcAft>
+            </a:pPr>
+            <a:r>
+              <a:rPr b="0" sz="1150">
+                <a:solidFill>
+                  <a:srgbClr val="334155"/>
+                </a:solidFill>
+              </a:rPr>
+              <a:t>• 1. Public Discovery: Parents discover Prime Learning via Google Maps or website, inspect batch timings, and view verified reviews.
+• 2. Free Trial Booking: Parents book a 3-Day Demo Class; system generates a printable Demo Pass with QR code.
+• 3. Lead Conversion CRM: Admin logs trial attendance, tracks student interest, and triggers personalized WhatsApp feedback.
+• 4. Student &amp; Parent Portals: Visual CBSE attendance health meter (&gt;75%), report cards, practice quizzes, and digital fee receipts.
+• 5. Teacher Tools: Camera QR scanner for attendance, batch gradebooks, and instant study material sharing.</a:t>
+            </a:r>
+          </a:p>
+        </p:txBody>
+      </p:sp>
       <mc:AlternateContent xmlns:mc="http://schemas.openxmlformats.org/markup-compatibility/2006" xmlns:p14="http://schemas.microsoft.com/office/powerpoint/2010/main">
         <mc:Choice Requires="p14">
           <p:contentPart p14:bwMode="auto" r:id="rId5">
@@ -9062,180 +7822,6 @@
           </p:pic>
         </mc:Fallback>
       </mc:AlternateContent>
-      <p:sp>
-        <p:nvSpPr>
-          <p:cNvPr id="15" name="Rounded Rectangle 14"/>
-          <p:cNvSpPr/>
-          <p:nvPr/>
-        </p:nvSpPr>
-        <p:spPr>
-          <a:xfrm>
-            <a:off x="457200" y="1234440"/>
-            <a:ext cx="4297680" cy="4663440"/>
-          </a:xfrm>
-          <a:prstGeom prst="roundRect">
-            <a:avLst/>
-          </a:prstGeom>
-          <a:solidFill>
-            <a:srgbClr val="F8FAFC"/>
-          </a:solidFill>
-          <a:ln w="12700">
-            <a:solidFill>
-              <a:srgbClr val="E2E8F0"/>
-            </a:solidFill>
-          </a:ln>
-        </p:spPr>
-        <p:style>
-          <a:lnRef idx="1">
-            <a:schemeClr val="accent1"/>
-          </a:lnRef>
-          <a:fillRef idx="3">
-            <a:schemeClr val="accent1"/>
-          </a:fillRef>
-          <a:effectRef idx="2">
-            <a:schemeClr val="accent1"/>
-          </a:effectRef>
-          <a:fontRef idx="minor">
-            <a:schemeClr val="lt1"/>
-          </a:fontRef>
-        </p:style>
-        <p:txBody>
-          <a:bodyPr rtlCol="0" anchor="ctr" wrap="square" lIns="164592" rIns="164592" tIns="146304" bIns="146304"/>
-          <a:lstStyle/>
-          <a:p>
-            <a:pPr algn="ctr">
-              <a:spcAft>
-                <a:spcPts val="600"/>
-              </a:spcAft>
-              <a:defRPr b="1" sz="1300">
-                <a:solidFill>
-                  <a:srgbClr val="0070C0"/>
-                </a:solidFill>
-              </a:defRPr>
-            </a:pPr>
-            <a:r>
-              <a:t>🏗️ Multi-Tier System Architecture</a:t>
-            </a:r>
-          </a:p>
-          <a:p>
-            <a:pPr>
-              <a:spcAft>
-                <a:spcPts val="400"/>
-              </a:spcAft>
-            </a:pPr>
-            <a:r>
-              <a:rPr b="1" sz="950">
-                <a:solidFill>
-                  <a:srgbClr val="0F172A"/>
-                </a:solidFill>
-              </a:rPr>
-              <a:t>• Layer 1: Discovery &amp; Acquisition: </a:t>
-            </a:r>
-            <a:r>
-              <a:rPr b="0" sz="950">
-                <a:solidFill>
-                  <a:srgbClr val="334155"/>
-                </a:solidFill>
-              </a:rPr>
-              <a:t>Public Marketing Site, Course &amp; Fee Catalog, Free Trial Booking Funnel, Local 3-Pack Google Search Simulator.</a:t>
-            </a:r>
-          </a:p>
-          <a:p>
-            <a:pPr>
-              <a:spcAft>
-                <a:spcPts val="400"/>
-              </a:spcAft>
-            </a:pPr>
-            <a:r>
-              <a:rPr b="1" sz="950">
-                <a:solidFill>
-                  <a:srgbClr val="0F172A"/>
-                </a:solidFill>
-              </a:rPr>
-              <a:t>• Layer 2: Local Marketing Engine: </a:t>
-            </a:r>
-            <a:r>
-              <a:rPr b="0" sz="950">
-                <a:solidFill>
-                  <a:srgbClr val="334155"/>
-                </a:solidFill>
-              </a:rPr>
-              <a:t>Marketing Studio for customizable flyers, Reception QR Standee generator, and WhatsApp broadcast campaigns.</a:t>
-            </a:r>
-          </a:p>
-          <a:p>
-            <a:pPr>
-              <a:spcAft>
-                <a:spcPts val="400"/>
-              </a:spcAft>
-            </a:pPr>
-            <a:r>
-              <a:rPr b="1" sz="950">
-                <a:solidFill>
-                  <a:srgbClr val="0F172A"/>
-                </a:solidFill>
-              </a:rPr>
-              <a:t>• Layer 3: Lead Conversion CRM: </a:t>
-            </a:r>
-            <a:r>
-              <a:rPr b="0" sz="950">
-                <a:solidFill>
-                  <a:srgbClr val="334155"/>
-                </a:solidFill>
-              </a:rPr>
-              <a:t>Trial Attendance Manager, Printable Demo Admit Passes with QR verification, 1-Click WhatsApp Parent Follow-ups.</a:t>
-            </a:r>
-          </a:p>
-          <a:p>
-            <a:pPr>
-              <a:spcAft>
-                <a:spcPts val="400"/>
-              </a:spcAft>
-            </a:pPr>
-            <a:r>
-              <a:rPr b="1" sz="950">
-                <a:solidFill>
-                  <a:srgbClr val="0F172A"/>
-                </a:solidFill>
-              </a:rPr>
-              <a:t>• Layer 4: Operational Role Portals: </a:t>
-            </a:r>
-            <a:r>
-              <a:rPr b="0" sz="950">
-                <a:solidFill>
-                  <a:srgbClr val="334155"/>
-                </a:solidFill>
-              </a:rPr>
-              <a:t>• Student: CBSE Attendance Health Meter, Doubt Desk
-• Teacher: Camera QR Scanner, Batch Gradebooks
-• Parent: PTM Slot Reservation, Razorpay UPI Fee Ledger</a:t>
-            </a:r>
-          </a:p>
-          <a:p>
-            <a:pPr>
-              <a:spcAft>
-                <a:spcPts val="400"/>
-              </a:spcAft>
-            </a:pPr>
-            <a:r>
-              <a:rPr b="1" sz="950">
-                <a:solidFill>
-                  <a:srgbClr val="0F172A"/>
-                </a:solidFill>
-              </a:rPr>
-              <a:t>• Layer 5: Persistence &amp; Core Services: </a:t>
-            </a:r>
-            <a:r>
-              <a:rPr b="0" sz="950">
-                <a:solidFill>
-                  <a:srgbClr val="334155"/>
-                </a:solidFill>
-              </a:rPr>
-              <a:t>Supabase DB, Firebase Auth, Google Gemini API, Razorpay Payment Gateway.</a:t>
-            </a:r>
-          </a:p>
-        </p:txBody>
-      </p:sp>
     </p:spTree>
     <p:extLst>
       <p:ext uri="{BB962C8B-B14F-4D97-AF65-F5344CB8AC3E}">
@@ -9471,6 +8057,167 @@
           </a:prstGeom>
         </p:spPr>
       </p:pic>
+      <p:sp>
+        <p:nvSpPr>
+          <p:cNvPr id="6" name="TextBox 5">
+            <a:extLst>
+              <a:ext uri="{FF2B5EF4-FFF2-40B4-BE49-F238E27FC236}">
+                <a16:creationId xmlns:a16="http://schemas.microsoft.com/office/drawing/2014/main" id="{C166FAC4-E627-209B-D9A4-20EC84D69C44}"/>
+              </a:ext>
+            </a:extLst>
+          </p:cNvPr>
+          <p:cNvSpPr txBox="1"/>
+          <p:nvPr/>
+        </p:nvSpPr>
+        <p:spPr>
+          <a:xfrm>
+            <a:off x="731520" y="1234440"/>
+            <a:ext cx="7680960" cy="4480560"/>
+          </a:xfrm>
+          <a:prstGeom prst="rect">
+            <a:avLst/>
+          </a:prstGeom>
+          <a:noFill/>
+        </p:spPr>
+        <p:txBody>
+          <a:bodyPr wrap="square">
+            <a:spAutoFit/>
+          </a:bodyPr>
+          <a:lstStyle/>
+          <a:p>
+            <a:pPr marL="0" marR="0" algn="just" fontAlgn="base">
+              <a:lnSpc>
+                <a:spcPct val="107000"/>
+              </a:lnSpc>
+              <a:spcBef>
+                <a:spcPts val="0"/>
+              </a:spcBef>
+              <a:spcAft>
+                <a:spcPts val="200"/>
+              </a:spcAft>
+            </a:pPr>
+            <a:r>
+              <a:rPr b="1" sz="1400">
+                <a:solidFill>
+                  <a:srgbClr val="003366"/>
+                </a:solidFill>
+              </a:rPr>
+              <a:t>Weeks 1–3: Project Inception &amp; Field Survey</a:t>
+            </a:r>
+            <a:endParaRPr lang="en-US" sz="2800" kern="100" dirty="0">
+              <a:effectLst/>
+              <a:latin typeface="+mj-lt"/>
+              <a:ea typeface="Calibri" panose="020F0502020204030204" pitchFamily="34" charset="0"/>
+              <a:cs typeface="Times New Roman" panose="02020603050405020304" pitchFamily="18" charset="0"/>
+            </a:endParaRPr>
+          </a:p>
+          <a:p>
+            <a:pPr lvl="1">
+              <a:spcAft>
+                <a:spcPts val="800"/>
+              </a:spcAft>
+            </a:pPr>
+            <a:r>
+              <a:rPr b="0" sz="1200">
+                <a:solidFill>
+                  <a:srgbClr val="334155"/>
+                </a:solidFill>
+              </a:rPr>
+              <a:t>Visited Sector-22B coaching center, interviewed Praveen Sir and Rashmi Ma'am, analyzed existing manual record keeping, mapped out core visibility challenges, and aligned with UN SDGs 4, 8 &amp; 9.</a:t>
+            </a:r>
+          </a:p>
+          <a:p>
+            <a:pPr>
+              <a:spcAft>
+                <a:spcPts val="200"/>
+              </a:spcAft>
+            </a:pPr>
+            <a:r>
+              <a:rPr b="1" sz="1400">
+                <a:solidFill>
+                  <a:srgbClr val="003366"/>
+                </a:solidFill>
+              </a:rPr>
+              <a:t>Weeks 4–7: Platform Design &amp; Local Search Setup</a:t>
+            </a:r>
+          </a:p>
+          <a:p>
+            <a:pPr lvl="1">
+              <a:spcAft>
+                <a:spcPts val="800"/>
+              </a:spcAft>
+            </a:pPr>
+            <a:r>
+              <a:rPr b="0" sz="1200">
+                <a:solidFill>
+                  <a:srgbClr val="334155"/>
+                </a:solidFill>
+              </a:rPr>
+              <a:t>Developed core website with course details, batch timings, and transparent fee tables. Configured Google Business Profile location and built the 1-click Google review helper for parents.</a:t>
+            </a:r>
+          </a:p>
+          <a:p>
+            <a:pPr>
+              <a:spcAft>
+                <a:spcPts val="200"/>
+              </a:spcAft>
+            </a:pPr>
+            <a:r>
+              <a:rPr b="1" sz="1400">
+                <a:solidFill>
+                  <a:srgbClr val="003366"/>
+                </a:solidFill>
+              </a:rPr>
+              <a:t>Weeks 8–11: Trial Class CRM &amp; Marketing Collateral</a:t>
+            </a:r>
+          </a:p>
+          <a:p>
+            <a:pPr lvl="1">
+              <a:spcAft>
+                <a:spcPts val="800"/>
+              </a:spcAft>
+            </a:pPr>
+            <a:r>
+              <a:rPr b="0" sz="1200">
+                <a:solidFill>
+                  <a:srgbClr val="334155"/>
+                </a:solidFill>
+              </a:rPr>
+              <a:t>Implemented the 3-day demo registration pipeline, printable trial admit cards, automated WhatsApp parent follow-ups, and Marketing Studio for printable society notice board flyers.</a:t>
+            </a:r>
+          </a:p>
+          <a:p>
+            <a:pPr>
+              <a:spcAft>
+                <a:spcPts val="200"/>
+              </a:spcAft>
+            </a:pPr>
+            <a:r>
+              <a:rPr b="1" sz="1400">
+                <a:solidFill>
+                  <a:srgbClr val="003366"/>
+                </a:solidFill>
+              </a:rPr>
+              <a:t>Weeks 12–14: Pilot Testing, Verification &amp; Final Report</a:t>
+            </a:r>
+          </a:p>
+          <a:p>
+            <a:pPr lvl="1">
+              <a:spcAft>
+                <a:spcPts val="400"/>
+              </a:spcAft>
+            </a:pPr>
+            <a:r>
+              <a:rPr b="0" sz="1200">
+                <a:solidFill>
+                  <a:srgbClr val="334155"/>
+                </a:solidFill>
+              </a:rPr>
+              <a:t>Conducted pilot with 14 student inquiries (66.7% trial conversion), trained teachers on dashboard use, compiled university documentation, and prepared final presentation.</a:t>
+            </a:r>
+          </a:p>
+        </p:txBody>
+      </p:sp>
       <mc:AlternateContent xmlns:mc="http://schemas.openxmlformats.org/markup-compatibility/2006" xmlns:p14="http://schemas.microsoft.com/office/powerpoint/2010/main">
         <mc:Choice Requires="p14">
           <p:contentPart p14:bwMode="auto" r:id="rId5">
@@ -9522,282 +8269,6 @@
           </p:pic>
         </mc:Fallback>
       </mc:AlternateContent>
-      <p:sp>
-        <p:nvSpPr>
-          <p:cNvPr id="12" name="Rounded Rectangle 11"/>
-          <p:cNvSpPr/>
-          <p:nvPr/>
-        </p:nvSpPr>
-        <p:spPr>
-          <a:xfrm>
-            <a:off x="457200" y="1234440"/>
-            <a:ext cx="8229600" cy="1051560"/>
-          </a:xfrm>
-          <a:prstGeom prst="roundRect">
-            <a:avLst/>
-          </a:prstGeom>
-          <a:solidFill>
-            <a:srgbClr val="F0F7FF"/>
-          </a:solidFill>
-          <a:ln w="12700">
-            <a:solidFill>
-              <a:srgbClr val="BADCFF"/>
-            </a:solidFill>
-          </a:ln>
-        </p:spPr>
-        <p:style>
-          <a:lnRef idx="1">
-            <a:schemeClr val="accent1"/>
-          </a:lnRef>
-          <a:fillRef idx="3">
-            <a:schemeClr val="accent1"/>
-          </a:fillRef>
-          <a:effectRef idx="2">
-            <a:schemeClr val="accent1"/>
-          </a:effectRef>
-          <a:fontRef idx="minor">
-            <a:schemeClr val="lt1"/>
-          </a:fontRef>
-        </p:style>
-        <p:txBody>
-          <a:bodyPr rtlCol="0" anchor="ctr" wrap="square" lIns="164592" rIns="164592" tIns="146304" bIns="146304"/>
-          <a:lstStyle/>
-          <a:p>
-            <a:pPr algn="ctr">
-              <a:spcAft>
-                <a:spcPts val="600"/>
-              </a:spcAft>
-              <a:defRPr b="1" sz="1150">
-                <a:solidFill>
-                  <a:srgbClr val="0070C0"/>
-                </a:solidFill>
-              </a:defRPr>
-            </a:pPr>
-            <a:r>
-              <a:t>Weeks 1–3: Project Inception &amp; Field Survey</a:t>
-            </a:r>
-          </a:p>
-          <a:p>
-            <a:pPr>
-              <a:defRPr sz="1000">
-                <a:solidFill>
-                  <a:srgbClr val="334155"/>
-                </a:solidFill>
-              </a:defRPr>
-            </a:pPr>
-            <a:r>
-              <a:t>Onsite field visits to Sector-22B Gurgaon; interviews with Praveen Sir and Rashmi Ma'am; identified offline word-of-mouth bottleneck, established baseline metrics, and mapped UN SDGs 4, 8 &amp; 9.</a:t>
-            </a:r>
-          </a:p>
-        </p:txBody>
-      </p:sp>
-      <p:sp>
-        <p:nvSpPr>
-          <p:cNvPr id="13" name="Rounded Rectangle 12"/>
-          <p:cNvSpPr/>
-          <p:nvPr/>
-        </p:nvSpPr>
-        <p:spPr>
-          <a:xfrm>
-            <a:off x="457200" y="2395728"/>
-            <a:ext cx="8229600" cy="1051560"/>
-          </a:xfrm>
-          <a:prstGeom prst="roundRect">
-            <a:avLst/>
-          </a:prstGeom>
-          <a:solidFill>
-            <a:srgbClr val="F8FAFC"/>
-          </a:solidFill>
-          <a:ln w="12700">
-            <a:solidFill>
-              <a:srgbClr val="E2E8F0"/>
-            </a:solidFill>
-          </a:ln>
-        </p:spPr>
-        <p:style>
-          <a:lnRef idx="1">
-            <a:schemeClr val="accent1"/>
-          </a:lnRef>
-          <a:fillRef idx="3">
-            <a:schemeClr val="accent1"/>
-          </a:fillRef>
-          <a:effectRef idx="2">
-            <a:schemeClr val="accent1"/>
-          </a:effectRef>
-          <a:fontRef idx="minor">
-            <a:schemeClr val="lt1"/>
-          </a:fontRef>
-        </p:style>
-        <p:txBody>
-          <a:bodyPr rtlCol="0" anchor="ctr" wrap="square" lIns="164592" rIns="164592" tIns="146304" bIns="146304"/>
-          <a:lstStyle/>
-          <a:p>
-            <a:pPr algn="ctr">
-              <a:spcAft>
-                <a:spcPts val="600"/>
-              </a:spcAft>
-              <a:defRPr b="1" sz="1150">
-                <a:solidFill>
-                  <a:srgbClr val="0F172A"/>
-                </a:solidFill>
-              </a:defRPr>
-            </a:pPr>
-            <a:r>
-              <a:t>Weeks 4–7: Web Platform &amp; Local SEO Identity</a:t>
-            </a:r>
-          </a:p>
-          <a:p>
-            <a:pPr>
-              <a:defRPr sz="1000">
-                <a:solidFill>
-                  <a:srgbClr val="334155"/>
-                </a:solidFill>
-              </a:defRPr>
-            </a:pPr>
-            <a:r>
-              <a:t>Architected Next.js 15 App Router platform with course catalog, teacher credentials, transparent fees, Google Business Profile optimization, and 1-Click Parent Review Assistant.</a:t>
-            </a:r>
-          </a:p>
-        </p:txBody>
-      </p:sp>
-      <p:sp>
-        <p:nvSpPr>
-          <p:cNvPr id="14" name="Rounded Rectangle 13"/>
-          <p:cNvSpPr/>
-          <p:nvPr/>
-        </p:nvSpPr>
-        <p:spPr>
-          <a:xfrm>
-            <a:off x="457200" y="3557016"/>
-            <a:ext cx="8229600" cy="1051560"/>
-          </a:xfrm>
-          <a:prstGeom prst="roundRect">
-            <a:avLst/>
-          </a:prstGeom>
-          <a:solidFill>
-            <a:srgbClr val="F8FAFC"/>
-          </a:solidFill>
-          <a:ln w="12700">
-            <a:solidFill>
-              <a:srgbClr val="E2E8F0"/>
-            </a:solidFill>
-          </a:ln>
-        </p:spPr>
-        <p:style>
-          <a:lnRef idx="1">
-            <a:schemeClr val="accent1"/>
-          </a:lnRef>
-          <a:fillRef idx="3">
-            <a:schemeClr val="accent1"/>
-          </a:fillRef>
-          <a:effectRef idx="2">
-            <a:schemeClr val="accent1"/>
-          </a:effectRef>
-          <a:fontRef idx="minor">
-            <a:schemeClr val="lt1"/>
-          </a:fontRef>
-        </p:style>
-        <p:txBody>
-          <a:bodyPr rtlCol="0" anchor="ctr" wrap="square" lIns="164592" rIns="164592" tIns="146304" bIns="146304"/>
-          <a:lstStyle/>
-          <a:p>
-            <a:pPr algn="ctr">
-              <a:spcAft>
-                <a:spcPts val="600"/>
-              </a:spcAft>
-              <a:defRPr b="1" sz="1150">
-                <a:solidFill>
-                  <a:srgbClr val="0F172A"/>
-                </a:solidFill>
-              </a:defRPr>
-            </a:pPr>
-            <a:r>
-              <a:t>Weeks 8–11: Trial CRM, Marketing Studio &amp; Portals</a:t>
-            </a:r>
-          </a:p>
-          <a:p>
-            <a:pPr>
-              <a:defRPr sz="1000">
-                <a:solidFill>
-                  <a:srgbClr val="334155"/>
-                </a:solidFill>
-              </a:defRPr>
-            </a:pPr>
-            <a:r>
-              <a:t>Developed 3-Day Free Trial conversion pipeline, printable student demo passes, automated WhatsApp follow-ups, and Marketing Studio for customizable flyers and reception QR standees.</a:t>
-            </a:r>
-          </a:p>
-        </p:txBody>
-      </p:sp>
-      <p:sp>
-        <p:nvSpPr>
-          <p:cNvPr id="15" name="Rounded Rectangle 14"/>
-          <p:cNvSpPr/>
-          <p:nvPr/>
-        </p:nvSpPr>
-        <p:spPr>
-          <a:xfrm>
-            <a:off x="457200" y="4718304"/>
-            <a:ext cx="8229600" cy="1051560"/>
-          </a:xfrm>
-          <a:prstGeom prst="roundRect">
-            <a:avLst/>
-          </a:prstGeom>
-          <a:solidFill>
-            <a:srgbClr val="ECFDF5"/>
-          </a:solidFill>
-          <a:ln w="12700">
-            <a:solidFill>
-              <a:srgbClr val="A7F3D0"/>
-            </a:solidFill>
-          </a:ln>
-        </p:spPr>
-        <p:style>
-          <a:lnRef idx="1">
-            <a:schemeClr val="accent1"/>
-          </a:lnRef>
-          <a:fillRef idx="3">
-            <a:schemeClr val="accent1"/>
-          </a:fillRef>
-          <a:effectRef idx="2">
-            <a:schemeClr val="accent1"/>
-          </a:effectRef>
-          <a:fontRef idx="minor">
-            <a:schemeClr val="lt1"/>
-          </a:fontRef>
-        </p:style>
-        <p:txBody>
-          <a:bodyPr rtlCol="0" anchor="ctr" wrap="square" lIns="164592" rIns="164592" tIns="146304" bIns="146304"/>
-          <a:lstStyle/>
-          <a:p>
-            <a:pPr algn="ctr">
-              <a:spcAft>
-                <a:spcPts val="600"/>
-              </a:spcAft>
-              <a:defRPr b="1" sz="1150">
-                <a:solidFill>
-                  <a:srgbClr val="059669"/>
-                </a:solidFill>
-              </a:defRPr>
-            </a:pPr>
-            <a:r>
-              <a:t>Weeks 12–14: Pilot Rollout, Testing &amp; Evaluation</a:t>
-            </a:r>
-          </a:p>
-          <a:p>
-            <a:pPr>
-              <a:defRPr sz="1000">
-                <a:solidFill>
-                  <a:srgbClr val="334155"/>
-                </a:solidFill>
-              </a:defRPr>
-            </a:pPr>
-            <a:r>
-              <a:t>Conducted live pilot with 14 prospective students; achieved 66.7% trial conversion; finalized academic report, repository documentation, and completed final faculty presentation.</a:t>
-            </a:r>
-          </a:p>
-        </p:txBody>
-      </p:sp>
     </p:spTree>
     <p:extLst>
       <p:ext uri="{BB962C8B-B14F-4D97-AF65-F5344CB8AC3E}">
@@ -10005,344 +8476,107 @@
       </p:pic>
       <p:sp>
         <p:nvSpPr>
-          <p:cNvPr id="10" name="Rounded Rectangle 9"/>
-          <p:cNvSpPr/>
+          <p:cNvPr id="6" name="TextBox 5">
+            <a:extLst>
+              <a:ext uri="{FF2B5EF4-FFF2-40B4-BE49-F238E27FC236}">
+                <a16:creationId xmlns:a16="http://schemas.microsoft.com/office/drawing/2014/main" id="{AE24D516-77C6-C96A-5F77-D099623448D8}"/>
+              </a:ext>
+            </a:extLst>
+          </p:cNvPr>
+          <p:cNvSpPr txBox="1"/>
           <p:nvPr/>
         </p:nvSpPr>
         <p:spPr>
           <a:xfrm>
-            <a:off x="457200" y="1234440"/>
-            <a:ext cx="3977639" cy="4663440"/>
+            <a:off x="731520" y="1234440"/>
+            <a:ext cx="7680960" cy="4480560"/>
           </a:xfrm>
-          <a:prstGeom prst="roundRect">
+          <a:prstGeom prst="rect">
             <a:avLst/>
           </a:prstGeom>
-          <a:solidFill>
-            <a:srgbClr val="F8FAFC"/>
-          </a:solidFill>
-          <a:ln w="12700">
-            <a:solidFill>
-              <a:srgbClr val="E2E8F0"/>
-            </a:solidFill>
-          </a:ln>
+          <a:noFill/>
         </p:spPr>
-        <p:style>
-          <a:lnRef idx="1">
-            <a:schemeClr val="accent1"/>
-          </a:lnRef>
-          <a:fillRef idx="3">
-            <a:schemeClr val="accent1"/>
-          </a:fillRef>
-          <a:effectRef idx="2">
-            <a:schemeClr val="accent1"/>
-          </a:effectRef>
-          <a:fontRef idx="minor">
-            <a:schemeClr val="lt1"/>
-          </a:fontRef>
-        </p:style>
-        <p:txBody>
-          <a:bodyPr rtlCol="0" anchor="ctr" wrap="square" lIns="164592" rIns="164592" tIns="146304" bIns="146304"/>
+        <p:txBody>
+          <a:bodyPr wrap="square">
+            <a:spAutoFit/>
+          </a:bodyPr>
           <a:lstStyle/>
           <a:p>
-            <a:pPr algn="ctr">
+            <a:pPr marL="0" marR="0" algn="just" fontAlgn="base">
+              <a:lnSpc>
+                <a:spcPct val="107000"/>
+              </a:lnSpc>
+              <a:spcBef>
+                <a:spcPts val="0"/>
+              </a:spcBef>
               <a:spcAft>
-                <a:spcPts val="600"/>
+                <a:spcPts val="200"/>
               </a:spcAft>
-              <a:defRPr b="1" sz="1300">
-                <a:solidFill>
-                  <a:srgbClr val="0070C0"/>
-                </a:solidFill>
-              </a:defRPr>
             </a:pPr>
             <a:r>
-              <a:t>📊 Data Entities &amp; Schemas Managed</a:t>
+              <a:rPr b="1" sz="1450">
+                <a:solidFill>
+                  <a:srgbClr val="003366"/>
+                </a:solidFill>
+              </a:rPr>
+              <a:t>Data Handled by the Platform</a:t>
+            </a:r>
+            <a:endParaRPr lang="en-US" sz="2800" kern="100" dirty="0">
+              <a:effectLst/>
+              <a:latin typeface="+mj-lt"/>
+              <a:ea typeface="Calibri" panose="020F0502020204030204" pitchFamily="34" charset="0"/>
+              <a:cs typeface="Times New Roman" panose="02020603050405020304" pitchFamily="18" charset="0"/>
+            </a:endParaRPr>
+          </a:p>
+          <a:p>
+            <a:pPr lvl="1">
+              <a:spcAft>
+                <a:spcPts val="1000"/>
+              </a:spcAft>
+            </a:pPr>
+            <a:r>
+              <a:rPr b="0" sz="1200">
+                <a:solidFill>
+                  <a:srgbClr val="334155"/>
+                </a:solidFill>
+              </a:rPr>
+              <a:t>• Student &amp; Batch Records: Student profiles, parent phone numbers, enrolled grades (Class 1 to 12), batch timings, and classroom allocations.
+• Lead &amp; Trial Data: Inquiries, 3-Day demo registrations, trial attendance status (Attended / Absent), and parent feedback notes.
+• Academic Logs: Daily attendance records, test marks, percentage history, and PTM slot reservations.
+• Educational Resources: Uploaded PDF notes, CBSE syllabus revision sheets, and practice quiz questions.</a:t>
             </a:r>
           </a:p>
           <a:p>
             <a:pPr>
+              <a:spcAft>
+                <a:spcPts val="200"/>
+              </a:spcAft>
+            </a:pPr>
+            <a:r>
+              <a:rPr b="1" sz="1450">
+                <a:solidFill>
+                  <a:srgbClr val="003366"/>
+                </a:solidFill>
+              </a:rPr>
+              <a:t>Resources &amp; Infrastructure Used</a:t>
+            </a:r>
+          </a:p>
+          <a:p>
+            <a:pPr lvl="1">
               <a:spcAft>
                 <a:spcPts val="400"/>
               </a:spcAft>
             </a:pPr>
             <a:r>
-              <a:rPr b="1" sz="1000">
-                <a:solidFill>
-                  <a:srgbClr val="0F172A"/>
+              <a:rPr b="0" sz="1200">
+                <a:solidFill>
+                  <a:srgbClr val="334155"/>
                 </a:solidFill>
               </a:rPr>
-              <a:t>• Lead &amp; Trial CRM Pipeline: </a:t>
-            </a:r>
-            <a:r>
-              <a:rPr b="0" sz="1000">
-                <a:solidFill>
-                  <a:srgbClr val="334155"/>
-                </a:solidFill>
-              </a:rPr>
-              <a:t>Inquiries (New, Contacted, Enrolled), 3-Day Demo Registrations, Attendance Status (Attended, Absent), Parent Feedback Logs.</a:t>
-            </a:r>
-          </a:p>
-          <a:p>
-            <a:pPr>
-              <a:spcAft>
-                <a:spcPts val="400"/>
-              </a:spcAft>
-            </a:pPr>
-            <a:r>
-              <a:rPr b="1" sz="1000">
-                <a:solidFill>
-                  <a:srgbClr val="0F172A"/>
-                </a:solidFill>
-              </a:rPr>
-              <a:t>• Academic &amp; Batch Records: </a:t>
-            </a:r>
-            <a:r>
-              <a:rPr b="0" sz="1000">
-                <a:solidFill>
-                  <a:srgbClr val="334155"/>
-                </a:solidFill>
-              </a:rPr>
-              <a:t>Active student profiles, teacher master records, subject batches, weekly test marks, and attendance check-in histories.</a:t>
-            </a:r>
-          </a:p>
-          <a:p>
-            <a:pPr>
-              <a:spcAft>
-                <a:spcPts val="400"/>
-              </a:spcAft>
-            </a:pPr>
-            <a:r>
-              <a:rPr b="1" sz="1000">
-                <a:solidFill>
-                  <a:srgbClr val="0F172A"/>
-                </a:solidFill>
-              </a:rPr>
-              <a:t>• Communication &amp; Notices: </a:t>
-            </a:r>
-            <a:r>
-              <a:rPr b="0" sz="1000">
-                <a:solidFill>
-                  <a:srgbClr val="334155"/>
-                </a:solidFill>
-              </a:rPr>
-              <a:t>Automated absentee alerts, weekend PTM reservations, batch broadcast notices, and customized WhatsApp messages.</a:t>
-            </a:r>
-          </a:p>
-          <a:p>
-            <a:pPr>
-              <a:spcAft>
-                <a:spcPts val="400"/>
-              </a:spcAft>
-            </a:pPr>
-            <a:r>
-              <a:rPr b="1" sz="1000">
-                <a:solidFill>
-                  <a:srgbClr val="0F172A"/>
-                </a:solidFill>
-              </a:rPr>
-              <a:t>• Financial Transactions: </a:t>
-            </a:r>
-            <a:r>
-              <a:rPr b="0" sz="1000">
-                <a:solidFill>
-                  <a:srgbClr val="334155"/>
-                </a:solidFill>
-              </a:rPr>
-              <a:t>Tuition fee ledger, monthly dues tracking, digital receipt generation, and Razorpay payment records.</a:t>
-            </a:r>
-          </a:p>
-          <a:p>
-            <a:pPr>
-              <a:spcAft>
-                <a:spcPts val="400"/>
-              </a:spcAft>
-            </a:pPr>
-            <a:r>
-              <a:rPr b="1" sz="1000">
-                <a:solidFill>
-                  <a:srgbClr val="0F172A"/>
-                </a:solidFill>
-              </a:rPr>
-              <a:t>• Educational Content Vault: </a:t>
-            </a:r>
-            <a:r>
-              <a:rPr b="0" sz="1000">
-                <a:solidFill>
-                  <a:srgbClr val="334155"/>
-                </a:solidFill>
-              </a:rPr>
-              <a:t>CBSE practice question banks, NCERT study material PDFs, curated video lessons, and AI doubt resolution transcripts.</a:t>
-            </a:r>
-          </a:p>
-        </p:txBody>
-      </p:sp>
-      <p:sp>
-        <p:nvSpPr>
-          <p:cNvPr id="11" name="Rounded Rectangle 10"/>
-          <p:cNvSpPr/>
-          <p:nvPr/>
-        </p:nvSpPr>
-        <p:spPr>
-          <a:xfrm>
-            <a:off x="4709160" y="1234440"/>
-            <a:ext cx="3977639" cy="4663440"/>
-          </a:xfrm>
-          <a:prstGeom prst="roundRect">
-            <a:avLst/>
-          </a:prstGeom>
-          <a:solidFill>
-            <a:srgbClr val="F8FAFC"/>
-          </a:solidFill>
-          <a:ln w="12700">
-            <a:solidFill>
-              <a:srgbClr val="E2E8F0"/>
-            </a:solidFill>
-          </a:ln>
-        </p:spPr>
-        <p:style>
-          <a:lnRef idx="1">
-            <a:schemeClr val="accent1"/>
-          </a:lnRef>
-          <a:fillRef idx="3">
-            <a:schemeClr val="accent1"/>
-          </a:fillRef>
-          <a:effectRef idx="2">
-            <a:schemeClr val="accent1"/>
-          </a:effectRef>
-          <a:fontRef idx="minor">
-            <a:schemeClr val="lt1"/>
-          </a:fontRef>
-        </p:style>
-        <p:txBody>
-          <a:bodyPr rtlCol="0" anchor="ctr" wrap="square" lIns="164592" rIns="164592" tIns="146304" bIns="146304"/>
-          <a:lstStyle/>
-          <a:p>
-            <a:pPr algn="ctr">
-              <a:spcAft>
-                <a:spcPts val="600"/>
-              </a:spcAft>
-              <a:defRPr b="1" sz="1300">
-                <a:solidFill>
-                  <a:srgbClr val="0F172A"/>
-                </a:solidFill>
-              </a:defRPr>
-            </a:pPr>
-            <a:r>
-              <a:t>🛠️ Technical, Cloud &amp; Field Resources</a:t>
-            </a:r>
-          </a:p>
-          <a:p>
-            <a:pPr>
-              <a:spcAft>
-                <a:spcPts val="400"/>
-              </a:spcAft>
-            </a:pPr>
-            <a:r>
-              <a:rPr b="1" sz="1000">
-                <a:solidFill>
-                  <a:srgbClr val="0F172A"/>
-                </a:solidFill>
-              </a:rPr>
-              <a:t>• Zero-Cost Cloud Infrastructure: </a:t>
-            </a:r>
-            <a:r>
-              <a:rPr b="0" sz="1000">
-                <a:solidFill>
-                  <a:srgbClr val="334155"/>
-                </a:solidFill>
-              </a:rPr>
-              <a:t>Vercel Edge Network for high-speed SSR web hosting; Supabase PostgreSQL cloud database; Firebase Authentication.</a:t>
-            </a:r>
-          </a:p>
-          <a:p>
-            <a:pPr>
-              <a:spcAft>
-                <a:spcPts val="400"/>
-              </a:spcAft>
-            </a:pPr>
-            <a:r>
-              <a:rPr b="1" sz="1000">
-                <a:solidFill>
-                  <a:srgbClr val="0F172A"/>
-                </a:solidFill>
-              </a:rPr>
-              <a:t>• AI Engine Infrastructure: </a:t>
-            </a:r>
-            <a:r>
-              <a:rPr b="0" sz="1000">
-                <a:solidFill>
-                  <a:srgbClr val="334155"/>
-                </a:solidFill>
-              </a:rPr>
-              <a:t>Google Gemini API integrated securely via runtime server routes for 24/7 doubt resolution.</a:t>
-            </a:r>
-          </a:p>
-          <a:p>
-            <a:pPr>
-              <a:spcAft>
-                <a:spcPts val="400"/>
-              </a:spcAft>
-            </a:pPr>
-            <a:r>
-              <a:rPr b="1" sz="1000">
-                <a:solidFill>
-                  <a:srgbClr val="0F172A"/>
-                </a:solidFill>
-              </a:rPr>
-              <a:t>• Responsive Multi-Device Support: </a:t>
-            </a:r>
-            <a:r>
-              <a:rPr b="0" sz="1000">
-                <a:solidFill>
-                  <a:srgbClr val="334155"/>
-                </a:solidFill>
-              </a:rPr>
-              <a:t>Fully responsive client interfaces compatible across Android/iOS mobile devices, tablets, and desktop workstations.</a:t>
-            </a:r>
-          </a:p>
-          <a:p>
-            <a:pPr>
-              <a:spcAft>
-                <a:spcPts val="400"/>
-              </a:spcAft>
-            </a:pPr>
-            <a:r>
-              <a:rPr b="1" sz="1000">
-                <a:solidFill>
-                  <a:srgbClr val="0F172A"/>
-                </a:solidFill>
-              </a:rPr>
-              <a:t>• Physical Marketing Collateral: </a:t>
-            </a:r>
-            <a:r>
-              <a:rPr b="0" sz="1000">
-                <a:solidFill>
-                  <a:srgbClr val="334155"/>
-                </a:solidFill>
-              </a:rPr>
-              <a:t>Browser-printable A4 admission flyers, reception desk QR standees, and society bulletin board notice posters.</a:t>
-            </a:r>
-          </a:p>
-          <a:p>
-            <a:pPr>
-              <a:spcAft>
-                <a:spcPts val="400"/>
-              </a:spcAft>
-            </a:pPr>
-            <a:r>
-              <a:rPr b="1" sz="1000">
-                <a:solidFill>
-                  <a:srgbClr val="0F172A"/>
-                </a:solidFill>
-              </a:rPr>
-              <a:t>• Local Citation Assets: </a:t>
-            </a:r>
-            <a:r>
-              <a:rPr b="0" sz="1000">
-                <a:solidFill>
-                  <a:srgbClr val="334155"/>
-                </a:solidFill>
-              </a:rPr>
-              <a:t>Google Maps verified place pin, standardized NAP citations across local directories, and WhatsApp Business community link.</a:t>
+              <a:t>• Cloud Services: Vercel Edge hosting, Supabase PostgreSQL database, and Firebase Authentication (all within 100% free tiers with zero cost to teachers).
+• Artificial Intelligence: Google Gemini API for 24/7 syllabus-aligned doubt resolution.
+• Physical Marketing Materials: Printable A4 demo flyers, reception desk QR standees, and society bulletin board posters.
+• Device Compatibility: Tested and fully responsive across mobile phones (Android/iOS) and desktop browsers.</a:t>
             </a:r>
           </a:p>
         </p:txBody>

--- a/Community_Service_Presentation.pptx
+++ b/Community_Service_Presentation.pptx
@@ -456,7 +456,7 @@
           <a:p>
             <a:fld id="{42668431-CD35-4516-818D-B41B2C4843CF}" type="datetimeFigureOut">
               <a:rPr lang="en-IN" smtClean="0"/>
-              <a:t>14-08-2026</a:t>
+              <a:t>13/09/26</a:t>
             </a:fld>
             <a:endParaRPr lang="en-IN"/>
           </a:p>
@@ -1809,7 +1809,7 @@
           <a:p>
             <a:fld id="{F4AA89A1-F17A-4D3D-AC08-D16056C16514}" type="datetimeFigureOut">
               <a:rPr lang="en-IN" smtClean="0"/>
-              <a:t>14-08-2026</a:t>
+              <a:t>13/09/26</a:t>
             </a:fld>
             <a:endParaRPr lang="en-IN"/>
           </a:p>
@@ -1979,7 +1979,7 @@
           <a:p>
             <a:fld id="{F4AA89A1-F17A-4D3D-AC08-D16056C16514}" type="datetimeFigureOut">
               <a:rPr lang="en-IN" smtClean="0"/>
-              <a:t>14-08-2026</a:t>
+              <a:t>13/09/26</a:t>
             </a:fld>
             <a:endParaRPr lang="en-IN"/>
           </a:p>
@@ -2159,7 +2159,7 @@
           <a:p>
             <a:fld id="{F4AA89A1-F17A-4D3D-AC08-D16056C16514}" type="datetimeFigureOut">
               <a:rPr lang="en-IN" smtClean="0"/>
-              <a:t>14-08-2026</a:t>
+              <a:t>13/09/26</a:t>
             </a:fld>
             <a:endParaRPr lang="en-IN"/>
           </a:p>
@@ -2329,7 +2329,7 @@
           <a:p>
             <a:fld id="{F4AA89A1-F17A-4D3D-AC08-D16056C16514}" type="datetimeFigureOut">
               <a:rPr lang="en-IN" smtClean="0"/>
-              <a:t>14-08-2026</a:t>
+              <a:t>13/09/26</a:t>
             </a:fld>
             <a:endParaRPr lang="en-IN"/>
           </a:p>
@@ -2575,7 +2575,7 @@
           <a:p>
             <a:fld id="{F4AA89A1-F17A-4D3D-AC08-D16056C16514}" type="datetimeFigureOut">
               <a:rPr lang="en-IN" smtClean="0"/>
-              <a:t>14-08-2026</a:t>
+              <a:t>13/09/26</a:t>
             </a:fld>
             <a:endParaRPr lang="en-IN"/>
           </a:p>
@@ -2863,7 +2863,7 @@
           <a:p>
             <a:fld id="{F4AA89A1-F17A-4D3D-AC08-D16056C16514}" type="datetimeFigureOut">
               <a:rPr lang="en-IN" smtClean="0"/>
-              <a:t>14-08-2026</a:t>
+              <a:t>13/09/26</a:t>
             </a:fld>
             <a:endParaRPr lang="en-IN"/>
           </a:p>
@@ -3285,7 +3285,7 @@
           <a:p>
             <a:fld id="{F4AA89A1-F17A-4D3D-AC08-D16056C16514}" type="datetimeFigureOut">
               <a:rPr lang="en-IN" smtClean="0"/>
-              <a:t>14-08-2026</a:t>
+              <a:t>13/09/26</a:t>
             </a:fld>
             <a:endParaRPr lang="en-IN"/>
           </a:p>
@@ -3403,7 +3403,7 @@
           <a:p>
             <a:fld id="{F4AA89A1-F17A-4D3D-AC08-D16056C16514}" type="datetimeFigureOut">
               <a:rPr lang="en-IN" smtClean="0"/>
-              <a:t>14-08-2026</a:t>
+              <a:t>13/09/26</a:t>
             </a:fld>
             <a:endParaRPr lang="en-IN"/>
           </a:p>
@@ -3498,7 +3498,7 @@
           <a:p>
             <a:fld id="{F4AA89A1-F17A-4D3D-AC08-D16056C16514}" type="datetimeFigureOut">
               <a:rPr lang="en-IN" smtClean="0"/>
-              <a:t>14-08-2026</a:t>
+              <a:t>13/09/26</a:t>
             </a:fld>
             <a:endParaRPr lang="en-IN"/>
           </a:p>
@@ -3775,7 +3775,7 @@
           <a:p>
             <a:fld id="{F4AA89A1-F17A-4D3D-AC08-D16056C16514}" type="datetimeFigureOut">
               <a:rPr lang="en-IN" smtClean="0"/>
-              <a:t>14-08-2026</a:t>
+              <a:t>13/09/26</a:t>
             </a:fld>
             <a:endParaRPr lang="en-IN"/>
           </a:p>
@@ -4028,7 +4028,7 @@
           <a:p>
             <a:fld id="{F4AA89A1-F17A-4D3D-AC08-D16056C16514}" type="datetimeFigureOut">
               <a:rPr lang="en-IN" smtClean="0"/>
-              <a:t>14-08-2026</a:t>
+              <a:t>13/09/26</a:t>
             </a:fld>
             <a:endParaRPr lang="en-IN"/>
           </a:p>
@@ -4241,7 +4241,7 @@
           <a:p>
             <a:fld id="{F4AA89A1-F17A-4D3D-AC08-D16056C16514}" type="datetimeFigureOut">
               <a:rPr lang="en-IN" smtClean="0"/>
-              <a:t>14-08-2026</a:t>
+              <a:t>13/09/26</a:t>
             </a:fld>
             <a:endParaRPr lang="en-IN"/>
           </a:p>
@@ -4875,8 +4875,8 @@
         </p:nvSpPr>
         <p:spPr>
           <a:xfrm>
-            <a:off x="731520" y="1234440"/>
-            <a:ext cx="7680960" cy="4480560"/>
+            <a:off x="0" y="1234440"/>
+            <a:ext cx="9085536" cy="4349589"/>
           </a:xfrm>
           <a:prstGeom prst="rect">
             <a:avLst/>
@@ -4901,14 +4901,22 @@
               </a:spcAft>
             </a:pPr>
             <a:r>
-              <a:rPr b="1" sz="1450">
+              <a:rPr sz="1400" b="1" dirty="0">
                 <a:solidFill>
                   <a:srgbClr val="003366"/>
                 </a:solidFill>
               </a:rPr>
-              <a:t>Primary Real-World Usecases</a:t>
-            </a:r>
-            <a:endParaRPr lang="en-US" sz="2800" kern="100" dirty="0">
+              <a:t>Primary Real-World </a:t>
+            </a:r>
+            <a:r>
+              <a:rPr sz="1400" b="1" dirty="0" err="1">
+                <a:solidFill>
+                  <a:srgbClr val="003366"/>
+                </a:solidFill>
+              </a:rPr>
+              <a:t>Usecases</a:t>
+            </a:r>
+            <a:endParaRPr lang="en-US" sz="1400" kern="100" dirty="0">
               <a:effectLst/>
               <a:latin typeface="+mj-lt"/>
               <a:ea typeface="Calibri" panose="020F0502020204030204" pitchFamily="34" charset="0"/>
@@ -4922,16 +4930,145 @@
               </a:spcAft>
             </a:pPr>
             <a:r>
-              <a:rPr b="0" sz="1200">
+              <a:rPr sz="1400" b="0" dirty="0">
                 <a:solidFill>
                   <a:srgbClr val="334155"/>
                 </a:solidFill>
               </a:rPr>
-              <a:t>• Usecase 1 (Parent Discovery): A parent in Sector 22B searches for 'Maths tuition near me', finds Prime Learning on Google Maps with 4.9★ rating, and books a 3-Day Free Demo class.
-• Usecase 2 (Teacher Operations): Teachers scan student QR passes on arrival for instant attendance logging, enter weekly test scores into digital gradebooks, and share homework notes.
-• Usecase 3 (Demo Lead Conversion): Admin generates a printable Demo Pass, logs student attendance, and triggers automated WhatsApp feedback to parents to confirm enrollment.
-• Usecase 4 (Student Self-Study): A student uses the 24/7 AI Doubt Solver for step-by-step NCERT Maths solutions and tracks their CBSE attendance health meter (&gt;75%).</a:t>
-            </a:r>
+              <a:t>• </a:t>
+            </a:r>
+            <a:r>
+              <a:rPr sz="1400" b="0" dirty="0" err="1">
+                <a:solidFill>
+                  <a:srgbClr val="334155"/>
+                </a:solidFill>
+              </a:rPr>
+              <a:t>Usecase</a:t>
+            </a:r>
+            <a:r>
+              <a:rPr sz="1400" b="0" dirty="0">
+                <a:solidFill>
+                  <a:srgbClr val="334155"/>
+                </a:solidFill>
+              </a:rPr>
+              <a:t> 1 (Parent Discovery): A parent in Sector 22B searches for '</a:t>
+            </a:r>
+            <a:r>
+              <a:rPr sz="1400" b="0" dirty="0" err="1">
+                <a:solidFill>
+                  <a:srgbClr val="334155"/>
+                </a:solidFill>
+              </a:rPr>
+              <a:t>Maths</a:t>
+            </a:r>
+            <a:r>
+              <a:rPr sz="1400" b="0" dirty="0">
+                <a:solidFill>
+                  <a:srgbClr val="334155"/>
+                </a:solidFill>
+              </a:rPr>
+              <a:t> tuition near me', finds Prime Learning on Google Maps with 4.9★ rating, and books a 3-Day Free Demo class.
+• </a:t>
+            </a:r>
+            <a:r>
+              <a:rPr sz="1400" b="0" dirty="0" err="1">
+                <a:solidFill>
+                  <a:srgbClr val="334155"/>
+                </a:solidFill>
+              </a:rPr>
+              <a:t>Usecase</a:t>
+            </a:r>
+            <a:r>
+              <a:rPr sz="1400" b="0" dirty="0">
+                <a:solidFill>
+                  <a:srgbClr val="334155"/>
+                </a:solidFill>
+              </a:rPr>
+              <a:t> 2 (Teacher Operations): Teachers scan student QR passes on arrival for instant attendance logging, enter weekly test scores into digital gradebooks, and share homework notes.
+• </a:t>
+            </a:r>
+            <a:r>
+              <a:rPr sz="1400" b="0" dirty="0" err="1">
+                <a:solidFill>
+                  <a:srgbClr val="334155"/>
+                </a:solidFill>
+              </a:rPr>
+              <a:t>Usecase</a:t>
+            </a:r>
+            <a:r>
+              <a:rPr sz="1400" b="0" dirty="0">
+                <a:solidFill>
+                  <a:srgbClr val="334155"/>
+                </a:solidFill>
+              </a:rPr>
+              <a:t> 3 (Demo Lead Conversion): Admin generates a printable Demo Pass, logs student attendance, and triggers automated WhatsApp feedback to parents to confirm enrollment.
+• </a:t>
+            </a:r>
+            <a:r>
+              <a:rPr sz="1400" b="0" dirty="0" err="1">
+                <a:solidFill>
+                  <a:srgbClr val="334155"/>
+                </a:solidFill>
+              </a:rPr>
+              <a:t>Usecase</a:t>
+            </a:r>
+            <a:r>
+              <a:rPr sz="1400" b="0" dirty="0">
+                <a:solidFill>
+                  <a:srgbClr val="334155"/>
+                </a:solidFill>
+              </a:rPr>
+              <a:t> 4 (Student Self-Study): A student uses the 24/7 AI Doubt Solver for step-by-step NCERT </a:t>
+            </a:r>
+            <a:r>
+              <a:rPr sz="1400" b="0" dirty="0" err="1">
+                <a:solidFill>
+                  <a:srgbClr val="334155"/>
+                </a:solidFill>
+              </a:rPr>
+              <a:t>Maths</a:t>
+            </a:r>
+            <a:r>
+              <a:rPr sz="1400" b="0" dirty="0">
+                <a:solidFill>
+                  <a:srgbClr val="334155"/>
+                </a:solidFill>
+              </a:rPr>
+              <a:t> solutions and tracks their CBSE attendance health meter (&gt;</a:t>
+            </a:r>
+            <a:r>
+              <a:rPr lang="en-US" sz="1400" dirty="0">
+                <a:solidFill>
+                  <a:srgbClr val="334155"/>
+                </a:solidFill>
+              </a:rPr>
+              <a:t>90</a:t>
+            </a:r>
+            <a:r>
+              <a:rPr sz="1400" b="0" dirty="0">
+                <a:solidFill>
+                  <a:srgbClr val="334155"/>
+                </a:solidFill>
+              </a:rPr>
+              <a:t>%).</a:t>
+            </a:r>
+            <a:endParaRPr lang="en-US" sz="1400" b="0" dirty="0">
+              <a:solidFill>
+                <a:srgbClr val="334155"/>
+              </a:solidFill>
+            </a:endParaRPr>
+          </a:p>
+          <a:p>
+            <a:pPr lvl="1">
+              <a:spcAft>
+                <a:spcPts val="1000"/>
+              </a:spcAft>
+            </a:pPr>
+            <a:endParaRPr sz="1400" b="0" dirty="0">
+              <a:solidFill>
+                <a:srgbClr val="334155"/>
+              </a:solidFill>
+            </a:endParaRPr>
           </a:p>
           <a:p>
             <a:pPr>
@@ -4940,7 +5077,7 @@
               </a:spcAft>
             </a:pPr>
             <a:r>
-              <a:rPr b="1" sz="1450">
+              <a:rPr sz="1400" b="1" dirty="0">
                 <a:solidFill>
                   <a:srgbClr val="003366"/>
                 </a:solidFill>
@@ -4955,12 +5092,48 @@
               </a:spcAft>
             </a:pPr>
             <a:r>
-              <a:rPr b="0" sz="1200">
+              <a:rPr sz="1400" b="0" dirty="0">
                 <a:solidFill>
                   <a:srgbClr val="334155"/>
                 </a:solidFill>
               </a:rPr>
-              <a:t>• Current Scope (Delivered): Public website, Google Maps optimization, trial registration CRM, marketing studio, student/teacher portals, and digital fee receipts.
+              <a:t>• Current Scope (</a:t>
+            </a:r>
+            <a:r>
+              <a:rPr lang="en-US" sz="1400" dirty="0">
+                <a:solidFill>
+                  <a:srgbClr val="334155"/>
+                </a:solidFill>
+              </a:rPr>
+              <a:t>Working</a:t>
+            </a:r>
+            <a:r>
+              <a:rPr sz="1400" b="0" dirty="0">
+                <a:solidFill>
+                  <a:srgbClr val="334155"/>
+                </a:solidFill>
+              </a:rPr>
+              <a:t>): Public website, Google Maps optimization, trial registration CRM, marketing studio, student/teacher portals, and digital fee receipts.</a:t>
+            </a:r>
+            <a:endParaRPr lang="en-US" sz="1400" b="0" dirty="0">
+              <a:solidFill>
+                <a:srgbClr val="334155"/>
+              </a:solidFill>
+            </a:endParaRPr>
+          </a:p>
+          <a:p>
+            <a:pPr lvl="1">
+              <a:spcAft>
+                <a:spcPts val="400"/>
+              </a:spcAft>
+            </a:pPr>
+            <a:r>
+              <a:rPr sz="1400" b="0" dirty="0">
+                <a:solidFill>
+                  <a:srgbClr val="334155"/>
+                </a:solidFill>
+              </a:rPr>
+              <a:t>
 • Future Scope (Post-Semester): Multi-branch support for neighboring sectors, native Android/iOS mobile apps, and automated WhatsApp Cloud API integration.</a:t>
             </a:r>
           </a:p>
@@ -5185,8 +5358,8 @@
         </p:nvSpPr>
         <p:spPr>
           <a:xfrm>
-            <a:off x="731520" y="1234440"/>
-            <a:ext cx="7680960" cy="4480560"/>
+            <a:off x="103415" y="1234440"/>
+            <a:ext cx="9040584" cy="4565032"/>
           </a:xfrm>
           <a:prstGeom prst="rect">
             <a:avLst/>
@@ -5211,14 +5384,14 @@
               </a:spcAft>
             </a:pPr>
             <a:r>
-              <a:rPr b="1" sz="1450">
+              <a:rPr sz="1400" b="1" dirty="0">
                 <a:solidFill>
                   <a:srgbClr val="003366"/>
                 </a:solidFill>
               </a:rPr>
               <a:t>Measurable Results from Field Pilot</a:t>
             </a:r>
-            <a:endParaRPr lang="en-US" sz="2800" kern="100" dirty="0">
+            <a:endParaRPr lang="en-US" sz="1400" kern="100" dirty="0">
               <a:effectLst/>
               <a:latin typeface="+mj-lt"/>
               <a:ea typeface="Calibri" panose="020F0502020204030204" pitchFamily="34" charset="0"/>
@@ -5232,7 +5405,7 @@
               </a:spcAft>
             </a:pPr>
             <a:r>
-              <a:rPr b="0" sz="1200">
+              <a:rPr sz="1400" b="0" dirty="0">
                 <a:solidFill>
                   <a:srgbClr val="334155"/>
                 </a:solidFill>
@@ -5242,6 +5415,23 @@
 • Batch Capacity Growth: Increased batch enrollments from baseline 4–6 students to 12–15 students (+65% capacity growth).
 • Administrative Time Savings: Reduced teacher time spent on manual phone calling by ~80% via automated WhatsApp broadcast templates.</a:t>
             </a:r>
+            <a:endParaRPr lang="en-US" sz="1400" b="0" dirty="0">
+              <a:solidFill>
+                <a:srgbClr val="334155"/>
+              </a:solidFill>
+            </a:endParaRPr>
+          </a:p>
+          <a:p>
+            <a:pPr lvl="1">
+              <a:spcAft>
+                <a:spcPts val="1000"/>
+              </a:spcAft>
+            </a:pPr>
+            <a:endParaRPr sz="1400" b="0" dirty="0">
+              <a:solidFill>
+                <a:srgbClr val="334155"/>
+              </a:solidFill>
+            </a:endParaRPr>
           </a:p>
           <a:p>
             <a:pPr>
@@ -5250,7 +5440,7 @@
               </a:spcAft>
             </a:pPr>
             <a:r>
-              <a:rPr b="1" sz="1450">
+              <a:rPr sz="1400" b="1" dirty="0">
                 <a:solidFill>
                   <a:srgbClr val="003366"/>
                 </a:solidFill>
@@ -5265,7 +5455,7 @@
               </a:spcAft>
             </a:pPr>
             <a:r>
-              <a:rPr b="0" sz="1200">
+              <a:rPr sz="1400" b="0" dirty="0">
                 <a:solidFill>
                   <a:srgbClr val="334155"/>
                 </a:solidFill>
@@ -5425,65 +5615,6 @@
           </a:p>
         </p:txBody>
       </p:sp>
-      <p:sp>
-        <p:nvSpPr>
-          <p:cNvPr id="7" name="TextBox 6"/>
-          <p:cNvSpPr txBox="1"/>
-          <p:nvPr/>
-        </p:nvSpPr>
-        <p:spPr>
-          <a:xfrm>
-            <a:off x="1371600" y="3840480"/>
-            <a:ext cx="6400800" cy="1371600"/>
-          </a:xfrm>
-          <a:prstGeom prst="rect">
-            <a:avLst/>
-          </a:prstGeom>
-          <a:noFill/>
-        </p:spPr>
-        <p:txBody>
-          <a:bodyPr wrap="square">
-            <a:spAutoFit/>
-          </a:bodyPr>
-          <a:lstStyle/>
-          <a:p>
-            <a:pPr algn="ctr">
-              <a:defRPr b="1" sz="1400">
-                <a:solidFill>
-                  <a:srgbClr val="003366"/>
-                </a:solidFill>
-              </a:defRPr>
-            </a:pPr>
-            <a:r>
-              <a:t>Digital Transformation and Visibility Enhancement for Local Coaching Educators</a:t>
-            </a:r>
-          </a:p>
-          <a:p>
-            <a:pPr algn="ctr">
-              <a:defRPr sz="1300">
-                <a:solidFill>
-                  <a:srgbClr val="C00000"/>
-                </a:solidFill>
-              </a:defRPr>
-            </a:pPr>
-            <a:r>
-              <a:t>Prime Learning Classes • Sector-22B, Gurugram</a:t>
-            </a:r>
-          </a:p>
-          <a:p>
-            <a:pPr algn="ctr">
-              <a:defRPr sz="1200">
-                <a:solidFill>
-                  <a:srgbClr val="334155"/>
-                </a:solidFill>
-              </a:defRPr>
-            </a:pPr>
-            <a:r>
-              <a:t>Bhavya Anand (Roll No. 23BCE10426) • Semester 3 Community Service Project</a:t>
-            </a:r>
-          </a:p>
-        </p:txBody>
-      </p:sp>
     </p:spTree>
     <p:extLst>
       <p:ext uri="{BB962C8B-B14F-4D97-AF65-F5344CB8AC3E}">
@@ -5538,7 +5669,7 @@
         </p:blipFill>
         <p:spPr>
           <a:xfrm>
-            <a:off x="-54260" y="-27384"/>
+            <a:off x="-36512" y="260648"/>
             <a:ext cx="9180512" cy="6885384"/>
           </a:xfrm>
         </p:spPr>
@@ -5673,7 +5804,7 @@
           <p:nvPr>
             <p:extLst>
               <p:ext uri="{D42A27DB-BD31-4B8C-83A1-F6EECF244321}">
-                <p14:modId xmlns:p14="http://schemas.microsoft.com/office/powerpoint/2010/main" val="638070875"/>
+                <p14:modId xmlns:p14="http://schemas.microsoft.com/office/powerpoint/2010/main" val="561657591"/>
               </p:ext>
             </p:extLst>
           </p:nvPr>
@@ -5711,13 +5842,14 @@
                     <a:lstStyle/>
                     <a:p>
                       <a:pPr>
-                        <a:defRPr b="1" sz="1300">
+                        <a:defRPr sz="1300" b="1">
                           <a:solidFill>
                             <a:srgbClr val="0070C0"/>
                           </a:solidFill>
                         </a:defRPr>
                       </a:pPr>
                       <a:r>
+                        <a:rPr lang="en-US" dirty="0"/>
                         <a:t>ROLL NO.</a:t>
                       </a:r>
                     </a:p>
@@ -5730,13 +5862,14 @@
                     <a:lstStyle/>
                     <a:p>
                       <a:pPr>
-                        <a:defRPr b="1" sz="1300">
+                        <a:defRPr sz="1300" b="1">
                           <a:solidFill>
                             <a:srgbClr val="0070C0"/>
                           </a:solidFill>
                         </a:defRPr>
                       </a:pPr>
                       <a:r>
+                        <a:rPr lang="en-US"/>
                         <a:t>STUDENT NAME</a:t>
                       </a:r>
                     </a:p>
@@ -5756,14 +5889,15 @@
                     <a:lstStyle/>
                     <a:p>
                       <a:pPr>
-                        <a:defRPr b="1" sz="1200">
+                        <a:defRPr sz="1200" b="1">
                           <a:solidFill>
                             <a:srgbClr val="0F172A"/>
                           </a:solidFill>
                         </a:defRPr>
                       </a:pPr>
                       <a:r>
-                        <a:t>23BCE10426</a:t>
+                        <a:rPr lang="en-US" dirty="0"/>
+                        <a:t>2501730046</a:t>
                       </a:r>
                     </a:p>
                   </a:txBody>
@@ -5775,13 +5909,14 @@
                     <a:lstStyle/>
                     <a:p>
                       <a:pPr>
-                        <a:defRPr b="1" sz="1200">
+                        <a:defRPr sz="1200" b="1">
                           <a:solidFill>
                             <a:srgbClr val="0F172A"/>
                           </a:solidFill>
                         </a:defRPr>
                       </a:pPr>
                       <a:r>
+                        <a:rPr lang="en-US"/>
                         <a:t>Bhavya Anand</a:t>
                       </a:r>
                     </a:p>
@@ -5801,13 +5936,16 @@
                     <a:lstStyle/>
                     <a:p>
                       <a:pPr algn="ctr">
-                        <a:defRPr b="0" sz="1200">
+                        <a:defRPr sz="1200" b="0">
                           <a:solidFill>
                             <a:srgbClr val="0F172A"/>
                           </a:solidFill>
                         </a:defRPr>
                       </a:pPr>
-                      <a:endParaRPr lang="en-US" dirty="0"/>
+                      <a:r>
+                        <a:rPr lang="en-US" dirty="0"/>
+                        <a:t>2501730051</a:t>
+                      </a:r>
                     </a:p>
                   </a:txBody>
                   <a:tcPr anchor="ctr"/>
@@ -5818,13 +5956,16 @@
                     <a:lstStyle/>
                     <a:p>
                       <a:pPr algn="ctr">
-                        <a:defRPr b="0" sz="1200">
+                        <a:defRPr sz="1200" b="0">
                           <a:solidFill>
                             <a:srgbClr val="0F172A"/>
                           </a:solidFill>
                         </a:defRPr>
                       </a:pPr>
-                      <a:endParaRPr lang="en-US" dirty="0"/>
+                      <a:r>
+                        <a:rPr lang="en-US" dirty="0"/>
+                        <a:t>Priyanshu Pandey</a:t>
+                      </a:r>
                     </a:p>
                   </a:txBody>
                   <a:tcPr anchor="ctr"/>
@@ -5842,13 +5983,16 @@
                     <a:lstStyle/>
                     <a:p>
                       <a:pPr algn="ctr">
-                        <a:defRPr b="0" sz="1200">
+                        <a:defRPr sz="1200" b="0">
                           <a:solidFill>
                             <a:srgbClr val="0F172A"/>
                           </a:solidFill>
                         </a:defRPr>
                       </a:pPr>
-                      <a:endParaRPr lang="en-US" dirty="0"/>
+                      <a:r>
+                        <a:rPr lang="en-US" dirty="0"/>
+                        <a:t>2501730172</a:t>
+                      </a:r>
                     </a:p>
                   </a:txBody>
                   <a:tcPr anchor="ctr"/>
@@ -5859,13 +6003,16 @@
                     <a:lstStyle/>
                     <a:p>
                       <a:pPr algn="ctr">
-                        <a:defRPr b="0" sz="1200">
+                        <a:defRPr sz="1200" b="0">
                           <a:solidFill>
                             <a:srgbClr val="0F172A"/>
                           </a:solidFill>
                         </a:defRPr>
                       </a:pPr>
-                      <a:endParaRPr lang="en-US" dirty="0"/>
+                      <a:r>
+                        <a:rPr lang="en-US" dirty="0"/>
+                        <a:t>Aman Kumar</a:t>
+                      </a:r>
                     </a:p>
                   </a:txBody>
                   <a:tcPr anchor="ctr"/>
@@ -5883,13 +6030,16 @@
                     <a:lstStyle/>
                     <a:p>
                       <a:pPr algn="ctr">
-                        <a:defRPr b="0" sz="1200">
+                        <a:defRPr sz="1200" b="0">
                           <a:solidFill>
                             <a:srgbClr val="0F172A"/>
                           </a:solidFill>
                         </a:defRPr>
                       </a:pPr>
-                      <a:endParaRPr lang="en-US" dirty="0"/>
+                      <a:r>
+                        <a:rPr lang="en-US" dirty="0"/>
+                        <a:t>2501730197</a:t>
+                      </a:r>
                     </a:p>
                   </a:txBody>
                   <a:tcPr anchor="ctr"/>
@@ -5900,13 +6050,16 @@
                     <a:lstStyle/>
                     <a:p>
                       <a:pPr algn="ctr">
-                        <a:defRPr b="0" sz="1200">
+                        <a:defRPr sz="1200" b="0">
                           <a:solidFill>
                             <a:srgbClr val="0F172A"/>
                           </a:solidFill>
                         </a:defRPr>
                       </a:pPr>
-                      <a:endParaRPr lang="en-US" dirty="0"/>
+                      <a:r>
+                        <a:rPr lang="en-US" dirty="0"/>
+                        <a:t>Archita</a:t>
+                      </a:r>
                     </a:p>
                   </a:txBody>
                   <a:tcPr anchor="ctr"/>
@@ -5924,13 +6077,16 @@
                     <a:lstStyle/>
                     <a:p>
                       <a:pPr algn="ctr">
-                        <a:defRPr b="0" sz="1200">
+                        <a:defRPr sz="1200" b="0">
                           <a:solidFill>
                             <a:srgbClr val="0F172A"/>
                           </a:solidFill>
                         </a:defRPr>
                       </a:pPr>
-                      <a:endParaRPr lang="en-US" dirty="0"/>
+                      <a:r>
+                        <a:rPr lang="en-US" dirty="0"/>
+                        <a:t>2501730252</a:t>
+                      </a:r>
                     </a:p>
                   </a:txBody>
                   <a:tcPr anchor="ctr"/>
@@ -5941,13 +6097,16 @@
                     <a:lstStyle/>
                     <a:p>
                       <a:pPr algn="ctr">
-                        <a:defRPr b="0" sz="1200">
+                        <a:defRPr sz="1200" b="0">
                           <a:solidFill>
                             <a:srgbClr val="0F172A"/>
                           </a:solidFill>
                         </a:defRPr>
                       </a:pPr>
-                      <a:endParaRPr lang="en-US" dirty="0"/>
+                      <a:r>
+                        <a:rPr lang="en-US" dirty="0"/>
+                        <a:t>Pawan K. Singh</a:t>
+                      </a:r>
                     </a:p>
                   </a:txBody>
                   <a:tcPr anchor="ctr"/>
@@ -6050,7 +6209,7 @@
           <a:p>
             <a:pPr lvl="0" algn="ctr">
               <a:buSzPct val="25000"/>
-              <a:defRPr b="1" sz="1500">
+              <a:defRPr sz="1500" b="1">
                 <a:solidFill>
                   <a:srgbClr val="0070C0"/>
                 </a:solidFill>
@@ -6278,8 +6437,8 @@
         </p:nvSpPr>
         <p:spPr>
           <a:xfrm>
-            <a:off x="731520" y="1234440"/>
-            <a:ext cx="7680960" cy="4480560"/>
+            <a:off x="731520" y="1234439"/>
+            <a:ext cx="8016944" cy="4903907"/>
           </a:xfrm>
           <a:prstGeom prst="rect">
             <a:avLst/>
@@ -6298,7 +6457,7 @@
               </a:spcAft>
             </a:pPr>
             <a:r>
-              <a:rPr b="1" sz="1500">
+              <a:rPr sz="1400" b="1" dirty="0">
                 <a:solidFill>
                   <a:srgbClr val="003366"/>
                 </a:solidFill>
@@ -6313,13 +6472,30 @@
               </a:spcAft>
             </a:pPr>
             <a:r>
-              <a:rPr b="0" sz="1250">
+              <a:rPr sz="1400" b="0" dirty="0">
                 <a:solidFill>
                   <a:srgbClr val="334155"/>
                 </a:solidFill>
               </a:rPr>
               <a:t>Prime Learning Classes is a neighborhood coaching center run by two local teachers at 948, Sector-22B, Near Anand Farm, Gurugram. The faculty includes Praveen Gandhi (M.Sc. Mathematics, 12+ yrs exp) and Rashmi Anand (M.Sc. Organic Chemistry, 10+ yrs exp), teaching CBSE Class 1 to 12.</a:t>
             </a:r>
+            <a:endParaRPr lang="en-US" sz="1400" b="0" dirty="0">
+              <a:solidFill>
+                <a:srgbClr val="334155"/>
+              </a:solidFill>
+            </a:endParaRPr>
+          </a:p>
+          <a:p>
+            <a:pPr lvl="1">
+              <a:spcAft>
+                <a:spcPts val="800"/>
+              </a:spcAft>
+            </a:pPr>
+            <a:endParaRPr sz="1400" b="0" dirty="0">
+              <a:solidFill>
+                <a:srgbClr val="334155"/>
+              </a:solidFill>
+            </a:endParaRPr>
           </a:p>
           <a:p>
             <a:pPr>
@@ -6328,7 +6504,7 @@
               </a:spcAft>
             </a:pPr>
             <a:r>
-              <a:rPr b="1" sz="1500">
+              <a:rPr sz="1400" b="1" dirty="0">
                 <a:solidFill>
                   <a:srgbClr val="003366"/>
                 </a:solidFill>
@@ -6343,13 +6519,30 @@
               </a:spcAft>
             </a:pPr>
             <a:r>
-              <a:rPr b="0" sz="1250">
+              <a:rPr sz="1400" b="0" dirty="0">
                 <a:solidFill>
                   <a:srgbClr val="334155"/>
                 </a:solidFill>
               </a:rPr>
               <a:t>Despite having strong subject knowledge and great board exam results, the teachers relied completely on traditional word-of-mouth promotion. They had zero online presence or Google Maps listing, making it difficult for nearby parents in Sector 22B, Sector 21, and Palam Vihar to discover them.</a:t>
             </a:r>
+            <a:endParaRPr lang="en-US" sz="1400" b="0" dirty="0">
+              <a:solidFill>
+                <a:srgbClr val="334155"/>
+              </a:solidFill>
+            </a:endParaRPr>
+          </a:p>
+          <a:p>
+            <a:pPr lvl="1">
+              <a:spcAft>
+                <a:spcPts val="800"/>
+              </a:spcAft>
+            </a:pPr>
+            <a:endParaRPr sz="1400" b="0" dirty="0">
+              <a:solidFill>
+                <a:srgbClr val="334155"/>
+              </a:solidFill>
+            </a:endParaRPr>
           </a:p>
           <a:p>
             <a:pPr>
@@ -6358,7 +6551,7 @@
               </a:spcAft>
             </a:pPr>
             <a:r>
-              <a:rPr b="1" sz="1500">
+              <a:rPr sz="1400" b="1" dirty="0">
                 <a:solidFill>
                   <a:srgbClr val="003366"/>
                 </a:solidFill>
@@ -6373,13 +6566,30 @@
               </a:spcAft>
             </a:pPr>
             <a:r>
-              <a:rPr b="0" sz="1250">
+              <a:rPr sz="1400" b="0" dirty="0">
                 <a:solidFill>
                   <a:srgbClr val="334155"/>
                 </a:solidFill>
               </a:rPr>
               <a:t>Batch sizes averaged only 4 to 6 students against an available classroom capacity of 15 students. Student inquiries and demo requests were recorded informally on loose paper without follow-up tracking, leading to high inquiry drop-off.</a:t>
             </a:r>
+            <a:endParaRPr lang="en-US" sz="1400" b="0" dirty="0">
+              <a:solidFill>
+                <a:srgbClr val="334155"/>
+              </a:solidFill>
+            </a:endParaRPr>
+          </a:p>
+          <a:p>
+            <a:pPr lvl="1">
+              <a:spcAft>
+                <a:spcPts val="800"/>
+              </a:spcAft>
+            </a:pPr>
+            <a:endParaRPr sz="1400" b="0" dirty="0">
+              <a:solidFill>
+                <a:srgbClr val="334155"/>
+              </a:solidFill>
+            </a:endParaRPr>
           </a:p>
           <a:p>
             <a:pPr>
@@ -6388,7 +6598,7 @@
               </a:spcAft>
             </a:pPr>
             <a:r>
-              <a:rPr b="1" sz="1500">
+              <a:rPr sz="1400" b="1" dirty="0">
                 <a:solidFill>
                   <a:srgbClr val="003366"/>
                 </a:solidFill>
@@ -6403,7 +6613,7 @@
               </a:spcAft>
             </a:pPr>
             <a:r>
-              <a:rPr b="0" sz="1250">
+              <a:rPr sz="1400" b="0" dirty="0">
                 <a:solidFill>
                   <a:srgbClr val="334155"/>
                 </a:solidFill>
@@ -6662,8 +6872,8 @@
         </p:nvSpPr>
         <p:spPr>
           <a:xfrm>
-            <a:off x="731520" y="1234440"/>
-            <a:ext cx="7680960" cy="4480560"/>
+            <a:off x="545780" y="1336297"/>
+            <a:ext cx="8232968" cy="5047216"/>
           </a:xfrm>
           <a:prstGeom prst="rect">
             <a:avLst/>
@@ -6688,14 +6898,14 @@
               </a:spcAft>
             </a:pPr>
             <a:r>
-              <a:rPr b="1" sz="1450">
+              <a:rPr sz="1400" b="1" dirty="0">
                 <a:solidFill>
                   <a:srgbClr val="003366"/>
                 </a:solidFill>
               </a:rPr>
               <a:t>1. Professional Web Portal for Educators</a:t>
             </a:r>
-            <a:endParaRPr lang="en-US" sz="2800" kern="100" dirty="0">
+            <a:endParaRPr lang="en-US" sz="1400" kern="100" dirty="0">
               <a:effectLst/>
               <a:latin typeface="+mj-lt"/>
               <a:ea typeface="Calibri" panose="020F0502020204030204" pitchFamily="34" charset="0"/>
@@ -6709,13 +6919,30 @@
               </a:spcAft>
             </a:pPr>
             <a:r>
-              <a:rPr b="0" sz="1200">
+              <a:rPr sz="1400" b="0" dirty="0">
                 <a:solidFill>
                   <a:srgbClr val="334155"/>
                 </a:solidFill>
               </a:rPr>
               <a:t>Create a clean website presenting faculty qualifications, subjects taught, batch timings, fee structures, location landmarks, student testimonials, and direct WhatsApp/call buttons.</a:t>
             </a:r>
+            <a:endParaRPr lang="en-US" sz="1400" b="0" dirty="0">
+              <a:solidFill>
+                <a:srgbClr val="334155"/>
+              </a:solidFill>
+            </a:endParaRPr>
+          </a:p>
+          <a:p>
+            <a:pPr lvl="1">
+              <a:spcAft>
+                <a:spcPts val="700"/>
+              </a:spcAft>
+            </a:pPr>
+            <a:endParaRPr sz="1400" b="0" dirty="0">
+              <a:solidFill>
+                <a:srgbClr val="334155"/>
+              </a:solidFill>
+            </a:endParaRPr>
           </a:p>
           <a:p>
             <a:pPr>
@@ -6724,7 +6951,7 @@
               </a:spcAft>
             </a:pPr>
             <a:r>
-              <a:rPr b="1" sz="1450">
+              <a:rPr sz="1400" b="1" dirty="0">
                 <a:solidFill>
                   <a:srgbClr val="003366"/>
                 </a:solidFill>
@@ -6739,13 +6966,30 @@
               </a:spcAft>
             </a:pPr>
             <a:r>
-              <a:rPr b="0" sz="1200">
+              <a:rPr sz="1400" b="0" dirty="0">
                 <a:solidFill>
                   <a:srgbClr val="334155"/>
                 </a:solidFill>
               </a:rPr>
               <a:t>Set up and optimize their Google Business Profile with verified location, timings, and genuine parent reviews so nearby residents searching for 'coaching near me' find them easily.</a:t>
             </a:r>
+            <a:endParaRPr lang="en-US" sz="1400" b="0" dirty="0">
+              <a:solidFill>
+                <a:srgbClr val="334155"/>
+              </a:solidFill>
+            </a:endParaRPr>
+          </a:p>
+          <a:p>
+            <a:pPr lvl="1">
+              <a:spcAft>
+                <a:spcPts val="700"/>
+              </a:spcAft>
+            </a:pPr>
+            <a:endParaRPr sz="1400" b="0" dirty="0">
+              <a:solidFill>
+                <a:srgbClr val="334155"/>
+              </a:solidFill>
+            </a:endParaRPr>
           </a:p>
           <a:p>
             <a:pPr>
@@ -6754,7 +6998,7 @@
               </a:spcAft>
             </a:pPr>
             <a:r>
-              <a:rPr b="1" sz="1450">
+              <a:rPr sz="1400" b="1" dirty="0">
                 <a:solidFill>
                   <a:srgbClr val="003366"/>
                 </a:solidFill>
@@ -6769,13 +7013,30 @@
               </a:spcAft>
             </a:pPr>
             <a:r>
-              <a:rPr b="0" sz="1200">
+              <a:rPr sz="1400" b="0" dirty="0">
                 <a:solidFill>
                   <a:srgbClr val="334155"/>
                 </a:solidFill>
               </a:rPr>
               <a:t>Build an easy 3-day demo registration form, attendance tracking for trial students, printable demo admit passes, and automated WhatsApp follow-ups to convert trial students into regular admissions.</a:t>
             </a:r>
+            <a:endParaRPr lang="en-US" sz="1400" b="0" dirty="0">
+              <a:solidFill>
+                <a:srgbClr val="334155"/>
+              </a:solidFill>
+            </a:endParaRPr>
+          </a:p>
+          <a:p>
+            <a:pPr lvl="1">
+              <a:spcAft>
+                <a:spcPts val="700"/>
+              </a:spcAft>
+            </a:pPr>
+            <a:endParaRPr sz="1400" b="0" dirty="0">
+              <a:solidFill>
+                <a:srgbClr val="334155"/>
+              </a:solidFill>
+            </a:endParaRPr>
           </a:p>
           <a:p>
             <a:pPr>
@@ -6784,7 +7045,7 @@
               </a:spcAft>
             </a:pPr>
             <a:r>
-              <a:rPr b="1" sz="1450">
+              <a:rPr sz="1400" b="1" dirty="0">
                 <a:solidFill>
                   <a:srgbClr val="003366"/>
                 </a:solidFill>
@@ -6799,13 +7060,30 @@
               </a:spcAft>
             </a:pPr>
             <a:r>
-              <a:rPr b="0" sz="1200">
+              <a:rPr sz="1400" b="0" dirty="0">
                 <a:solidFill>
                   <a:srgbClr val="334155"/>
                 </a:solidFill>
               </a:rPr>
               <a:t>Provide a marketing studio to generate printable admission flyers, society notice board posters, and table-top QR standees for physical outreach in nearby apartment blocks.</a:t>
             </a:r>
+            <a:endParaRPr lang="en-US" sz="1400" b="0" dirty="0">
+              <a:solidFill>
+                <a:srgbClr val="334155"/>
+              </a:solidFill>
+            </a:endParaRPr>
+          </a:p>
+          <a:p>
+            <a:pPr lvl="1">
+              <a:spcAft>
+                <a:spcPts val="700"/>
+              </a:spcAft>
+            </a:pPr>
+            <a:endParaRPr sz="1400" b="0" dirty="0">
+              <a:solidFill>
+                <a:srgbClr val="334155"/>
+              </a:solidFill>
+            </a:endParaRPr>
           </a:p>
           <a:p>
             <a:pPr>
@@ -6814,7 +7092,7 @@
               </a:spcAft>
             </a:pPr>
             <a:r>
-              <a:rPr b="1" sz="1450">
+              <a:rPr sz="1400" b="1" dirty="0">
                 <a:solidFill>
                   <a:srgbClr val="003366"/>
                 </a:solidFill>
@@ -6829,7 +7107,7 @@
               </a:spcAft>
             </a:pPr>
             <a:r>
-              <a:rPr b="0" sz="1200">
+              <a:rPr sz="1400" b="0" dirty="0">
                 <a:solidFill>
                   <a:srgbClr val="334155"/>
                 </a:solidFill>
@@ -7062,7 +7340,7 @@
         <p:spPr>
           <a:xfrm>
             <a:off x="731520" y="1234440"/>
-            <a:ext cx="7680960" cy="4480560"/>
+            <a:ext cx="7680960" cy="3610925"/>
           </a:xfrm>
           <a:prstGeom prst="rect">
             <a:avLst/>
@@ -7087,14 +7365,14 @@
               </a:spcAft>
             </a:pPr>
             <a:r>
-              <a:rPr b="1" sz="1500">
+              <a:rPr sz="1400" b="1" dirty="0">
                 <a:solidFill>
                   <a:srgbClr val="003366"/>
                 </a:solidFill>
               </a:rPr>
               <a:t>SDG 4: Quality Education (Targets 4.1 &amp; 4.c)</a:t>
             </a:r>
-            <a:endParaRPr lang="en-US" sz="2800" kern="100" dirty="0">
+            <a:endParaRPr lang="en-US" sz="1400" kern="100" dirty="0">
               <a:effectLst/>
               <a:latin typeface="+mj-lt"/>
               <a:ea typeface="Calibri" panose="020F0502020204030204" pitchFamily="34" charset="0"/>
@@ -7108,13 +7386,46 @@
               </a:spcAft>
             </a:pPr>
             <a:r>
-              <a:rPr b="0" sz="1250">
+              <a:rPr sz="1400" b="0" dirty="0">
                 <a:solidFill>
                   <a:srgbClr val="334155"/>
                 </a:solidFill>
               </a:rPr>
-              <a:t>Ensures students in Sector 22B, Palam Vihar, and adjoining communities have access to high-quality, affordable supplementary tutoring in Maths and Science. Integrated a 24/7 AI Doubt Solver to help students resolve NCERT textbook questions step-by-step outside classroom hours.</a:t>
-            </a:r>
+              <a:t>Ensures students in Sector 22B, Palam Vihar, and adjoining communities have access to high-quality, affordable supplementary tutoring in </a:t>
+            </a:r>
+            <a:r>
+              <a:rPr sz="1400" b="0" dirty="0" err="1">
+                <a:solidFill>
+                  <a:srgbClr val="334155"/>
+                </a:solidFill>
+              </a:rPr>
+              <a:t>Maths</a:t>
+            </a:r>
+            <a:r>
+              <a:rPr sz="1400" b="0" dirty="0">
+                <a:solidFill>
+                  <a:srgbClr val="334155"/>
+                </a:solidFill>
+              </a:rPr>
+              <a:t> and Science. Integrated a 24/7 AI Doubt Solver to help students resolve NCERT textbook questions step-by-step outside classroom hours.</a:t>
+            </a:r>
+            <a:endParaRPr lang="en-US" sz="1400" b="0" dirty="0">
+              <a:solidFill>
+                <a:srgbClr val="334155"/>
+              </a:solidFill>
+            </a:endParaRPr>
+          </a:p>
+          <a:p>
+            <a:pPr lvl="1">
+              <a:spcAft>
+                <a:spcPts val="1000"/>
+              </a:spcAft>
+            </a:pPr>
+            <a:endParaRPr sz="1400" b="0" dirty="0">
+              <a:solidFill>
+                <a:srgbClr val="334155"/>
+              </a:solidFill>
+            </a:endParaRPr>
           </a:p>
           <a:p>
             <a:pPr>
@@ -7123,7 +7434,7 @@
               </a:spcAft>
             </a:pPr>
             <a:r>
-              <a:rPr b="1" sz="1500">
+              <a:rPr sz="1400" b="1" dirty="0">
                 <a:solidFill>
                   <a:srgbClr val="003366"/>
                 </a:solidFill>
@@ -7138,7 +7449,7 @@
               </a:spcAft>
             </a:pPr>
             <a:r>
-              <a:rPr b="0" sz="1250">
+              <a:rPr sz="1400" b="0" dirty="0">
                 <a:solidFill>
                   <a:srgbClr val="334155"/>
                 </a:solidFill>
@@ -7152,8 +7463,20 @@
                 <a:spcPts val="200"/>
               </a:spcAft>
             </a:pPr>
-            <a:r>
-              <a:rPr b="1" sz="1500">
+            <a:endParaRPr lang="en-US" sz="1400" b="1" dirty="0">
+              <a:solidFill>
+                <a:srgbClr val="003366"/>
+              </a:solidFill>
+            </a:endParaRPr>
+          </a:p>
+          <a:p>
+            <a:pPr>
+              <a:spcAft>
+                <a:spcPts val="200"/>
+              </a:spcAft>
+            </a:pPr>
+            <a:r>
+              <a:rPr sz="1400" b="1" dirty="0">
                 <a:solidFill>
                   <a:srgbClr val="003366"/>
                 </a:solidFill>
@@ -7168,12 +7491,28 @@
               </a:spcAft>
             </a:pPr>
             <a:r>
-              <a:rPr b="0" sz="1250">
+              <a:rPr sz="1400" b="0" dirty="0">
                 <a:solidFill>
                   <a:srgbClr val="334155"/>
                 </a:solidFill>
               </a:rPr>
-              <a:t>Brings modern digital tools into a traditional neighborhood education setup. Implements contactless QR-code workflows for student demo passes and attendance check-ins, along with Schema.org local search metadata.</a:t>
+              <a:t>Brings modern digital tools into a traditional neighborhood education setup. Implements contactless QR-code workflows for student demo passes and attendance check-ins, along with </a:t>
+            </a:r>
+            <a:r>
+              <a:rPr sz="1400" b="0" dirty="0" err="1">
+                <a:solidFill>
+                  <a:srgbClr val="334155"/>
+                </a:solidFill>
+              </a:rPr>
+              <a:t>Schema.org</a:t>
+            </a:r>
+            <a:r>
+              <a:rPr sz="1400" b="0" dirty="0">
+                <a:solidFill>
+                  <a:srgbClr val="334155"/>
+                </a:solidFill>
+              </a:rPr>
+              <a:t> local search metadata.</a:t>
             </a:r>
           </a:p>
         </p:txBody>
@@ -7397,8 +7736,8 @@
         </p:nvSpPr>
         <p:spPr>
           <a:xfrm>
-            <a:off x="731520" y="1234440"/>
-            <a:ext cx="7680960" cy="4480560"/>
+            <a:off x="103414" y="1234440"/>
+            <a:ext cx="9040586" cy="4580421"/>
           </a:xfrm>
           <a:prstGeom prst="rect">
             <a:avLst/>
@@ -7423,14 +7762,14 @@
               </a:spcAft>
             </a:pPr>
             <a:r>
-              <a:rPr b="1" sz="1450">
+              <a:rPr sz="1400" b="1" dirty="0">
                 <a:solidFill>
                   <a:srgbClr val="003366"/>
                 </a:solidFill>
               </a:rPr>
               <a:t>Project Methodology (4-Step Execution)</a:t>
             </a:r>
-            <a:endParaRPr lang="en-US" sz="2800" kern="100" dirty="0">
+            <a:endParaRPr lang="en-US" sz="1400" kern="100" dirty="0">
               <a:effectLst/>
               <a:latin typeface="+mj-lt"/>
               <a:ea typeface="Calibri" panose="020F0502020204030204" pitchFamily="34" charset="0"/>
@@ -7444,16 +7783,93 @@
               </a:spcAft>
             </a:pPr>
             <a:r>
-              <a:rPr b="0" sz="1200">
+              <a:rPr sz="1400" b="0" dirty="0">
                 <a:solidFill>
                   <a:srgbClr val="334155"/>
                 </a:solidFill>
               </a:rPr>
               <a:t>• Step 1: Field Survey &amp; Diagnosis — Visited coaching center in Sec-22B, interviewed teachers, reviewed existing manual records, and identified visibility bottlenecks.
 • Step 2: System &amp; UI Design — Designed mobile-first responsive layouts, lead inquiry workflows, and data schemas.
-• Step 3: Full-Stack Development — Built platform with Next.js 15, Supabase database, Firebase authentication, and Google Gemini AI.
-• Step 4: Pilot Testing &amp; Deployment — Deployed on Vercel, verified Google Maps pin, distributed QR flyers, and trained teachers.</a:t>
-            </a:r>
+• Step 3: Full-Stack Development — Built platform with </a:t>
+            </a:r>
+            <a:r>
+              <a:rPr sz="1400" b="0" dirty="0" err="1">
+                <a:solidFill>
+                  <a:srgbClr val="334155"/>
+                </a:solidFill>
+              </a:rPr>
+              <a:t>Next.js</a:t>
+            </a:r>
+            <a:r>
+              <a:rPr sz="1400" b="0" dirty="0">
+                <a:solidFill>
+                  <a:srgbClr val="334155"/>
+                </a:solidFill>
+              </a:rPr>
+              <a:t> 15, </a:t>
+            </a:r>
+            <a:r>
+              <a:rPr sz="1400" b="0" dirty="0" err="1">
+                <a:solidFill>
+                  <a:srgbClr val="334155"/>
+                </a:solidFill>
+              </a:rPr>
+              <a:t>Supabase</a:t>
+            </a:r>
+            <a:r>
+              <a:rPr sz="1400" b="0" dirty="0">
+                <a:solidFill>
+                  <a:srgbClr val="334155"/>
+                </a:solidFill>
+              </a:rPr>
+              <a:t> database, Firebase authentication, and Google Gemini AI.
+• Step 4: Pilot Testing &amp; Deployment — Deployed on </a:t>
+            </a:r>
+            <a:r>
+              <a:rPr sz="1400" b="0" dirty="0" err="1">
+                <a:solidFill>
+                  <a:srgbClr val="334155"/>
+                </a:solidFill>
+              </a:rPr>
+              <a:t>Vercel</a:t>
+            </a:r>
+            <a:r>
+              <a:rPr sz="1400" b="0" dirty="0">
+                <a:solidFill>
+                  <a:srgbClr val="334155"/>
+                </a:solidFill>
+              </a:rPr>
+              <a:t>, verified Google Maps pin, distributed QR flyers, and trained teachers.</a:t>
+            </a:r>
+            <a:endParaRPr lang="en-US" sz="1400" b="0" dirty="0">
+              <a:solidFill>
+                <a:srgbClr val="334155"/>
+              </a:solidFill>
+            </a:endParaRPr>
+          </a:p>
+          <a:p>
+            <a:pPr lvl="1">
+              <a:spcAft>
+                <a:spcPts val="1000"/>
+              </a:spcAft>
+            </a:pPr>
+            <a:endParaRPr lang="en-US" sz="1400" dirty="0">
+              <a:solidFill>
+                <a:srgbClr val="334155"/>
+              </a:solidFill>
+            </a:endParaRPr>
+          </a:p>
+          <a:p>
+            <a:pPr lvl="1">
+              <a:spcAft>
+                <a:spcPts val="1000"/>
+              </a:spcAft>
+            </a:pPr>
+            <a:endParaRPr sz="1400" b="0" dirty="0">
+              <a:solidFill>
+                <a:srgbClr val="334155"/>
+              </a:solidFill>
+            </a:endParaRPr>
           </a:p>
           <a:p>
             <a:pPr>
@@ -7462,7 +7878,7 @@
               </a:spcAft>
             </a:pPr>
             <a:r>
-              <a:rPr b="1" sz="1450">
+              <a:rPr sz="1400" b="1" dirty="0">
                 <a:solidFill>
                   <a:srgbClr val="003366"/>
                 </a:solidFill>
@@ -7477,16 +7893,112 @@
               </a:spcAft>
             </a:pPr>
             <a:r>
-              <a:rPr b="0" sz="1200">
+              <a:rPr sz="1400" b="0" dirty="0">
                 <a:solidFill>
                   <a:srgbClr val="334155"/>
                 </a:solidFill>
               </a:rPr>
-              <a:t>• Frontend: Next.js 15 (App Router), React 19, Tailwind CSS, Lucide React icons.
-• Backend &amp; Persistence: TypeScript 5.7, Supabase PostgreSQL, Browser LocalStorage for instant demos.
+              <a:t>• Frontend: </a:t>
+            </a:r>
+            <a:r>
+              <a:rPr sz="1400" b="0" dirty="0" err="1">
+                <a:solidFill>
+                  <a:srgbClr val="334155"/>
+                </a:solidFill>
+              </a:rPr>
+              <a:t>Next.js</a:t>
+            </a:r>
+            <a:r>
+              <a:rPr sz="1400" b="0" dirty="0">
+                <a:solidFill>
+                  <a:srgbClr val="334155"/>
+                </a:solidFill>
+              </a:rPr>
+              <a:t> 15 (App Router), React 19, Tailwind CSS, </a:t>
+            </a:r>
+            <a:r>
+              <a:rPr sz="1400" b="0" dirty="0" err="1">
+                <a:solidFill>
+                  <a:srgbClr val="334155"/>
+                </a:solidFill>
+              </a:rPr>
+              <a:t>Lucide</a:t>
+            </a:r>
+            <a:r>
+              <a:rPr sz="1400" b="0" dirty="0">
+                <a:solidFill>
+                  <a:srgbClr val="334155"/>
+                </a:solidFill>
+              </a:rPr>
+              <a:t> React icons.
+• Backend &amp; Persistence: TypeScript 5.7, </a:t>
+            </a:r>
+            <a:r>
+              <a:rPr sz="1400" b="0" dirty="0" err="1">
+                <a:solidFill>
+                  <a:srgbClr val="334155"/>
+                </a:solidFill>
+              </a:rPr>
+              <a:t>Supabase</a:t>
+            </a:r>
+            <a:r>
+              <a:rPr sz="1400" b="0" dirty="0">
+                <a:solidFill>
+                  <a:srgbClr val="334155"/>
+                </a:solidFill>
+              </a:rPr>
+              <a:t> PostgreSQL, Browser </a:t>
+            </a:r>
+            <a:r>
+              <a:rPr sz="1400" b="0" dirty="0" err="1">
+                <a:solidFill>
+                  <a:srgbClr val="334155"/>
+                </a:solidFill>
+              </a:rPr>
+              <a:t>LocalStorage</a:t>
+            </a:r>
+            <a:r>
+              <a:rPr sz="1400" b="0" dirty="0">
+                <a:solidFill>
+                  <a:srgbClr val="334155"/>
+                </a:solidFill>
+              </a:rPr>
+              <a:t> for instant demos.
 • Authentication: Firebase Auth SDK (v11) with role-based logins for Teachers, Students, and Admin.
 • Artificial Intelligence: Google Gemini API powering the 24/7 instant doubt resolution desk.
-• SEO &amp; Discovery: Google Business Profile optimization, Schema.org EducationalOrganization JSON-LD.</a:t>
+• SEO &amp; Discovery: Google Business Profile optimization, </a:t>
+            </a:r>
+            <a:r>
+              <a:rPr sz="1400" b="0" dirty="0" err="1">
+                <a:solidFill>
+                  <a:srgbClr val="334155"/>
+                </a:solidFill>
+              </a:rPr>
+              <a:t>Schema.org</a:t>
+            </a:r>
+            <a:r>
+              <a:rPr sz="1400" b="0" dirty="0">
+                <a:solidFill>
+                  <a:srgbClr val="334155"/>
+                </a:solidFill>
+              </a:rPr>
+              <a:t> </a:t>
+            </a:r>
+            <a:r>
+              <a:rPr sz="1400" b="0" dirty="0" err="1">
+                <a:solidFill>
+                  <a:srgbClr val="334155"/>
+                </a:solidFill>
+              </a:rPr>
+              <a:t>EducationalOrganization</a:t>
+            </a:r>
+            <a:r>
+              <a:rPr sz="1400" b="0" dirty="0">
+                <a:solidFill>
+                  <a:srgbClr val="334155"/>
+                </a:solidFill>
+              </a:rPr>
+              <a:t> JSON-LD.</a:t>
             </a:r>
           </a:p>
         </p:txBody>
@@ -7710,8 +8222,8 @@
         </p:nvSpPr>
         <p:spPr>
           <a:xfrm>
-            <a:off x="640080" y="1234440"/>
-            <a:ext cx="4297680" cy="4480560"/>
+            <a:off x="72009" y="1234440"/>
+            <a:ext cx="9071990" cy="4733219"/>
           </a:xfrm>
           <a:prstGeom prst="rect">
             <a:avLst/>
@@ -7736,14 +8248,32 @@
               </a:spcAft>
             </a:pPr>
             <a:r>
-              <a:rPr b="1" sz="1400">
+              <a:rPr sz="1600" b="1" dirty="0">
                 <a:solidFill>
                   <a:srgbClr val="003366"/>
                 </a:solidFill>
               </a:rPr>
               <a:t>System Architecture &amp; Operational Flow</a:t>
             </a:r>
-            <a:endParaRPr lang="en-US" sz="2800" kern="100" dirty="0">
+            <a:endParaRPr lang="en-US" sz="1600" b="1" dirty="0">
+              <a:solidFill>
+                <a:srgbClr val="003366"/>
+              </a:solidFill>
+            </a:endParaRPr>
+          </a:p>
+          <a:p>
+            <a:pPr marL="0" marR="0" algn="just" fontAlgn="base">
+              <a:lnSpc>
+                <a:spcPct val="107000"/>
+              </a:lnSpc>
+              <a:spcBef>
+                <a:spcPts val="0"/>
+              </a:spcBef>
+              <a:spcAft>
+                <a:spcPts val="200"/>
+              </a:spcAft>
+            </a:pPr>
+            <a:endParaRPr lang="en-US" sz="1600" kern="100" dirty="0">
               <a:effectLst/>
               <a:latin typeface="+mj-lt"/>
               <a:ea typeface="Calibri" panose="020F0502020204030204" pitchFamily="34" charset="0"/>
@@ -7757,15 +8287,95 @@
               </a:spcAft>
             </a:pPr>
             <a:r>
-              <a:rPr b="0" sz="1150">
+              <a:rPr sz="1600" b="0" dirty="0">
                 <a:solidFill>
                   <a:srgbClr val="334155"/>
                 </a:solidFill>
               </a:rPr>
-              <a:t>• 1. Public Discovery: Parents discover Prime Learning via Google Maps or website, inspect batch timings, and view verified reviews.
-• 2. Free Trial Booking: Parents book a 3-Day Demo Class; system generates a printable Demo Pass with QR code.
-• 3. Lead Conversion CRM: Admin logs trial attendance, tracks student interest, and triggers personalized WhatsApp feedback.
-• 4. Student &amp; Parent Portals: Visual CBSE attendance health meter (&gt;75%), report cards, practice quizzes, and digital fee receipts.
+              <a:t>• 1. Public Discovery: Parents discover Prime Learning via Google Maps or website, inspect batch timings, and view verified reviews.</a:t>
+            </a:r>
+            <a:endParaRPr lang="en-US" sz="1600" b="0" dirty="0">
+              <a:solidFill>
+                <a:srgbClr val="334155"/>
+              </a:solidFill>
+            </a:endParaRPr>
+          </a:p>
+          <a:p>
+            <a:pPr lvl="1">
+              <a:spcAft>
+                <a:spcPts val="600"/>
+              </a:spcAft>
+            </a:pPr>
+            <a:r>
+              <a:rPr sz="1600" b="0" dirty="0">
+                <a:solidFill>
+                  <a:srgbClr val="334155"/>
+                </a:solidFill>
+              </a:rPr>
+              <a:t>
+• 2. Free Trial Booking: Parents book a 3-Day Demo Class; system generates a printable Demo Pass with QR code.</a:t>
+            </a:r>
+            <a:endParaRPr lang="en-US" sz="1600" b="0" dirty="0">
+              <a:solidFill>
+                <a:srgbClr val="334155"/>
+              </a:solidFill>
+            </a:endParaRPr>
+          </a:p>
+          <a:p>
+            <a:pPr lvl="1">
+              <a:spcAft>
+                <a:spcPts val="600"/>
+              </a:spcAft>
+            </a:pPr>
+            <a:r>
+              <a:rPr sz="1600" b="0" dirty="0">
+                <a:solidFill>
+                  <a:srgbClr val="334155"/>
+                </a:solidFill>
+              </a:rPr>
+              <a:t>
+• 3. Lead Conversion CRM: Admin logs trial attendance, tracks student interest, and triggers personalized WhatsApp feedback.</a:t>
+            </a:r>
+            <a:endParaRPr lang="en-US" sz="1600" b="0" dirty="0">
+              <a:solidFill>
+                <a:srgbClr val="334155"/>
+              </a:solidFill>
+            </a:endParaRPr>
+          </a:p>
+          <a:p>
+            <a:pPr lvl="1">
+              <a:spcAft>
+                <a:spcPts val="600"/>
+              </a:spcAft>
+            </a:pPr>
+            <a:r>
+              <a:rPr sz="1600" b="0" dirty="0">
+                <a:solidFill>
+                  <a:srgbClr val="334155"/>
+                </a:solidFill>
+              </a:rPr>
+              <a:t>
+• 4. Student &amp; Parent Portals: Visual CBSE attendance health meter (&gt;75%), report cards, practice quizzes, and digital fee receipts.</a:t>
+            </a:r>
+            <a:endParaRPr lang="en-US" sz="1600" b="0" dirty="0">
+              <a:solidFill>
+                <a:srgbClr val="334155"/>
+              </a:solidFill>
+            </a:endParaRPr>
+          </a:p>
+          <a:p>
+            <a:pPr lvl="1">
+              <a:spcAft>
+                <a:spcPts val="600"/>
+              </a:spcAft>
+            </a:pPr>
+            <a:r>
+              <a:rPr sz="1600" b="0" dirty="0">
+                <a:solidFill>
+                  <a:srgbClr val="334155"/>
+                </a:solidFill>
+              </a:rPr>
+              <a:t>
 • 5. Teacher Tools: Camera QR scanner for attendance, batch gradebooks, and instant study material sharing.</a:t>
             </a:r>
           </a:p>
@@ -8071,8 +8681,8 @@
         </p:nvSpPr>
         <p:spPr>
           <a:xfrm>
-            <a:off x="731520" y="1234440"/>
-            <a:ext cx="7680960" cy="4480560"/>
+            <a:off x="72009" y="1234440"/>
+            <a:ext cx="9071990" cy="4057201"/>
           </a:xfrm>
           <a:prstGeom prst="rect">
             <a:avLst/>
@@ -8097,14 +8707,14 @@
               </a:spcAft>
             </a:pPr>
             <a:r>
-              <a:rPr b="1" sz="1400">
+              <a:rPr sz="1400" b="1" dirty="0">
                 <a:solidFill>
                   <a:srgbClr val="003366"/>
                 </a:solidFill>
               </a:rPr>
               <a:t>Weeks 1–3: Project Inception &amp; Field Survey</a:t>
             </a:r>
-            <a:endParaRPr lang="en-US" sz="2800" kern="100" dirty="0">
+            <a:endParaRPr lang="en-US" sz="1400" kern="100" dirty="0">
               <a:effectLst/>
               <a:latin typeface="+mj-lt"/>
               <a:ea typeface="Calibri" panose="020F0502020204030204" pitchFamily="34" charset="0"/>
@@ -8118,13 +8728,30 @@
               </a:spcAft>
             </a:pPr>
             <a:r>
-              <a:rPr b="0" sz="1200">
+              <a:rPr sz="1400" b="0" dirty="0">
                 <a:solidFill>
                   <a:srgbClr val="334155"/>
                 </a:solidFill>
               </a:rPr>
               <a:t>Visited Sector-22B coaching center, interviewed Praveen Sir and Rashmi Ma'am, analyzed existing manual record keeping, mapped out core visibility challenges, and aligned with UN SDGs 4, 8 &amp; 9.</a:t>
             </a:r>
+            <a:endParaRPr lang="en-US" sz="1400" b="0" dirty="0">
+              <a:solidFill>
+                <a:srgbClr val="334155"/>
+              </a:solidFill>
+            </a:endParaRPr>
+          </a:p>
+          <a:p>
+            <a:pPr lvl="1">
+              <a:spcAft>
+                <a:spcPts val="800"/>
+              </a:spcAft>
+            </a:pPr>
+            <a:endParaRPr sz="1400" b="0" dirty="0">
+              <a:solidFill>
+                <a:srgbClr val="334155"/>
+              </a:solidFill>
+            </a:endParaRPr>
           </a:p>
           <a:p>
             <a:pPr>
@@ -8133,7 +8760,7 @@
               </a:spcAft>
             </a:pPr>
             <a:r>
-              <a:rPr b="1" sz="1400">
+              <a:rPr sz="1400" b="1" dirty="0">
                 <a:solidFill>
                   <a:srgbClr val="003366"/>
                 </a:solidFill>
@@ -8148,13 +8775,30 @@
               </a:spcAft>
             </a:pPr>
             <a:r>
-              <a:rPr b="0" sz="1200">
+              <a:rPr sz="1400" b="0" dirty="0">
                 <a:solidFill>
                   <a:srgbClr val="334155"/>
                 </a:solidFill>
               </a:rPr>
               <a:t>Developed core website with course details, batch timings, and transparent fee tables. Configured Google Business Profile location and built the 1-click Google review helper for parents.</a:t>
             </a:r>
+            <a:endParaRPr lang="en-US" sz="1400" b="0" dirty="0">
+              <a:solidFill>
+                <a:srgbClr val="334155"/>
+              </a:solidFill>
+            </a:endParaRPr>
+          </a:p>
+          <a:p>
+            <a:pPr lvl="1">
+              <a:spcAft>
+                <a:spcPts val="800"/>
+              </a:spcAft>
+            </a:pPr>
+            <a:endParaRPr sz="1400" b="0" dirty="0">
+              <a:solidFill>
+                <a:srgbClr val="334155"/>
+              </a:solidFill>
+            </a:endParaRPr>
           </a:p>
           <a:p>
             <a:pPr>
@@ -8163,7 +8807,7 @@
               </a:spcAft>
             </a:pPr>
             <a:r>
-              <a:rPr b="1" sz="1400">
+              <a:rPr sz="1400" b="1" dirty="0">
                 <a:solidFill>
                   <a:srgbClr val="003366"/>
                 </a:solidFill>
@@ -8178,13 +8822,30 @@
               </a:spcAft>
             </a:pPr>
             <a:r>
-              <a:rPr b="0" sz="1200">
+              <a:rPr sz="1400" b="0" dirty="0">
                 <a:solidFill>
                   <a:srgbClr val="334155"/>
                 </a:solidFill>
               </a:rPr>
               <a:t>Implemented the 3-day demo registration pipeline, printable trial admit cards, automated WhatsApp parent follow-ups, and Marketing Studio for printable society notice board flyers.</a:t>
             </a:r>
+            <a:endParaRPr lang="en-US" sz="1400" b="0" dirty="0">
+              <a:solidFill>
+                <a:srgbClr val="334155"/>
+              </a:solidFill>
+            </a:endParaRPr>
+          </a:p>
+          <a:p>
+            <a:pPr lvl="1">
+              <a:spcAft>
+                <a:spcPts val="800"/>
+              </a:spcAft>
+            </a:pPr>
+            <a:endParaRPr sz="1400" b="0" dirty="0">
+              <a:solidFill>
+                <a:srgbClr val="334155"/>
+              </a:solidFill>
+            </a:endParaRPr>
           </a:p>
           <a:p>
             <a:pPr>
@@ -8193,7 +8854,7 @@
               </a:spcAft>
             </a:pPr>
             <a:r>
-              <a:rPr b="1" sz="1400">
+              <a:rPr sz="1400" b="1" dirty="0">
                 <a:solidFill>
                   <a:srgbClr val="003366"/>
                 </a:solidFill>
@@ -8208,12 +8869,12 @@
               </a:spcAft>
             </a:pPr>
             <a:r>
-              <a:rPr b="0" sz="1200">
+              <a:rPr sz="1400" b="0" dirty="0">
                 <a:solidFill>
                   <a:srgbClr val="334155"/>
                 </a:solidFill>
               </a:rPr>
-              <a:t>Conducted pilot with 14 student inquiries (66.7% trial conversion), trained teachers on dashboard use, compiled university documentation, and prepared final presentation.</a:t>
+              <a:t>Conducted pilot with 14 student inquiries, trained teachers on dashboard use, compiled university documentation, and prepared final presentation.</a:t>
             </a:r>
           </a:p>
         </p:txBody>
@@ -8488,8 +9149,8 @@
         </p:nvSpPr>
         <p:spPr>
           <a:xfrm>
-            <a:off x="731520" y="1234440"/>
-            <a:ext cx="7680960" cy="4480560"/>
+            <a:off x="72009" y="1234440"/>
+            <a:ext cx="9071990" cy="4529125"/>
           </a:xfrm>
           <a:prstGeom prst="rect">
             <a:avLst/>
@@ -8514,14 +9175,14 @@
               </a:spcAft>
             </a:pPr>
             <a:r>
-              <a:rPr b="1" sz="1450">
+              <a:rPr sz="1400" b="1" dirty="0">
                 <a:solidFill>
                   <a:srgbClr val="003366"/>
                 </a:solidFill>
               </a:rPr>
               <a:t>Data Handled by the Platform</a:t>
             </a:r>
-            <a:endParaRPr lang="en-US" sz="2800" kern="100" dirty="0">
+            <a:endParaRPr lang="en-US" sz="1400" kern="100" dirty="0">
               <a:effectLst/>
               <a:latin typeface="+mj-lt"/>
               <a:ea typeface="Calibri" panose="020F0502020204030204" pitchFamily="34" charset="0"/>
@@ -8535,7 +9196,7 @@
               </a:spcAft>
             </a:pPr>
             <a:r>
-              <a:rPr b="0" sz="1200">
+              <a:rPr sz="1400" b="0" dirty="0">
                 <a:solidFill>
                   <a:srgbClr val="334155"/>
                 </a:solidFill>
@@ -8545,6 +9206,35 @@
 • Academic Logs: Daily attendance records, test marks, percentage history, and PTM slot reservations.
 • Educational Resources: Uploaded PDF notes, CBSE syllabus revision sheets, and practice quiz questions.</a:t>
             </a:r>
+            <a:endParaRPr lang="en-US" sz="1400" b="0" dirty="0">
+              <a:solidFill>
+                <a:srgbClr val="334155"/>
+              </a:solidFill>
+            </a:endParaRPr>
+          </a:p>
+          <a:p>
+            <a:pPr lvl="1">
+              <a:spcAft>
+                <a:spcPts val="1000"/>
+              </a:spcAft>
+            </a:pPr>
+            <a:endParaRPr lang="en-US" sz="1400" b="0" dirty="0">
+              <a:solidFill>
+                <a:srgbClr val="334155"/>
+              </a:solidFill>
+            </a:endParaRPr>
+          </a:p>
+          <a:p>
+            <a:pPr lvl="1">
+              <a:spcAft>
+                <a:spcPts val="1000"/>
+              </a:spcAft>
+            </a:pPr>
+            <a:endParaRPr sz="1400" b="0" dirty="0">
+              <a:solidFill>
+                <a:srgbClr val="334155"/>
+              </a:solidFill>
+            </a:endParaRPr>
           </a:p>
           <a:p>
             <a:pPr>
@@ -8553,7 +9243,7 @@
               </a:spcAft>
             </a:pPr>
             <a:r>
-              <a:rPr b="1" sz="1450">
+              <a:rPr sz="1400" b="1" dirty="0">
                 <a:solidFill>
                   <a:srgbClr val="003366"/>
                 </a:solidFill>
@@ -8568,12 +9258,44 @@
               </a:spcAft>
             </a:pPr>
             <a:r>
-              <a:rPr b="0" sz="1200">
+              <a:rPr sz="1400" b="0" dirty="0">
                 <a:solidFill>
                   <a:srgbClr val="334155"/>
                 </a:solidFill>
               </a:rPr>
-              <a:t>• Cloud Services: Vercel Edge hosting, Supabase PostgreSQL database, and Firebase Authentication (all within 100% free tiers with zero cost to teachers).
+              <a:t>• Cloud Services: </a:t>
+            </a:r>
+            <a:r>
+              <a:rPr sz="1400" b="0" dirty="0" err="1">
+                <a:solidFill>
+                  <a:srgbClr val="334155"/>
+                </a:solidFill>
+              </a:rPr>
+              <a:t>Vercel</a:t>
+            </a:r>
+            <a:r>
+              <a:rPr sz="1400" b="0" dirty="0">
+                <a:solidFill>
+                  <a:srgbClr val="334155"/>
+                </a:solidFill>
+              </a:rPr>
+              <a:t> Edge hosting, </a:t>
+            </a:r>
+            <a:r>
+              <a:rPr sz="1400" b="0" dirty="0" err="1">
+                <a:solidFill>
+                  <a:srgbClr val="334155"/>
+                </a:solidFill>
+              </a:rPr>
+              <a:t>Supabase</a:t>
+            </a:r>
+            <a:r>
+              <a:rPr sz="1400" b="0" dirty="0">
+                <a:solidFill>
+                  <a:srgbClr val="334155"/>
+                </a:solidFill>
+              </a:rPr>
+              <a:t> PostgreSQL database, and Firebase Authentication (all within 100% free tiers with zero cost to teachers).
 • Artificial Intelligence: Google Gemini API for 24/7 syllabus-aligned doubt resolution.
 • Physical Marketing Materials: Printable A4 demo flyers, reception desk QR standees, and society bulletin board posters.
 • Device Compatibility: Tested and fully responsive across mobile phones (Android/iOS) and desktop browsers.</a:t>
